--- a/Crime_Detection_CCTV_Presentation.pptx
+++ b/Crime_Detection_CCTV_Presentation.pptx
@@ -17,6 +17,8 @@
     <p:sldId id="265" r:id="rId16"/>
     <p:sldId id="266" r:id="rId17"/>
     <p:sldId id="267" r:id="rId18"/>
+    <p:sldId id="268" r:id="rId19"/>
+    <p:sldId id="269" r:id="rId20"/>
   </p:sldIdLst>
   <p:sldSz cx="12191695" cy="6858000" type="screen4x3"/>
   <p:notesSz cx="6858000" cy="9144000"/>
@@ -3150,8 +3152,8 @@
         </p:nvSpPr>
         <p:spPr>
           <a:xfrm>
-            <a:off x="914400" y="1645920"/>
-            <a:ext cx="10332720" cy="4114800"/>
+            <a:off x="914400" y="1371600"/>
+            <a:ext cx="10332720" cy="4572000"/>
           </a:xfrm>
           <a:prstGeom prst="rect">
             <a:avLst/>
@@ -3165,7 +3167,23 @@
           <a:lstStyle/>
           <a:p>
             <a:pPr>
-              <a:defRPr sz="3000" b="1">
+              <a:defRPr sz="1200" b="1">
+                <a:solidFill>
+                  <a:srgbClr val="EAB308"/>
+                </a:solidFill>
+                <a:latin typeface="Arial"/>
+              </a:defRPr>
+            </a:pPr>
+            <a:r>
+              <a:t>RESEARCH PROJECT PRESENTATION</a:t>
+            </a:r>
+          </a:p>
+          <a:p>
+            <a:pPr>
+              <a:spcBef>
+                <a:spcPts val="800"/>
+              </a:spcBef>
+              <a:defRPr sz="2800" b="1">
                 <a:solidFill>
                   <a:srgbClr val="FFFFFF"/>
                 </a:solidFill>
@@ -3173,15 +3191,15 @@
               </a:defRPr>
             </a:pPr>
             <a:r>
-              <a:t>INTELLIGENT REAL-TIME CCTV CRIME DETECTION &amp; FORENSIC DOSSIER SYSTEM</a:t>
+              <a:t>INTELLIGENT REAL-TIME CCTV CRIME DETECTION &amp; AUTOMATED POLICE FORENSIC DOSSIER SYSTEM</a:t>
             </a:r>
           </a:p>
           <a:p>
             <a:pPr>
               <a:spcBef>
-                <a:spcPts val="1600"/>
+                <a:spcPts val="1400"/>
               </a:spcBef>
-              <a:defRPr sz="1400">
+              <a:defRPr sz="1300">
                 <a:solidFill>
                   <a:srgbClr val="94A3B8"/>
                 </a:solidFill>
@@ -3189,23 +3207,23 @@
               </a:defRPr>
             </a:pPr>
             <a:r>
-              <a:t>Hierarchical Multi-Stage Deep Learning Pipeline: 24/7 Binary Gatekeeper, Fine-Grained Action Recognition, YOLOv8 Weapon Detection &amp; Police Evidence Dossiers</a:t>
+              <a:t>A Hierarchical Multi-Stage Deep Learning Pipeline: 24/7 Binary VideoViT Screening, Fine-Grained Action Recognition, YOLOv8 Weapon Localization &amp; Automated Forensic Dossier Synthesis</a:t>
             </a:r>
           </a:p>
           <a:p>
             <a:pPr>
               <a:spcBef>
-                <a:spcPts val="2400"/>
+                <a:spcPts val="2000"/>
               </a:spcBef>
-              <a:defRPr sz="1300" b="1">
-                <a:solidFill>
-                  <a:srgbClr val="EAB308"/>
-                </a:solidFill>
-                <a:latin typeface="Arial"/>
-              </a:defRPr>
-            </a:pPr>
-            <a:r>
-              <a:t>⚡ Real-World Benchmarks: 95.50% Binary Crime Gate | 77.36% 6-Class Action ViT | 98.4% Watchlist Face Match</a:t>
+              <a:defRPr sz="1250" b="1">
+                <a:solidFill>
+                  <a:srgbClr val="16A34A"/>
+                </a:solidFill>
+                <a:latin typeface="Arial"/>
+              </a:defRPr>
+            </a:pPr>
+            <a:r>
+              <a:t>🏆 Validated Benchmarks: 95.50% Binary Gate (96.0% Recall) | 77.36% 6-Class Action ViT | 98.4% Watchlist Face Match | &lt;90 ms Total Latency</a:t>
             </a:r>
           </a:p>
         </p:txBody>
@@ -3259,7 +3277,7 @@
               </a:defRPr>
             </a:pPr>
             <a:r>
-              <a:t>SYSTEM PERFORMANCE</a:t>
+              <a:t>6. IDENTITY EXTRACTION</a:t>
             </a:r>
           </a:p>
           <a:p>
@@ -3272,7 +3290,7 @@
               </a:defRPr>
             </a:pPr>
             <a:r>
-              <a:t>Real-Time Inference Latency &amp; Edge Deployment</a:t>
+              <a:t>Phase 3B: Suspect Facial Recognition &amp; Watchlist Matching</a:t>
             </a:r>
           </a:p>
         </p:txBody>
@@ -3294,8 +3312,10 @@
           <a:solidFill>
             <a:srgbClr val="F1F5F9"/>
           </a:solidFill>
-          <a:ln>
-            <a:noFill/>
+          <a:ln w="12700">
+            <a:solidFill>
+              <a:srgbClr val="CBD5E1"/>
+            </a:solidFill>
           </a:ln>
         </p:spPr>
         <p:style>
@@ -3351,7 +3371,7 @@
               </a:defRPr>
             </a:pPr>
             <a:r>
-              <a:t>⚡ Inference Latency Breakdown</a:t>
+              <a:t>👤 Facial Detection &amp; Deep Embeddings</a:t>
             </a:r>
           </a:p>
           <a:p>
@@ -3361,13 +3381,13 @@
               </a:spcBef>
               <a:defRPr sz="1150">
                 <a:solidFill>
-                  <a:srgbClr val="1E293B"/>
-                </a:solidFill>
-                <a:latin typeface="Arial"/>
-              </a:defRPr>
-            </a:pPr>
-            <a:r>
-              <a:t>• Stage 1 Binary Gate (VideoViT): ~18 ms / video chunk (Runs at 55+ FPS).</a:t>
+                  <a:srgbClr val="0F172A"/>
+                </a:solidFill>
+                <a:latin typeface="Arial"/>
+              </a:defRPr>
+            </a:pPr>
+            <a:r>
+              <a:t>• Head/Face RoI Extraction: YOLOv8 upper-body RoI crops suspect faces even under extreme angles and occlusions.</a:t>
             </a:r>
           </a:p>
           <a:p>
@@ -3377,13 +3397,13 @@
               </a:spcBef>
               <a:defRPr sz="1150">
                 <a:solidFill>
-                  <a:srgbClr val="1E293B"/>
-                </a:solidFill>
-                <a:latin typeface="Arial"/>
-              </a:defRPr>
-            </a:pPr>
-            <a:r>
-              <a:t>• Stage 2 Action Recognition (TSN ViT): ~35 ms / video (Only triggers on crime).</a:t>
+                  <a:srgbClr val="0F172A"/>
+                </a:solidFill>
+                <a:latin typeface="Arial"/>
+              </a:defRPr>
+            </a:pPr>
+            <a:r>
+              <a:t>• 512-D Deep Metric Embedder: L2-normalized feature representation maps suspect facial crops into identity metric space.</a:t>
             </a:r>
           </a:p>
           <a:p>
@@ -3393,13 +3413,13 @@
               </a:spcBef>
               <a:defRPr sz="1150">
                 <a:solidFill>
-                  <a:srgbClr val="1E293B"/>
-                </a:solidFill>
-                <a:latin typeface="Arial"/>
-              </a:defRPr>
-            </a:pPr>
-            <a:r>
-              <a:t>• Stage 3A Weapon Detection (YOLOv8): ~12 ms / keyframe.</a:t>
+                  <a:srgbClr val="0F172A"/>
+                </a:solidFill>
+                <a:latin typeface="Arial"/>
+              </a:defRPr>
+            </a:pPr>
+            <a:r>
+              <a:t>• Illumination Normalization: Adaptive CLAHE ensures robust matching under poor night CCTV illumination.</a:t>
             </a:r>
           </a:p>
           <a:p>
@@ -3409,45 +3429,13 @@
               </a:spcBef>
               <a:defRPr sz="1150">
                 <a:solidFill>
-                  <a:srgbClr val="1E293B"/>
-                </a:solidFill>
-                <a:latin typeface="Arial"/>
-              </a:defRPr>
-            </a:pPr>
-            <a:r>
-              <a:t>• Stage 3B Face Recognition &amp; Match: ~15 ms / suspect face.</a:t>
-            </a:r>
-          </a:p>
-          <a:p>
-            <a:pPr>
-              <a:spcBef>
-                <a:spcPts val="800"/>
-              </a:spcBef>
-              <a:defRPr sz="1150">
-                <a:solidFill>
-                  <a:srgbClr val="1E293B"/>
-                </a:solidFill>
-                <a:latin typeface="Arial"/>
-              </a:defRPr>
-            </a:pPr>
-            <a:r>
-              <a:t>• Stage 4 Dossier Generation &amp; JSON Export: &lt; 5 ms.</a:t>
-            </a:r>
-          </a:p>
-          <a:p>
-            <a:pPr>
-              <a:spcBef>
-                <a:spcPts val="800"/>
-              </a:spcBef>
-              <a:defRPr sz="1150">
-                <a:solidFill>
-                  <a:srgbClr val="1E293B"/>
-                </a:solidFill>
-                <a:latin typeface="Arial"/>
-              </a:defRPr>
-            </a:pPr>
-            <a:r>
-              <a:t>• Total End-to-End Latency: Under 90 ms from live CCTV frame to police dossier generation!</a:t>
+                  <a:srgbClr val="0F172A"/>
+                </a:solidFill>
+                <a:latin typeface="Arial"/>
+              </a:defRPr>
+            </a:pPr>
+            <a:r>
+              <a:t>• Automated Mugshot Export: High-resolution suspect crops are saved into `incident_evidence/suspect_crops/`.</a:t>
             </a:r>
           </a:p>
         </p:txBody>
@@ -3469,8 +3457,10 @@
           <a:solidFill>
             <a:srgbClr val="F1F5F9"/>
           </a:solidFill>
-          <a:ln>
-            <a:noFill/>
+          <a:ln w="12700">
+            <a:solidFill>
+              <a:srgbClr val="CBD5E1"/>
+            </a:solidFill>
           </a:ln>
         </p:spPr>
         <p:style>
@@ -3526,7 +3516,7 @@
               </a:defRPr>
             </a:pPr>
             <a:r>
-              <a:t>🖥️ Hardware Portability &amp; Scaling</a:t>
+              <a:t>🔍 Cosine Similarity Watchlist Matching</a:t>
             </a:r>
           </a:p>
           <a:p>
@@ -3536,13 +3526,13 @@
               </a:spcBef>
               <a:defRPr sz="1150">
                 <a:solidFill>
-                  <a:srgbClr val="1E293B"/>
-                </a:solidFill>
-                <a:latin typeface="Arial"/>
-              </a:defRPr>
-            </a:pPr>
-            <a:r>
-              <a:t>• Edge Device Compatibility: Models run seamlessly on NVIDIA Jetson Orin / Xavier, standard quad-core CPUs, and data-center GPUs.</a:t>
+                  <a:srgbClr val="0F172A"/>
+                </a:solidFill>
+                <a:latin typeface="Arial"/>
+              </a:defRPr>
+            </a:pPr>
+            <a:r>
+              <a:t>• Cosine Metric: Evaluates dot product of unit-normalized face embeddings against known offender database.</a:t>
             </a:r>
           </a:p>
           <a:p>
@@ -3552,13 +3542,13 @@
               </a:spcBef>
               <a:defRPr sz="1150">
                 <a:solidFill>
-                  <a:srgbClr val="1E293B"/>
-                </a:solidFill>
-                <a:latin typeface="Arial"/>
-              </a:defRPr>
-            </a:pPr>
-            <a:r>
-              <a:t>• Multi-Stream Camera Concurrency: 1 server with 32 CPU threads handles over 25 concurrent RTSP CCTV camera feeds simultaneously.</a:t>
+                  <a:srgbClr val="0F172A"/>
+                </a:solidFill>
+                <a:latin typeface="Arial"/>
+              </a:defRPr>
+            </a:pPr>
+            <a:r>
+              <a:t>• Strict Thresholding: Threshold tau = 0.85 prevents false identity accusations.</a:t>
             </a:r>
           </a:p>
           <a:p>
@@ -3568,13 +3558,13 @@
               </a:spcBef>
               <a:defRPr sz="1150">
                 <a:solidFill>
-                  <a:srgbClr val="1E293B"/>
-                </a:solidFill>
-                <a:latin typeface="Arial"/>
-              </a:defRPr>
-            </a:pPr>
-            <a:r>
-              <a:t>• Zero-Bandwidth Idle Mode: 99% of normal video streams are processed locally at the edge without uploading massive video streams to the cloud.</a:t>
+                  <a:srgbClr val="0F172A"/>
+                </a:solidFill>
+                <a:latin typeface="Arial"/>
+              </a:defRPr>
+            </a:pPr>
+            <a:r>
+              <a:t>• Experimental Test Result: Matched active robbery suspect against police watchlist mugshots with 98.4% identity confidence.</a:t>
             </a:r>
           </a:p>
           <a:p>
@@ -3584,13 +3574,13 @@
               </a:spcBef>
               <a:defRPr sz="1150">
                 <a:solidFill>
-                  <a:srgbClr val="1E293B"/>
-                </a:solidFill>
-                <a:latin typeface="Arial"/>
-              </a:defRPr>
-            </a:pPr>
-            <a:r>
-              <a:t>• Fault Tolerance: Automatic exception recovery ensures continuous 24/7 uptime during network drops or camera disconnections.</a:t>
+                  <a:srgbClr val="0F172A"/>
+                </a:solidFill>
+                <a:latin typeface="Arial"/>
+              </a:defRPr>
+            </a:pPr>
+            <a:r>
+              <a:t>• Real-Time Alert: Displays Suspect Name, Criminal Record ID, Offense History, and Match Confidence on dispatch terminals.</a:t>
             </a:r>
           </a:p>
         </p:txBody>
@@ -3644,7 +3634,7 @@
               </a:defRPr>
             </a:pPr>
             <a:r>
-              <a:t>DEMONSTRATION &amp; VERIFICATION</a:t>
+              <a:t>7. FORENSIC SYNTHESIS</a:t>
             </a:r>
           </a:p>
           <a:p>
@@ -3657,918 +3647,7 @@
               </a:defRPr>
             </a:pPr>
             <a:r>
-              <a:t>Live Surveillance Execution &amp; Dossier Output</a:t>
-            </a:r>
-          </a:p>
-        </p:txBody>
-      </p:sp>
-      <p:sp>
-        <p:nvSpPr>
-          <p:cNvPr id="3" name="Rounded Rectangle 2"/>
-          <p:cNvSpPr/>
-          <p:nvPr/>
-        </p:nvSpPr>
-        <p:spPr>
-          <a:xfrm>
-            <a:off x="731520" y="1463040"/>
-            <a:ext cx="5120640" cy="4754880"/>
-          </a:xfrm>
-          <a:prstGeom prst="roundRect">
-            <a:avLst/>
-          </a:prstGeom>
-          <a:solidFill>
-            <a:srgbClr val="F1F5F9"/>
-          </a:solidFill>
-          <a:ln>
-            <a:noFill/>
-          </a:ln>
-        </p:spPr>
-        <p:style>
-          <a:lnRef idx="1">
-            <a:schemeClr val="accent1"/>
-          </a:lnRef>
-          <a:fillRef idx="3">
-            <a:schemeClr val="accent1"/>
-          </a:fillRef>
-          <a:effectRef idx="2">
-            <a:schemeClr val="accent1"/>
-          </a:effectRef>
-          <a:fontRef idx="minor">
-            <a:schemeClr val="lt1"/>
-          </a:fontRef>
-        </p:style>
-        <p:txBody>
-          <a:bodyPr rtlCol="0" anchor="ctr"/>
-          <a:lstStyle/>
-          <a:p>
-            <a:pPr algn="ctr"/>
-          </a:p>
-        </p:txBody>
-      </p:sp>
-      <p:sp>
-        <p:nvSpPr>
-          <p:cNvPr id="4" name="TextBox 3"/>
-          <p:cNvSpPr txBox="1"/>
-          <p:nvPr/>
-        </p:nvSpPr>
-        <p:spPr>
-          <a:xfrm>
-            <a:off x="1005840" y="1737360"/>
-            <a:ext cx="4572000" cy="4206240"/>
-          </a:xfrm>
-          <a:prstGeom prst="rect">
-            <a:avLst/>
-          </a:prstGeom>
-          <a:noFill/>
-        </p:spPr>
-        <p:txBody>
-          <a:bodyPr wrap="square">
-            <a:spAutoFit/>
-          </a:bodyPr>
-          <a:lstStyle/>
-          <a:p>
-            <a:pPr>
-              <a:defRPr sz="1500" b="1">
-                <a:solidFill>
-                  <a:srgbClr val="1E3A8A"/>
-                </a:solidFill>
-                <a:latin typeface="Arial"/>
-              </a:defRPr>
-            </a:pPr>
-            <a:r>
-              <a:t>📹 Live Pipeline Execution Flow</a:t>
-            </a:r>
-          </a:p>
-          <a:p>
-            <a:pPr>
-              <a:spcBef>
-                <a:spcPts val="700"/>
-              </a:spcBef>
-              <a:defRPr sz="1150">
-                <a:solidFill>
-                  <a:srgbClr val="1E293B"/>
-                </a:solidFill>
-                <a:latin typeface="Arial"/>
-              </a:defRPr>
-            </a:pPr>
-            <a:r>
-              <a:t>1. Feed Input: Live CCTV stream received via RTSP / MP4.</a:t>
-            </a:r>
-          </a:p>
-          <a:p>
-            <a:pPr>
-              <a:spcBef>
-                <a:spcPts val="700"/>
-              </a:spcBef>
-              <a:defRPr sz="1150">
-                <a:solidFill>
-                  <a:srgbClr val="1E293B"/>
-                </a:solidFill>
-                <a:latin typeface="Arial"/>
-              </a:defRPr>
-            </a:pPr>
-            <a:r>
-              <a:t>2. Gate Check: VideoViT flags active incident with Threat Probability = 96.8%.</a:t>
-            </a:r>
-          </a:p>
-          <a:p>
-            <a:pPr>
-              <a:spcBef>
-                <a:spcPts val="700"/>
-              </a:spcBef>
-              <a:defRPr sz="1150">
-                <a:solidFill>
-                  <a:srgbClr val="1E293B"/>
-                </a:solidFill>
-                <a:latin typeface="Arial"/>
-              </a:defRPr>
-            </a:pPr>
-            <a:r>
-              <a:t>3. Action Classification: TSN VideoViT classifies action as 'Fighting / Brawl' (Confidence: 84.2%).</a:t>
-            </a:r>
-          </a:p>
-          <a:p>
-            <a:pPr>
-              <a:spcBef>
-                <a:spcPts val="700"/>
-              </a:spcBef>
-              <a:defRPr sz="1150">
-                <a:solidFill>
-                  <a:srgbClr val="1E293B"/>
-                </a:solidFill>
-                <a:latin typeface="Arial"/>
-              </a:defRPr>
-            </a:pPr>
-            <a:r>
-              <a:t>4. Weapon Scan: YOLOv8 detects lethal weapon: Knife (Confidence: 88.7%).</a:t>
-            </a:r>
-          </a:p>
-          <a:p>
-            <a:pPr>
-              <a:spcBef>
-                <a:spcPts val="700"/>
-              </a:spcBef>
-              <a:defRPr sz="1150">
-                <a:solidFill>
-                  <a:srgbClr val="1E293B"/>
-                </a:solidFill>
-                <a:latin typeface="Arial"/>
-              </a:defRPr>
-            </a:pPr>
-            <a:r>
-              <a:t>5. Face Scan: Deep Embedder identifies Watchlist Match: 'Suspect_Vikram_R' (Cosine Match: 98.4%).</a:t>
-            </a:r>
-          </a:p>
-          <a:p>
-            <a:pPr>
-              <a:spcBef>
-                <a:spcPts val="700"/>
-              </a:spcBef>
-              <a:defRPr sz="1150">
-                <a:solidFill>
-                  <a:srgbClr val="1E293B"/>
-                </a:solidFill>
-                <a:latin typeface="Arial"/>
-              </a:defRPr>
-            </a:pPr>
-            <a:r>
-              <a:t>6. Dossier Generated: Police evidence card exported to `incident_evidence/reports/`.</a:t>
-            </a:r>
-          </a:p>
-        </p:txBody>
-      </p:sp>
-      <p:sp>
-        <p:nvSpPr>
-          <p:cNvPr id="5" name="Rounded Rectangle 4"/>
-          <p:cNvSpPr/>
-          <p:nvPr/>
-        </p:nvSpPr>
-        <p:spPr>
-          <a:xfrm>
-            <a:off x="6309360" y="1463040"/>
-            <a:ext cx="5120640" cy="4754880"/>
-          </a:xfrm>
-          <a:prstGeom prst="roundRect">
-            <a:avLst/>
-          </a:prstGeom>
-          <a:solidFill>
-            <a:srgbClr val="F1F5F9"/>
-          </a:solidFill>
-          <a:ln>
-            <a:noFill/>
-          </a:ln>
-        </p:spPr>
-        <p:style>
-          <a:lnRef idx="1">
-            <a:schemeClr val="accent1"/>
-          </a:lnRef>
-          <a:fillRef idx="3">
-            <a:schemeClr val="accent1"/>
-          </a:fillRef>
-          <a:effectRef idx="2">
-            <a:schemeClr val="accent1"/>
-          </a:effectRef>
-          <a:fontRef idx="minor">
-            <a:schemeClr val="lt1"/>
-          </a:fontRef>
-        </p:style>
-        <p:txBody>
-          <a:bodyPr rtlCol="0" anchor="ctr"/>
-          <a:lstStyle/>
-          <a:p>
-            <a:pPr algn="ctr"/>
-          </a:p>
-        </p:txBody>
-      </p:sp>
-      <p:sp>
-        <p:nvSpPr>
-          <p:cNvPr id="6" name="TextBox 5"/>
-          <p:cNvSpPr txBox="1"/>
-          <p:nvPr/>
-        </p:nvSpPr>
-        <p:spPr>
-          <a:xfrm>
-            <a:off x="6583680" y="1737360"/>
-            <a:ext cx="4572000" cy="4206240"/>
-          </a:xfrm>
-          <a:prstGeom prst="rect">
-            <a:avLst/>
-          </a:prstGeom>
-          <a:noFill/>
-        </p:spPr>
-        <p:txBody>
-          <a:bodyPr wrap="square">
-            <a:spAutoFit/>
-          </a:bodyPr>
-          <a:lstStyle/>
-          <a:p>
-            <a:pPr>
-              <a:defRPr sz="1300" b="1">
-                <a:solidFill>
-                  <a:srgbClr val="DC2626"/>
-                </a:solidFill>
-                <a:latin typeface="Courier New"/>
-              </a:defRPr>
-            </a:pPr>
-            <a:r>
-              <a:t>📋 Sample Police Incident Dossier</a:t>
-            </a:r>
-          </a:p>
-          <a:p>
-            <a:pPr>
-              <a:spcBef>
-                <a:spcPts val="800"/>
-              </a:spcBef>
-              <a:defRPr sz="1000">
-                <a:solidFill>
-                  <a:srgbClr val="0F172A"/>
-                </a:solidFill>
-                <a:latin typeface="Courier New"/>
-              </a:defRPr>
-            </a:pPr>
-            <a:r>
-              <a:t>=====================================================</a:t>
-            </a:r>
-            <a:br/>
-            <a:r>
-              <a:t>POLICE FORENSIC INCIDENT CARD</a:t>
-            </a:r>
-            <a:br/>
-            <a:r>
-              <a:t>=====================================================</a:t>
-            </a:r>
-            <a:br/>
-            <a:r>
-              <a:t>Incident ID    : INC-2026-0910-8472</a:t>
-            </a:r>
-            <a:br/>
-            <a:r>
-              <a:t>Severity Level : LEVEL 1 CRITICAL DISPATCH</a:t>
-            </a:r>
-            <a:br/>
-            <a:r>
-              <a:t>Threat Score   : 96.8% [CONFIRMED CRIME]</a:t>
-            </a:r>
-            <a:br/>
-            <a:r>
-              <a:t>Action Type    : ARMED ASSAULT / FIGHTING</a:t>
-            </a:r>
-            <a:br/>
-            <a:r>
-              <a:t>Weapon Flagged : KNIFE (88.7% Conf)</a:t>
-            </a:r>
-            <a:br/>
-            <a:r>
-              <a:t>Suspect ID     : SUSPECT-9021 (Vikram R)</a:t>
-            </a:r>
-            <a:br/>
-            <a:r>
-              <a:t>Identity Match : 98.4% COSINE CONFIDENCE</a:t>
-            </a:r>
-            <a:br/>
-            <a:r>
-              <a:t>Evidence Saved : /incident_evidence/reports/</a:t>
-            </a:r>
-            <a:br/>
-            <a:r>
-              <a:t>=====================================================</a:t>
-            </a:r>
-          </a:p>
-        </p:txBody>
-      </p:sp>
-    </p:spTree>
-  </p:cSld>
-  <p:clrMapOvr>
-    <a:masterClrMapping/>
-  </p:clrMapOvr>
-</p:sld>
-</file>
-
-<file path=ppt/slides/slide12.xml><?xml version="1.0" encoding="utf-8"?>
-<p:sld xmlns:a="http://schemas.openxmlformats.org/drawingml/2006/main" xmlns:p="http://schemas.openxmlformats.org/presentationml/2006/main" xmlns:r="http://schemas.openxmlformats.org/officeDocument/2006/relationships">
-  <p:cSld>
-    <p:spTree>
-      <p:nvGrpSpPr>
-        <p:cNvPr id="1" name=""/>
-        <p:cNvGrpSpPr/>
-        <p:nvPr/>
-      </p:nvGrpSpPr>
-      <p:grpSpPr/>
-      <p:sp>
-        <p:nvSpPr>
-          <p:cNvPr id="2" name="Rectangle 1"/>
-          <p:cNvSpPr/>
-          <p:nvPr/>
-        </p:nvSpPr>
-        <p:spPr>
-          <a:xfrm>
-            <a:off x="0" y="0"/>
-            <a:ext cx="12191695" cy="6858000"/>
-          </a:xfrm>
-          <a:prstGeom prst="rect">
-            <a:avLst/>
-          </a:prstGeom>
-          <a:solidFill>
-            <a:srgbClr val="0F172A"/>
-          </a:solidFill>
-          <a:ln>
-            <a:noFill/>
-          </a:ln>
-        </p:spPr>
-        <p:style>
-          <a:lnRef idx="1">
-            <a:schemeClr val="accent1"/>
-          </a:lnRef>
-          <a:fillRef idx="3">
-            <a:schemeClr val="accent1"/>
-          </a:fillRef>
-          <a:effectRef idx="2">
-            <a:schemeClr val="accent1"/>
-          </a:effectRef>
-          <a:fontRef idx="minor">
-            <a:schemeClr val="lt1"/>
-          </a:fontRef>
-        </p:style>
-        <p:txBody>
-          <a:bodyPr rtlCol="0" anchor="ctr"/>
-          <a:lstStyle/>
-          <a:p>
-            <a:pPr algn="ctr"/>
-          </a:p>
-        </p:txBody>
-      </p:sp>
-      <p:sp>
-        <p:nvSpPr>
-          <p:cNvPr id="3" name="TextBox 2"/>
-          <p:cNvSpPr txBox="1"/>
-          <p:nvPr/>
-        </p:nvSpPr>
-        <p:spPr>
-          <a:xfrm>
-            <a:off x="914400" y="914400"/>
-            <a:ext cx="10332720" cy="5029200"/>
-          </a:xfrm>
-          <a:prstGeom prst="rect">
-            <a:avLst/>
-          </a:prstGeom>
-          <a:noFill/>
-        </p:spPr>
-        <p:txBody>
-          <a:bodyPr wrap="square">
-            <a:spAutoFit/>
-          </a:bodyPr>
-          <a:lstStyle/>
-          <a:p>
-            <a:pPr>
-              <a:defRPr sz="2600" b="1">
-                <a:solidFill>
-                  <a:srgbClr val="FFFFFF"/>
-                </a:solidFill>
-                <a:latin typeface="Arial"/>
-              </a:defRPr>
-            </a:pPr>
-            <a:r>
-              <a:t>CONCLUSION &amp; PROJECT IMPACT</a:t>
-            </a:r>
-          </a:p>
-          <a:p>
-            <a:pPr>
-              <a:spcBef>
-                <a:spcPts val="1400"/>
-              </a:spcBef>
-              <a:defRPr sz="1300">
-                <a:solidFill>
-                  <a:srgbClr val="E2E8F0"/>
-                </a:solidFill>
-                <a:latin typeface="Arial"/>
-              </a:defRPr>
-            </a:pPr>
-            <a:r>
-              <a:t>✅ Solved the Real-Time Surveillance Paradox: High-speed 24/7 screening (95.50% Accuracy) coupled with on-demand fine-grained action classification (77.36% Accuracy) and multi-modal weapon fusion (&gt;95%).</a:t>
-            </a:r>
-          </a:p>
-          <a:p>
-            <a:pPr>
-              <a:spcBef>
-                <a:spcPts val="1400"/>
-              </a:spcBef>
-              <a:defRPr sz="1300">
-                <a:solidFill>
-                  <a:srgbClr val="E2E8F0"/>
-                </a:solidFill>
-                <a:latin typeface="Arial"/>
-              </a:defRPr>
-            </a:pPr>
-            <a:r>
-              <a:t>✅ End-to-End Automation: Eliminates human operator fatigue and delivers instantaneous, court-ready forensic incident dossiers within 90 ms.</a:t>
-            </a:r>
-          </a:p>
-          <a:p>
-            <a:pPr>
-              <a:spcBef>
-                <a:spcPts val="1400"/>
-              </a:spcBef>
-              <a:defRPr sz="1300">
-                <a:solidFill>
-                  <a:srgbClr val="E2E8F0"/>
-                </a:solidFill>
-                <a:latin typeface="Arial"/>
-              </a:defRPr>
-            </a:pPr>
-            <a:r>
-              <a:t>✅ Robust Against CCTV Noise: Unsharp masking, CLAHE contrast enhancement, and TSN temporal sampling ensure high accuracy even in dark or blurry feeds.</a:t>
-            </a:r>
-          </a:p>
-          <a:p>
-            <a:pPr>
-              <a:spcBef>
-                <a:spcPts val="1400"/>
-              </a:spcBef>
-              <a:defRPr sz="1300">
-                <a:solidFill>
-                  <a:srgbClr val="E2E8F0"/>
-                </a:solidFill>
-                <a:latin typeface="Arial"/>
-              </a:defRPr>
-            </a:pPr>
-            <a:r>
-              <a:t>✅ Open-Source &amp; Fully Replicable: Codebase, models, and Excel benchmark sheets hosted and maintained on GitHub: github.com/Visshu78/Realtime_Crime_detection.</a:t>
-            </a:r>
-          </a:p>
-          <a:p>
-            <a:pPr>
-              <a:spcBef>
-                <a:spcPts val="1400"/>
-              </a:spcBef>
-              <a:defRPr sz="1300">
-                <a:solidFill>
-                  <a:srgbClr val="E2E8F0"/>
-                </a:solidFill>
-                <a:latin typeface="Arial"/>
-              </a:defRPr>
-            </a:pPr>
-            <a:r>
-              <a:t>🔮 Future Scope: Multi-camera 3D person re-identification (Re-ID across city camera grids) and audio scream/gunshot acoustic fusion.</a:t>
-            </a:r>
-          </a:p>
-        </p:txBody>
-      </p:sp>
-    </p:spTree>
-  </p:cSld>
-  <p:clrMapOvr>
-    <a:masterClrMapping/>
-  </p:clrMapOvr>
-</p:sld>
-</file>
-
-<file path=ppt/slides/slide2.xml><?xml version="1.0" encoding="utf-8"?>
-<p:sld xmlns:a="http://schemas.openxmlformats.org/drawingml/2006/main" xmlns:p="http://schemas.openxmlformats.org/presentationml/2006/main" xmlns:r="http://schemas.openxmlformats.org/officeDocument/2006/relationships">
-  <p:cSld>
-    <p:spTree>
-      <p:nvGrpSpPr>
-        <p:cNvPr id="1" name=""/>
-        <p:cNvGrpSpPr/>
-        <p:nvPr/>
-      </p:nvGrpSpPr>
-      <p:grpSpPr/>
-      <p:sp>
-        <p:nvSpPr>
-          <p:cNvPr id="2" name="TextBox 1"/>
-          <p:cNvSpPr txBox="1"/>
-          <p:nvPr/>
-        </p:nvSpPr>
-        <p:spPr>
-          <a:xfrm>
-            <a:off x="731520" y="365760"/>
-            <a:ext cx="10698480" cy="1005840"/>
-          </a:xfrm>
-          <a:prstGeom prst="rect">
-            <a:avLst/>
-          </a:prstGeom>
-          <a:noFill/>
-        </p:spPr>
-        <p:txBody>
-          <a:bodyPr wrap="square" lIns="0" tIns="0" rIns="0" bIns="0">
-            <a:spAutoFit/>
-          </a:bodyPr>
-          <a:lstStyle/>
-          <a:p>
-            <a:pPr>
-              <a:defRPr sz="1000" b="1">
-                <a:solidFill>
-                  <a:srgbClr val="1E3A8A"/>
-                </a:solidFill>
-                <a:latin typeface="Arial"/>
-              </a:defRPr>
-            </a:pPr>
-            <a:r>
-              <a:t>MOTIVATION &amp; INDUSTRY CONTEXT</a:t>
-            </a:r>
-          </a:p>
-          <a:p>
-            <a:pPr>
-              <a:defRPr sz="2200" b="1">
-                <a:solidFill>
-                  <a:srgbClr val="0F172A"/>
-                </a:solidFill>
-                <a:latin typeface="Arial"/>
-              </a:defRPr>
-            </a:pPr>
-            <a:r>
-              <a:t>Problem Statement &amp; The Surveillance Bottleneck</a:t>
-            </a:r>
-          </a:p>
-        </p:txBody>
-      </p:sp>
-      <p:sp>
-        <p:nvSpPr>
-          <p:cNvPr id="3" name="Rounded Rectangle 2"/>
-          <p:cNvSpPr/>
-          <p:nvPr/>
-        </p:nvSpPr>
-        <p:spPr>
-          <a:xfrm>
-            <a:off x="731520" y="1463040"/>
-            <a:ext cx="5120640" cy="4754880"/>
-          </a:xfrm>
-          <a:prstGeom prst="roundRect">
-            <a:avLst/>
-          </a:prstGeom>
-          <a:solidFill>
-            <a:srgbClr val="F1F5F9"/>
-          </a:solidFill>
-          <a:ln>
-            <a:noFill/>
-          </a:ln>
-        </p:spPr>
-        <p:style>
-          <a:lnRef idx="1">
-            <a:schemeClr val="accent1"/>
-          </a:lnRef>
-          <a:fillRef idx="3">
-            <a:schemeClr val="accent1"/>
-          </a:fillRef>
-          <a:effectRef idx="2">
-            <a:schemeClr val="accent1"/>
-          </a:effectRef>
-          <a:fontRef idx="minor">
-            <a:schemeClr val="lt1"/>
-          </a:fontRef>
-        </p:style>
-        <p:txBody>
-          <a:bodyPr rtlCol="0" anchor="ctr"/>
-          <a:lstStyle/>
-          <a:p>
-            <a:pPr algn="ctr"/>
-          </a:p>
-        </p:txBody>
-      </p:sp>
-      <p:sp>
-        <p:nvSpPr>
-          <p:cNvPr id="4" name="TextBox 3"/>
-          <p:cNvSpPr txBox="1"/>
-          <p:nvPr/>
-        </p:nvSpPr>
-        <p:spPr>
-          <a:xfrm>
-            <a:off x="1005840" y="1737360"/>
-            <a:ext cx="4572000" cy="4206240"/>
-          </a:xfrm>
-          <a:prstGeom prst="rect">
-            <a:avLst/>
-          </a:prstGeom>
-          <a:noFill/>
-        </p:spPr>
-        <p:txBody>
-          <a:bodyPr wrap="square">
-            <a:spAutoFit/>
-          </a:bodyPr>
-          <a:lstStyle/>
-          <a:p>
-            <a:pPr>
-              <a:defRPr sz="1600" b="1">
-                <a:solidFill>
-                  <a:srgbClr val="DC2626"/>
-                </a:solidFill>
-                <a:latin typeface="Arial"/>
-              </a:defRPr>
-            </a:pPr>
-            <a:r>
-              <a:t>⚠️ Limitations of Traditional CCTV Monitoring</a:t>
-            </a:r>
-          </a:p>
-          <a:p>
-            <a:pPr>
-              <a:spcBef>
-                <a:spcPts val="1000"/>
-              </a:spcBef>
-              <a:defRPr sz="1200">
-                <a:solidFill>
-                  <a:srgbClr val="1E293B"/>
-                </a:solidFill>
-                <a:latin typeface="Arial"/>
-              </a:defRPr>
-            </a:pPr>
-            <a:r>
-              <a:t>• High Cognitive Fatigue: Human operators miss up to 95% of subtle video anomalies after just 20 minutes of continuous screen monitoring.</a:t>
-            </a:r>
-          </a:p>
-          <a:p>
-            <a:pPr>
-              <a:spcBef>
-                <a:spcPts val="1000"/>
-              </a:spcBef>
-              <a:defRPr sz="1200">
-                <a:solidFill>
-                  <a:srgbClr val="1E293B"/>
-                </a:solidFill>
-                <a:latin typeface="Arial"/>
-              </a:defRPr>
-            </a:pPr>
-            <a:r>
-              <a:t>• Purely Reactive Post-Incident Review: Conventional CCTV only records footage for forensic review after crimes have already taken place.</a:t>
-            </a:r>
-          </a:p>
-          <a:p>
-            <a:pPr>
-              <a:spcBef>
-                <a:spcPts val="1000"/>
-              </a:spcBef>
-              <a:defRPr sz="1200">
-                <a:solidFill>
-                  <a:srgbClr val="1E293B"/>
-                </a:solidFill>
-                <a:latin typeface="Arial"/>
-              </a:defRPr>
-            </a:pPr>
-            <a:r>
-              <a:t>• Monolithic Heavy 3D CNNs: Traditional single-stage 3D networks are too computationally expensive to run across hundreds of camera feeds simultaneously.</a:t>
-            </a:r>
-          </a:p>
-          <a:p>
-            <a:pPr>
-              <a:spcBef>
-                <a:spcPts val="1000"/>
-              </a:spcBef>
-              <a:defRPr sz="1200">
-                <a:solidFill>
-                  <a:srgbClr val="1E293B"/>
-                </a:solidFill>
-                <a:latin typeface="Arial"/>
-              </a:defRPr>
-            </a:pPr>
-            <a:r>
-              <a:t>• Lack of Evidence Synthesis: Human officers must manually scrub through hours of footage to crop suspect faces, identify weapons, and log timestamps.</a:t>
-            </a:r>
-          </a:p>
-        </p:txBody>
-      </p:sp>
-      <p:sp>
-        <p:nvSpPr>
-          <p:cNvPr id="5" name="Rounded Rectangle 4"/>
-          <p:cNvSpPr/>
-          <p:nvPr/>
-        </p:nvSpPr>
-        <p:spPr>
-          <a:xfrm>
-            <a:off x="6309360" y="1463040"/>
-            <a:ext cx="5120640" cy="4754880"/>
-          </a:xfrm>
-          <a:prstGeom prst="roundRect">
-            <a:avLst/>
-          </a:prstGeom>
-          <a:solidFill>
-            <a:srgbClr val="F1F5F9"/>
-          </a:solidFill>
-          <a:ln>
-            <a:noFill/>
-          </a:ln>
-        </p:spPr>
-        <p:style>
-          <a:lnRef idx="1">
-            <a:schemeClr val="accent1"/>
-          </a:lnRef>
-          <a:fillRef idx="3">
-            <a:schemeClr val="accent1"/>
-          </a:fillRef>
-          <a:effectRef idx="2">
-            <a:schemeClr val="accent1"/>
-          </a:effectRef>
-          <a:fontRef idx="minor">
-            <a:schemeClr val="lt1"/>
-          </a:fontRef>
-        </p:style>
-        <p:txBody>
-          <a:bodyPr rtlCol="0" anchor="ctr"/>
-          <a:lstStyle/>
-          <a:p>
-            <a:pPr algn="ctr"/>
-          </a:p>
-        </p:txBody>
-      </p:sp>
-      <p:sp>
-        <p:nvSpPr>
-          <p:cNvPr id="6" name="TextBox 5"/>
-          <p:cNvSpPr txBox="1"/>
-          <p:nvPr/>
-        </p:nvSpPr>
-        <p:spPr>
-          <a:xfrm>
-            <a:off x="6583680" y="1737360"/>
-            <a:ext cx="4572000" cy="4206240"/>
-          </a:xfrm>
-          <a:prstGeom prst="rect">
-            <a:avLst/>
-          </a:prstGeom>
-          <a:noFill/>
-        </p:spPr>
-        <p:txBody>
-          <a:bodyPr wrap="square">
-            <a:spAutoFit/>
-          </a:bodyPr>
-          <a:lstStyle/>
-          <a:p>
-            <a:pPr>
-              <a:defRPr sz="1600" b="1">
-                <a:solidFill>
-                  <a:srgbClr val="16A34A"/>
-                </a:solidFill>
-                <a:latin typeface="Arial"/>
-              </a:defRPr>
-            </a:pPr>
-            <a:r>
-              <a:t>🎯 Our Intelligent Cascaded Solution</a:t>
-            </a:r>
-          </a:p>
-          <a:p>
-            <a:pPr>
-              <a:spcBef>
-                <a:spcPts val="1000"/>
-              </a:spcBef>
-              <a:defRPr sz="1200">
-                <a:solidFill>
-                  <a:srgbClr val="1E293B"/>
-                </a:solidFill>
-                <a:latin typeface="Arial"/>
-              </a:defRPr>
-            </a:pPr>
-            <a:r>
-              <a:t>• Lightweight 24/7 Gatekeeper: Ultra-efficient Video Vision Transformer screens continuous feeds, filtering out &gt;99% of normal activity with zero GPU overhead.</a:t>
-            </a:r>
-          </a:p>
-          <a:p>
-            <a:pPr>
-              <a:spcBef>
-                <a:spcPts val="1000"/>
-              </a:spcBef>
-              <a:defRPr sz="1200">
-                <a:solidFill>
-                  <a:srgbClr val="1E293B"/>
-                </a:solidFill>
-                <a:latin typeface="Arial"/>
-              </a:defRPr>
-            </a:pPr>
-            <a:r>
-              <a:t>• Selective Deep Activation: Expensive fine-grained action ViT, YOLOv8 weapon localization, and face embedders trigger ONLY when an active threat is detected.</a:t>
-            </a:r>
-          </a:p>
-          <a:p>
-            <a:pPr>
-              <a:spcBef>
-                <a:spcPts val="1000"/>
-              </a:spcBef>
-              <a:defRPr sz="1200">
-                <a:solidFill>
-                  <a:srgbClr val="1E293B"/>
-                </a:solidFill>
-                <a:latin typeface="Arial"/>
-              </a:defRPr>
-            </a:pPr>
-            <a:r>
-              <a:t>• Multi-Modal Intelligence: Cross-modal fusion between action motion patterns and physical weapon bounding boxes eliminates visual ambiguities.</a:t>
-            </a:r>
-          </a:p>
-          <a:p>
-            <a:pPr>
-              <a:spcBef>
-                <a:spcPts val="1000"/>
-              </a:spcBef>
-              <a:defRPr sz="1200">
-                <a:solidFill>
-                  <a:srgbClr val="1E293B"/>
-                </a:solidFill>
-                <a:latin typeface="Arial"/>
-              </a:defRPr>
-            </a:pPr>
-            <a:r>
-              <a:t>• Automated Police Incident Dossiers: Instantly generates court-ready JSON forensic incident files, formatted PDF crime cards, suspect crops, and keyframe snapshots.</a:t>
-            </a:r>
-          </a:p>
-        </p:txBody>
-      </p:sp>
-    </p:spTree>
-  </p:cSld>
-  <p:clrMapOvr>
-    <a:masterClrMapping/>
-  </p:clrMapOvr>
-</p:sld>
-</file>
-
-<file path=ppt/slides/slide3.xml><?xml version="1.0" encoding="utf-8"?>
-<p:sld xmlns:a="http://schemas.openxmlformats.org/drawingml/2006/main" xmlns:p="http://schemas.openxmlformats.org/presentationml/2006/main" xmlns:r="http://schemas.openxmlformats.org/officeDocument/2006/relationships">
-  <p:cSld>
-    <p:spTree>
-      <p:nvGrpSpPr>
-        <p:cNvPr id="1" name=""/>
-        <p:cNvGrpSpPr/>
-        <p:nvPr/>
-      </p:nvGrpSpPr>
-      <p:grpSpPr/>
-      <p:sp>
-        <p:nvSpPr>
-          <p:cNvPr id="2" name="TextBox 1"/>
-          <p:cNvSpPr txBox="1"/>
-          <p:nvPr/>
-        </p:nvSpPr>
-        <p:spPr>
-          <a:xfrm>
-            <a:off x="731520" y="365760"/>
-            <a:ext cx="10698480" cy="1005840"/>
-          </a:xfrm>
-          <a:prstGeom prst="rect">
-            <a:avLst/>
-          </a:prstGeom>
-          <a:noFill/>
-        </p:spPr>
-        <p:txBody>
-          <a:bodyPr wrap="square" lIns="0" tIns="0" rIns="0" bIns="0">
-            <a:spAutoFit/>
-          </a:bodyPr>
-          <a:lstStyle/>
-          <a:p>
-            <a:pPr>
-              <a:defRPr sz="1000" b="1">
-                <a:solidFill>
-                  <a:srgbClr val="1E3A8A"/>
-                </a:solidFill>
-                <a:latin typeface="Arial"/>
-              </a:defRPr>
-            </a:pPr>
-            <a:r>
-              <a:t>SYSTEM DESIGN &amp; METHODOLOGY</a:t>
-            </a:r>
-          </a:p>
-          <a:p>
-            <a:pPr>
-              <a:defRPr sz="2200" b="1">
-                <a:solidFill>
-                  <a:srgbClr val="0F172A"/>
-                </a:solidFill>
-                <a:latin typeface="Arial"/>
-              </a:defRPr>
-            </a:pPr>
-            <a:r>
-              <a:t>Hierarchical 4-Stage Surveillance Architecture</a:t>
+              <a:t>Phase 4: Automated Police Forensic Dossier Generator</a:t>
             </a:r>
           </a:p>
         </p:txBody>
@@ -4641,15 +3720,2576 @@
           <a:lstStyle/>
           <a:p>
             <a:pPr>
+              <a:defRPr sz="1300" b="1">
+                <a:solidFill>
+                  <a:srgbClr val="1E3A8A"/>
+                </a:solidFill>
+                <a:latin typeface="Arial"/>
+              </a:defRPr>
+            </a:pPr>
+            <a:r>
+              <a:t>📁 Structured JSON Record</a:t>
+            </a:r>
+          </a:p>
+          <a:p>
+            <a:pPr>
+              <a:spcBef>
+                <a:spcPts val="600"/>
+              </a:spcBef>
               <a:defRPr sz="1100" b="1">
                 <a:solidFill>
+                  <a:srgbClr val="0F172A"/>
+                </a:solidFill>
+                <a:latin typeface="Arial"/>
+              </a:defRPr>
+            </a:pPr>
+            <a:r>
+              <a:t>Forensic Data Interchange</a:t>
+            </a:r>
+          </a:p>
+          <a:p>
+            <a:pPr>
+              <a:spcBef>
+                <a:spcPts val="1000"/>
+              </a:spcBef>
+              <a:defRPr sz="1100">
+                <a:solidFill>
+                  <a:srgbClr val="0F172A"/>
+                </a:solidFill>
+                <a:latin typeface="Arial"/>
+              </a:defRPr>
+            </a:pPr>
+            <a:r>
+              <a:t>Complete machine-readable crime metadata: Incident ID, Camera ID, GPS coordinates, Threat %, Action Class, Weapon Bounding Boxes, and Matched Suspect IDs.</a:t>
+            </a:r>
+          </a:p>
+        </p:txBody>
+      </p:sp>
+      <p:sp>
+        <p:nvSpPr>
+          <p:cNvPr id="5" name="Rounded Rectangle 4"/>
+          <p:cNvSpPr/>
+          <p:nvPr/>
+        </p:nvSpPr>
+        <p:spPr>
+          <a:xfrm>
+            <a:off x="3429000" y="1463040"/>
+            <a:ext cx="2560320" cy="4754880"/>
+          </a:xfrm>
+          <a:prstGeom prst="roundRect">
+            <a:avLst/>
+          </a:prstGeom>
+          <a:solidFill>
+            <a:srgbClr val="F1F5F9"/>
+          </a:solidFill>
+          <a:ln w="19050">
+            <a:solidFill>
+              <a:srgbClr val="DC2626"/>
+            </a:solidFill>
+          </a:ln>
+        </p:spPr>
+        <p:style>
+          <a:lnRef idx="1">
+            <a:schemeClr val="accent1"/>
+          </a:lnRef>
+          <a:fillRef idx="3">
+            <a:schemeClr val="accent1"/>
+          </a:fillRef>
+          <a:effectRef idx="2">
+            <a:schemeClr val="accent1"/>
+          </a:effectRef>
+          <a:fontRef idx="minor">
+            <a:schemeClr val="lt1"/>
+          </a:fontRef>
+        </p:style>
+        <p:txBody>
+          <a:bodyPr rtlCol="0" anchor="ctr"/>
+          <a:lstStyle/>
+          <a:p>
+            <a:pPr algn="ctr"/>
+          </a:p>
+        </p:txBody>
+      </p:sp>
+      <p:sp>
+        <p:nvSpPr>
+          <p:cNvPr id="6" name="TextBox 5"/>
+          <p:cNvSpPr txBox="1"/>
+          <p:nvPr/>
+        </p:nvSpPr>
+        <p:spPr>
+          <a:xfrm>
+            <a:off x="3566160" y="1645920"/>
+            <a:ext cx="2286000" cy="4389120"/>
+          </a:xfrm>
+          <a:prstGeom prst="rect">
+            <a:avLst/>
+          </a:prstGeom>
+          <a:noFill/>
+        </p:spPr>
+        <p:txBody>
+          <a:bodyPr wrap="square">
+            <a:spAutoFit/>
+          </a:bodyPr>
+          <a:lstStyle/>
+          <a:p>
+            <a:pPr>
+              <a:defRPr sz="1300" b="1">
+                <a:solidFill>
+                  <a:srgbClr val="DC2626"/>
+                </a:solidFill>
+                <a:latin typeface="Arial"/>
+              </a:defRPr>
+            </a:pPr>
+            <a:r>
+              <a:t>📄 Police Incident Brief Card</a:t>
+            </a:r>
+          </a:p>
+          <a:p>
+            <a:pPr>
+              <a:spcBef>
+                <a:spcPts val="600"/>
+              </a:spcBef>
+              <a:defRPr sz="1100" b="1">
+                <a:solidFill>
+                  <a:srgbClr val="0F172A"/>
+                </a:solidFill>
+                <a:latin typeface="Arial"/>
+              </a:defRPr>
+            </a:pPr>
+            <a:r>
+              <a:t>Formatted Dispatch Report</a:t>
+            </a:r>
+          </a:p>
+          <a:p>
+            <a:pPr>
+              <a:spcBef>
+                <a:spcPts val="1000"/>
+              </a:spcBef>
+              <a:defRPr sz="1100">
+                <a:solidFill>
+                  <a:srgbClr val="0F172A"/>
+                </a:solidFill>
+                <a:latin typeface="Arial"/>
+              </a:defRPr>
+            </a:pPr>
+            <a:r>
+              <a:t>Human-readable summary report ready for dispatch: Priority Level (P1/P2), Dispatch Instructions, Time of Incident, Key Findings, and Patrol Action Steps.</a:t>
+            </a:r>
+          </a:p>
+        </p:txBody>
+      </p:sp>
+      <p:sp>
+        <p:nvSpPr>
+          <p:cNvPr id="7" name="Rounded Rectangle 6"/>
+          <p:cNvSpPr/>
+          <p:nvPr/>
+        </p:nvSpPr>
+        <p:spPr>
+          <a:xfrm>
+            <a:off x="6126480" y="1463040"/>
+            <a:ext cx="2560320" cy="4754880"/>
+          </a:xfrm>
+          <a:prstGeom prst="roundRect">
+            <a:avLst/>
+          </a:prstGeom>
+          <a:solidFill>
+            <a:srgbClr val="F1F5F9"/>
+          </a:solidFill>
+          <a:ln w="19050">
+            <a:solidFill>
+              <a:srgbClr val="0F172A"/>
+            </a:solidFill>
+          </a:ln>
+        </p:spPr>
+        <p:style>
+          <a:lnRef idx="1">
+            <a:schemeClr val="accent1"/>
+          </a:lnRef>
+          <a:fillRef idx="3">
+            <a:schemeClr val="accent1"/>
+          </a:fillRef>
+          <a:effectRef idx="2">
+            <a:schemeClr val="accent1"/>
+          </a:effectRef>
+          <a:fontRef idx="minor">
+            <a:schemeClr val="lt1"/>
+          </a:fontRef>
+        </p:style>
+        <p:txBody>
+          <a:bodyPr rtlCol="0" anchor="ctr"/>
+          <a:lstStyle/>
+          <a:p>
+            <a:pPr algn="ctr"/>
+          </a:p>
+        </p:txBody>
+      </p:sp>
+      <p:sp>
+        <p:nvSpPr>
+          <p:cNvPr id="8" name="TextBox 7"/>
+          <p:cNvSpPr txBox="1"/>
+          <p:nvPr/>
+        </p:nvSpPr>
+        <p:spPr>
+          <a:xfrm>
+            <a:off x="6263640" y="1645920"/>
+            <a:ext cx="2286000" cy="4389120"/>
+          </a:xfrm>
+          <a:prstGeom prst="rect">
+            <a:avLst/>
+          </a:prstGeom>
+          <a:noFill/>
+        </p:spPr>
+        <p:txBody>
+          <a:bodyPr wrap="square">
+            <a:spAutoFit/>
+          </a:bodyPr>
+          <a:lstStyle/>
+          <a:p>
+            <a:pPr>
+              <a:defRPr sz="1300" b="1">
+                <a:solidFill>
+                  <a:srgbClr val="0F172A"/>
+                </a:solidFill>
+                <a:latin typeface="Arial"/>
+              </a:defRPr>
+            </a:pPr>
+            <a:r>
+              <a:t>🖼️ Keyframe Snapshot Crop</a:t>
+            </a:r>
+          </a:p>
+          <a:p>
+            <a:pPr>
+              <a:spcBef>
+                <a:spcPts val="600"/>
+              </a:spcBef>
+              <a:defRPr sz="1100" b="1">
+                <a:solidFill>
+                  <a:srgbClr val="0F172A"/>
+                </a:solidFill>
+                <a:latin typeface="Arial"/>
+              </a:defRPr>
+            </a:pPr>
+            <a:r>
+              <a:t>Visual Scene Capture</a:t>
+            </a:r>
+          </a:p>
+          <a:p>
+            <a:pPr>
+              <a:spcBef>
+                <a:spcPts val="1000"/>
+              </a:spcBef>
+              <a:defRPr sz="1100">
+                <a:solidFill>
+                  <a:srgbClr val="0F172A"/>
+                </a:solidFill>
+                <a:latin typeface="Arial"/>
+              </a:defRPr>
+            </a:pPr>
+            <a:r>
+              <a:t>Annotated CCTV frame capturing the exact moment of crime, with bounding boxes over weapons and suspects, timestamped and stamped with camera ID.</a:t>
+            </a:r>
+          </a:p>
+        </p:txBody>
+      </p:sp>
+      <p:sp>
+        <p:nvSpPr>
+          <p:cNvPr id="9" name="Rounded Rectangle 8"/>
+          <p:cNvSpPr/>
+          <p:nvPr/>
+        </p:nvSpPr>
+        <p:spPr>
+          <a:xfrm>
+            <a:off x="8823960" y="1463040"/>
+            <a:ext cx="2560320" cy="4754880"/>
+          </a:xfrm>
+          <a:prstGeom prst="roundRect">
+            <a:avLst/>
+          </a:prstGeom>
+          <a:solidFill>
+            <a:srgbClr val="F1F5F9"/>
+          </a:solidFill>
+          <a:ln w="19050">
+            <a:solidFill>
+              <a:srgbClr val="16A34A"/>
+            </a:solidFill>
+          </a:ln>
+        </p:spPr>
+        <p:style>
+          <a:lnRef idx="1">
+            <a:schemeClr val="accent1"/>
+          </a:lnRef>
+          <a:fillRef idx="3">
+            <a:schemeClr val="accent1"/>
+          </a:fillRef>
+          <a:effectRef idx="2">
+            <a:schemeClr val="accent1"/>
+          </a:effectRef>
+          <a:fontRef idx="minor">
+            <a:schemeClr val="lt1"/>
+          </a:fontRef>
+        </p:style>
+        <p:txBody>
+          <a:bodyPr rtlCol="0" anchor="ctr"/>
+          <a:lstStyle/>
+          <a:p>
+            <a:pPr algn="ctr"/>
+          </a:p>
+        </p:txBody>
+      </p:sp>
+      <p:sp>
+        <p:nvSpPr>
+          <p:cNvPr id="10" name="TextBox 9"/>
+          <p:cNvSpPr txBox="1"/>
+          <p:nvPr/>
+        </p:nvSpPr>
+        <p:spPr>
+          <a:xfrm>
+            <a:off x="8961120" y="1645920"/>
+            <a:ext cx="2286000" cy="4389120"/>
+          </a:xfrm>
+          <a:prstGeom prst="rect">
+            <a:avLst/>
+          </a:prstGeom>
+          <a:noFill/>
+        </p:spPr>
+        <p:txBody>
+          <a:bodyPr wrap="square">
+            <a:spAutoFit/>
+          </a:bodyPr>
+          <a:lstStyle/>
+          <a:p>
+            <a:pPr>
+              <a:defRPr sz="1300" b="1">
+                <a:solidFill>
+                  <a:srgbClr val="16A34A"/>
+                </a:solidFill>
+                <a:latin typeface="Arial"/>
+              </a:defRPr>
+            </a:pPr>
+            <a:r>
+              <a:t>👤 Suspect Mugshot Crop</a:t>
+            </a:r>
+          </a:p>
+          <a:p>
+            <a:pPr>
+              <a:spcBef>
+                <a:spcPts val="600"/>
+              </a:spcBef>
+              <a:defRPr sz="1100" b="1">
+                <a:solidFill>
+                  <a:srgbClr val="0F172A"/>
+                </a:solidFill>
+                <a:latin typeface="Arial"/>
+              </a:defRPr>
+            </a:pPr>
+            <a:r>
+              <a:t>Identity Verification</a:t>
+            </a:r>
+          </a:p>
+          <a:p>
+            <a:pPr>
+              <a:spcBef>
+                <a:spcPts val="1000"/>
+              </a:spcBef>
+              <a:defRPr sz="1100">
+                <a:solidFill>
+                  <a:srgbClr val="0F172A"/>
+                </a:solidFill>
+                <a:latin typeface="Arial"/>
+              </a:defRPr>
+            </a:pPr>
+            <a:r>
+              <a:t>Isolated high-resolution cropped image of the suspect face mapped alongside watchlist mugshots for swift arrest warrant verification.</a:t>
+            </a:r>
+          </a:p>
+        </p:txBody>
+      </p:sp>
+    </p:spTree>
+  </p:cSld>
+  <p:clrMapOvr>
+    <a:masterClrMapping/>
+  </p:clrMapOvr>
+</p:sld>
+</file>
+
+<file path=ppt/slides/slide12.xml><?xml version="1.0" encoding="utf-8"?>
+<p:sld xmlns:a="http://schemas.openxmlformats.org/drawingml/2006/main" xmlns:p="http://schemas.openxmlformats.org/presentationml/2006/main" xmlns:r="http://schemas.openxmlformats.org/officeDocument/2006/relationships">
+  <p:cSld>
+    <p:spTree>
+      <p:nvGrpSpPr>
+        <p:cNvPr id="1" name=""/>
+        <p:cNvGrpSpPr/>
+        <p:nvPr/>
+      </p:nvGrpSpPr>
+      <p:grpSpPr/>
+      <p:sp>
+        <p:nvSpPr>
+          <p:cNvPr id="2" name="TextBox 1"/>
+          <p:cNvSpPr txBox="1"/>
+          <p:nvPr/>
+        </p:nvSpPr>
+        <p:spPr>
+          <a:xfrm>
+            <a:off x="731520" y="365760"/>
+            <a:ext cx="10698480" cy="1005840"/>
+          </a:xfrm>
+          <a:prstGeom prst="rect">
+            <a:avLst/>
+          </a:prstGeom>
+          <a:noFill/>
+        </p:spPr>
+        <p:txBody>
+          <a:bodyPr wrap="square" lIns="0" tIns="0" rIns="0" bIns="0">
+            <a:spAutoFit/>
+          </a:bodyPr>
+          <a:lstStyle/>
+          <a:p>
+            <a:pPr>
+              <a:defRPr sz="1000" b="1">
+                <a:solidFill>
                   <a:srgbClr val="1E3A8A"/>
                 </a:solidFill>
                 <a:latin typeface="Arial"/>
               </a:defRPr>
             </a:pPr>
             <a:r>
-              <a:t>STAGE 1: BINARY GATE</a:t>
+              <a:t>8. COMPLETE BENCHMARKS</a:t>
+            </a:r>
+          </a:p>
+          <a:p>
+            <a:pPr>
+              <a:defRPr sz="2200" b="1">
+                <a:solidFill>
+                  <a:srgbClr val="0F172A"/>
+                </a:solidFill>
+                <a:latin typeface="Arial"/>
+              </a:defRPr>
+            </a:pPr>
+            <a:r>
+              <a:t>Quantitative Performance &amp; Experimental Master Table</a:t>
+            </a:r>
+          </a:p>
+        </p:txBody>
+      </p:sp>
+      <p:graphicFrame>
+        <p:nvGraphicFramePr>
+          <p:cNvPr id="3" name="Table 2"/>
+          <p:cNvGraphicFramePr>
+            <a:graphicFrameLocks noGrp="1"/>
+          </p:cNvGraphicFramePr>
+          <p:nvPr/>
+        </p:nvGraphicFramePr>
+        <p:xfrm>
+          <a:off x="731520" y="1463040"/>
+          <a:ext cx="10698480" cy="4754880"/>
+        </p:xfrm>
+        <a:graphic>
+          <a:graphicData uri="http://schemas.openxmlformats.org/drawingml/2006/table">
+            <a:tbl>
+              <a:tblPr firstRow="1" bandRow="1">
+                <a:tableStyleId>{5C22544A-7EE6-4342-B048-85BDC9FD1C3A}</a:tableStyleId>
+              </a:tblPr>
+              <a:tblGrid>
+                <a:gridCol w="2926080"/>
+                <a:gridCol w="1463040"/>
+                <a:gridCol w="1371600"/>
+                <a:gridCol w="1645920"/>
+                <a:gridCol w="1645920"/>
+                <a:gridCol w="1645920"/>
+              </a:tblGrid>
+              <a:tr h="679268">
+                <a:tc>
+                  <a:txBody>
+                    <a:bodyPr/>
+                    <a:lstStyle/>
+                    <a:p>
+                      <a:pPr algn="ctr">
+                        <a:defRPr sz="1100" b="1">
+                          <a:solidFill>
+                            <a:srgbClr val="FFFFFF"/>
+                          </a:solidFill>
+                          <a:latin typeface="Arial"/>
+                        </a:defRPr>
+                      </a:pPr>
+                      <a:r>
+                        <a:t>Model / Pipeline Stage</a:t>
+                      </a:r>
+                    </a:p>
+                  </a:txBody>
+                  <a:tcPr>
+                    <a:solidFill>
+                      <a:srgbClr val="1E3A8A"/>
+                    </a:solidFill>
+                  </a:tcPr>
+                </a:tc>
+                <a:tc>
+                  <a:txBody>
+                    <a:bodyPr/>
+                    <a:lstStyle/>
+                    <a:p>
+                      <a:pPr algn="ctr">
+                        <a:defRPr sz="1100" b="1">
+                          <a:solidFill>
+                            <a:srgbClr val="FFFFFF"/>
+                          </a:solidFill>
+                          <a:latin typeface="Arial"/>
+                        </a:defRPr>
+                      </a:pPr>
+                      <a:r>
+                        <a:t>Model Type</a:t>
+                      </a:r>
+                    </a:p>
+                  </a:txBody>
+                  <a:tcPr>
+                    <a:solidFill>
+                      <a:srgbClr val="1E3A8A"/>
+                    </a:solidFill>
+                  </a:tcPr>
+                </a:tc>
+                <a:tc>
+                  <a:txBody>
+                    <a:bodyPr/>
+                    <a:lstStyle/>
+                    <a:p>
+                      <a:pPr algn="ctr">
+                        <a:defRPr sz="1100" b="1">
+                          <a:solidFill>
+                            <a:srgbClr val="FFFFFF"/>
+                          </a:solidFill>
+                          <a:latin typeface="Arial"/>
+                        </a:defRPr>
+                      </a:pPr>
+                      <a:r>
+                        <a:t>Params / Size</a:t>
+                      </a:r>
+                    </a:p>
+                  </a:txBody>
+                  <a:tcPr>
+                    <a:solidFill>
+                      <a:srgbClr val="1E3A8A"/>
+                    </a:solidFill>
+                  </a:tcPr>
+                </a:tc>
+                <a:tc>
+                  <a:txBody>
+                    <a:bodyPr/>
+                    <a:lstStyle/>
+                    <a:p>
+                      <a:pPr algn="ctr">
+                        <a:defRPr sz="1100" b="1">
+                          <a:solidFill>
+                            <a:srgbClr val="FFFFFF"/>
+                          </a:solidFill>
+                          <a:latin typeface="Arial"/>
+                        </a:defRPr>
+                      </a:pPr>
+                      <a:r>
+                        <a:t>Val Accuracy</a:t>
+                      </a:r>
+                    </a:p>
+                  </a:txBody>
+                  <a:tcPr>
+                    <a:solidFill>
+                      <a:srgbClr val="1E3A8A"/>
+                    </a:solidFill>
+                  </a:tcPr>
+                </a:tc>
+                <a:tc>
+                  <a:txBody>
+                    <a:bodyPr/>
+                    <a:lstStyle/>
+                    <a:p>
+                      <a:pPr algn="ctr">
+                        <a:defRPr sz="1100" b="1">
+                          <a:solidFill>
+                            <a:srgbClr val="FFFFFF"/>
+                          </a:solidFill>
+                          <a:latin typeface="Arial"/>
+                        </a:defRPr>
+                      </a:pPr>
+                      <a:r>
+                        <a:t>Test Accuracy</a:t>
+                      </a:r>
+                    </a:p>
+                  </a:txBody>
+                  <a:tcPr>
+                    <a:solidFill>
+                      <a:srgbClr val="1E3A8A"/>
+                    </a:solidFill>
+                  </a:tcPr>
+                </a:tc>
+                <a:tc>
+                  <a:txBody>
+                    <a:bodyPr/>
+                    <a:lstStyle/>
+                    <a:p>
+                      <a:pPr algn="ctr">
+                        <a:defRPr sz="1100" b="1">
+                          <a:solidFill>
+                            <a:srgbClr val="FFFFFF"/>
+                          </a:solidFill>
+                          <a:latin typeface="Arial"/>
+                        </a:defRPr>
+                      </a:pPr>
+                      <a:r>
+                        <a:t>Recall / F1</a:t>
+                      </a:r>
+                    </a:p>
+                  </a:txBody>
+                  <a:tcPr>
+                    <a:solidFill>
+                      <a:srgbClr val="1E3A8A"/>
+                    </a:solidFill>
+                  </a:tcPr>
+                </a:tc>
+              </a:tr>
+              <a:tr h="679268">
+                <a:tc>
+                  <a:txBody>
+                    <a:bodyPr/>
+                    <a:lstStyle/>
+                    <a:p>
+                      <a:pPr algn="l">
+                        <a:defRPr sz="1050" b="0">
+                          <a:solidFill>
+                            <a:srgbClr val="0F172A"/>
+                          </a:solidFill>
+                          <a:latin typeface="Arial"/>
+                        </a:defRPr>
+                      </a:pPr>
+                      <a:r>
+                        <a:t>Phase 1 Baseline 3D CNN</a:t>
+                      </a:r>
+                    </a:p>
+                  </a:txBody>
+                  <a:tcPr>
+                    <a:solidFill>
+                      <a:srgbClr val="FFFFFF"/>
+                    </a:solidFill>
+                  </a:tcPr>
+                </a:tc>
+                <a:tc>
+                  <a:txBody>
+                    <a:bodyPr/>
+                    <a:lstStyle/>
+                    <a:p>
+                      <a:pPr algn="ctr">
+                        <a:defRPr sz="1050" b="0">
+                          <a:solidFill>
+                            <a:srgbClr val="0F172A"/>
+                          </a:solidFill>
+                          <a:latin typeface="Arial"/>
+                        </a:defRPr>
+                      </a:pPr>
+                      <a:r>
+                        <a:t>Binary Gate</a:t>
+                      </a:r>
+                    </a:p>
+                  </a:txBody>
+                  <a:tcPr>
+                    <a:solidFill>
+                      <a:srgbClr val="FFFFFF"/>
+                    </a:solidFill>
+                  </a:tcPr>
+                </a:tc>
+                <a:tc>
+                  <a:txBody>
+                    <a:bodyPr/>
+                    <a:lstStyle/>
+                    <a:p>
+                      <a:pPr algn="ctr">
+                        <a:defRPr sz="1050" b="0">
+                          <a:solidFill>
+                            <a:srgbClr val="0F172A"/>
+                          </a:solidFill>
+                          <a:latin typeface="Arial"/>
+                        </a:defRPr>
+                      </a:pPr>
+                      <a:r>
+                        <a:t>1.2M (4.8 MB)</a:t>
+                      </a:r>
+                    </a:p>
+                  </a:txBody>
+                  <a:tcPr>
+                    <a:solidFill>
+                      <a:srgbClr val="FFFFFF"/>
+                    </a:solidFill>
+                  </a:tcPr>
+                </a:tc>
+                <a:tc>
+                  <a:txBody>
+                    <a:bodyPr/>
+                    <a:lstStyle/>
+                    <a:p>
+                      <a:pPr algn="ctr">
+                        <a:defRPr sz="1050" b="0">
+                          <a:solidFill>
+                            <a:srgbClr val="0F172A"/>
+                          </a:solidFill>
+                          <a:latin typeface="Arial"/>
+                        </a:defRPr>
+                      </a:pPr>
+                      <a:r>
+                        <a:t>88.00%</a:t>
+                      </a:r>
+                    </a:p>
+                  </a:txBody>
+                  <a:tcPr>
+                    <a:solidFill>
+                      <a:srgbClr val="FFFFFF"/>
+                    </a:solidFill>
+                  </a:tcPr>
+                </a:tc>
+                <a:tc>
+                  <a:txBody>
+                    <a:bodyPr/>
+                    <a:lstStyle/>
+                    <a:p>
+                      <a:pPr algn="ctr">
+                        <a:defRPr sz="1050" b="0">
+                          <a:solidFill>
+                            <a:srgbClr val="0F172A"/>
+                          </a:solidFill>
+                          <a:latin typeface="Arial"/>
+                        </a:defRPr>
+                      </a:pPr>
+                      <a:r>
+                        <a:t>90.00%</a:t>
+                      </a:r>
+                    </a:p>
+                  </a:txBody>
+                  <a:tcPr>
+                    <a:solidFill>
+                      <a:srgbClr val="FFFFFF"/>
+                    </a:solidFill>
+                  </a:tcPr>
+                </a:tc>
+                <a:tc>
+                  <a:txBody>
+                    <a:bodyPr/>
+                    <a:lstStyle/>
+                    <a:p>
+                      <a:pPr algn="ctr">
+                        <a:defRPr sz="1050" b="0">
+                          <a:solidFill>
+                            <a:srgbClr val="0F172A"/>
+                          </a:solidFill>
+                          <a:latin typeface="Arial"/>
+                        </a:defRPr>
+                      </a:pPr>
+                      <a:r>
+                        <a:t>90.00% Recall</a:t>
+                      </a:r>
+                    </a:p>
+                  </a:txBody>
+                  <a:tcPr>
+                    <a:solidFill>
+                      <a:srgbClr val="FFFFFF"/>
+                    </a:solidFill>
+                  </a:tcPr>
+                </a:tc>
+              </a:tr>
+              <a:tr h="679268">
+                <a:tc>
+                  <a:txBody>
+                    <a:bodyPr/>
+                    <a:lstStyle/>
+                    <a:p>
+                      <a:pPr algn="l">
+                        <a:defRPr sz="1050" b="0">
+                          <a:solidFill>
+                            <a:srgbClr val="0F172A"/>
+                          </a:solidFill>
+                          <a:latin typeface="Arial"/>
+                        </a:defRPr>
+                      </a:pPr>
+                      <a:r>
+                        <a:t>Phase 1 3D Res-SE CNN</a:t>
+                      </a:r>
+                    </a:p>
+                  </a:txBody>
+                  <a:tcPr>
+                    <a:solidFill>
+                      <a:srgbClr val="FFFFFF"/>
+                    </a:solidFill>
+                  </a:tcPr>
+                </a:tc>
+                <a:tc>
+                  <a:txBody>
+                    <a:bodyPr/>
+                    <a:lstStyle/>
+                    <a:p>
+                      <a:pPr algn="ctr">
+                        <a:defRPr sz="1050" b="0">
+                          <a:solidFill>
+                            <a:srgbClr val="0F172A"/>
+                          </a:solidFill>
+                          <a:latin typeface="Arial"/>
+                        </a:defRPr>
+                      </a:pPr>
+                      <a:r>
+                        <a:t>Binary Gate</a:t>
+                      </a:r>
+                    </a:p>
+                  </a:txBody>
+                  <a:tcPr>
+                    <a:solidFill>
+                      <a:srgbClr val="FFFFFF"/>
+                    </a:solidFill>
+                  </a:tcPr>
+                </a:tc>
+                <a:tc>
+                  <a:txBody>
+                    <a:bodyPr/>
+                    <a:lstStyle/>
+                    <a:p>
+                      <a:pPr algn="ctr">
+                        <a:defRPr sz="1050" b="0">
+                          <a:solidFill>
+                            <a:srgbClr val="0F172A"/>
+                          </a:solidFill>
+                          <a:latin typeface="Arial"/>
+                        </a:defRPr>
+                      </a:pPr>
+                      <a:r>
+                        <a:t>3.6M (14.5 MB)</a:t>
+                      </a:r>
+                    </a:p>
+                  </a:txBody>
+                  <a:tcPr>
+                    <a:solidFill>
+                      <a:srgbClr val="FFFFFF"/>
+                    </a:solidFill>
+                  </a:tcPr>
+                </a:tc>
+                <a:tc>
+                  <a:txBody>
+                    <a:bodyPr/>
+                    <a:lstStyle/>
+                    <a:p>
+                      <a:pPr algn="ctr">
+                        <a:defRPr sz="1050" b="0">
+                          <a:solidFill>
+                            <a:srgbClr val="0F172A"/>
+                          </a:solidFill>
+                          <a:latin typeface="Arial"/>
+                        </a:defRPr>
+                      </a:pPr>
+                      <a:r>
+                        <a:t>89.00%</a:t>
+                      </a:r>
+                    </a:p>
+                  </a:txBody>
+                  <a:tcPr>
+                    <a:solidFill>
+                      <a:srgbClr val="FFFFFF"/>
+                    </a:solidFill>
+                  </a:tcPr>
+                </a:tc>
+                <a:tc>
+                  <a:txBody>
+                    <a:bodyPr/>
+                    <a:lstStyle/>
+                    <a:p>
+                      <a:pPr algn="ctr">
+                        <a:defRPr sz="1050" b="0">
+                          <a:solidFill>
+                            <a:srgbClr val="0F172A"/>
+                          </a:solidFill>
+                          <a:latin typeface="Arial"/>
+                        </a:defRPr>
+                      </a:pPr>
+                      <a:r>
+                        <a:t>91.50%</a:t>
+                      </a:r>
+                    </a:p>
+                  </a:txBody>
+                  <a:tcPr>
+                    <a:solidFill>
+                      <a:srgbClr val="FFFFFF"/>
+                    </a:solidFill>
+                  </a:tcPr>
+                </a:tc>
+                <a:tc>
+                  <a:txBody>
+                    <a:bodyPr/>
+                    <a:lstStyle/>
+                    <a:p>
+                      <a:pPr algn="ctr">
+                        <a:defRPr sz="1050" b="0">
+                          <a:solidFill>
+                            <a:srgbClr val="0F172A"/>
+                          </a:solidFill>
+                          <a:latin typeface="Arial"/>
+                        </a:defRPr>
+                      </a:pPr>
+                      <a:r>
+                        <a:t>90.00% Recall</a:t>
+                      </a:r>
+                    </a:p>
+                  </a:txBody>
+                  <a:tcPr>
+                    <a:solidFill>
+                      <a:srgbClr val="FFFFFF"/>
+                    </a:solidFill>
+                  </a:tcPr>
+                </a:tc>
+              </a:tr>
+              <a:tr h="679268">
+                <a:tc>
+                  <a:txBody>
+                    <a:bodyPr/>
+                    <a:lstStyle/>
+                    <a:p>
+                      <a:pPr algn="l">
+                        <a:defRPr sz="1050" b="1">
+                          <a:solidFill>
+                            <a:srgbClr val="16A34A"/>
+                          </a:solidFill>
+                          <a:latin typeface="Arial"/>
+                        </a:defRPr>
+                      </a:pPr>
+                      <a:r>
+                        <a:t>Phase 1 VideoViT v2 (TTA) 🏆</a:t>
+                      </a:r>
+                    </a:p>
+                  </a:txBody>
+                  <a:tcPr>
+                    <a:solidFill>
+                      <a:srgbClr val="F0FDF4"/>
+                    </a:solidFill>
+                  </a:tcPr>
+                </a:tc>
+                <a:tc>
+                  <a:txBody>
+                    <a:bodyPr/>
+                    <a:lstStyle/>
+                    <a:p>
+                      <a:pPr algn="ctr">
+                        <a:defRPr sz="1050" b="1">
+                          <a:solidFill>
+                            <a:srgbClr val="16A34A"/>
+                          </a:solidFill>
+                          <a:latin typeface="Arial"/>
+                        </a:defRPr>
+                      </a:pPr>
+                      <a:r>
+                        <a:t>Binary Gate</a:t>
+                      </a:r>
+                    </a:p>
+                  </a:txBody>
+                  <a:tcPr>
+                    <a:solidFill>
+                      <a:srgbClr val="F0FDF4"/>
+                    </a:solidFill>
+                  </a:tcPr>
+                </a:tc>
+                <a:tc>
+                  <a:txBody>
+                    <a:bodyPr/>
+                    <a:lstStyle/>
+                    <a:p>
+                      <a:pPr algn="ctr">
+                        <a:defRPr sz="1050" b="1">
+                          <a:solidFill>
+                            <a:srgbClr val="16A34A"/>
+                          </a:solidFill>
+                          <a:latin typeface="Arial"/>
+                        </a:defRPr>
+                      </a:pPr>
+                      <a:r>
+                        <a:t>9.8M (38.4 MB)</a:t>
+                      </a:r>
+                    </a:p>
+                  </a:txBody>
+                  <a:tcPr>
+                    <a:solidFill>
+                      <a:srgbClr val="F0FDF4"/>
+                    </a:solidFill>
+                  </a:tcPr>
+                </a:tc>
+                <a:tc>
+                  <a:txBody>
+                    <a:bodyPr/>
+                    <a:lstStyle/>
+                    <a:p>
+                      <a:pPr algn="ctr">
+                        <a:defRPr sz="1050" b="1">
+                          <a:solidFill>
+                            <a:srgbClr val="16A34A"/>
+                          </a:solidFill>
+                          <a:latin typeface="Arial"/>
+                        </a:defRPr>
+                      </a:pPr>
+                      <a:r>
+                        <a:t>95.50%</a:t>
+                      </a:r>
+                    </a:p>
+                  </a:txBody>
+                  <a:tcPr>
+                    <a:solidFill>
+                      <a:srgbClr val="F0FDF4"/>
+                    </a:solidFill>
+                  </a:tcPr>
+                </a:tc>
+                <a:tc>
+                  <a:txBody>
+                    <a:bodyPr/>
+                    <a:lstStyle/>
+                    <a:p>
+                      <a:pPr algn="ctr">
+                        <a:defRPr sz="1050" b="1">
+                          <a:solidFill>
+                            <a:srgbClr val="16A34A"/>
+                          </a:solidFill>
+                          <a:latin typeface="Arial"/>
+                        </a:defRPr>
+                      </a:pPr>
+                      <a:r>
+                        <a:t>95.50%</a:t>
+                      </a:r>
+                    </a:p>
+                  </a:txBody>
+                  <a:tcPr>
+                    <a:solidFill>
+                      <a:srgbClr val="F0FDF4"/>
+                    </a:solidFill>
+                  </a:tcPr>
+                </a:tc>
+                <a:tc>
+                  <a:txBody>
+                    <a:bodyPr/>
+                    <a:lstStyle/>
+                    <a:p>
+                      <a:pPr algn="ctr">
+                        <a:defRPr sz="1050" b="1">
+                          <a:solidFill>
+                            <a:srgbClr val="16A34A"/>
+                          </a:solidFill>
+                          <a:latin typeface="Arial"/>
+                        </a:defRPr>
+                      </a:pPr>
+                      <a:r>
+                        <a:t>96.00% Recall</a:t>
+                      </a:r>
+                    </a:p>
+                  </a:txBody>
+                  <a:tcPr>
+                    <a:solidFill>
+                      <a:srgbClr val="F0FDF4"/>
+                    </a:solidFill>
+                  </a:tcPr>
+                </a:tc>
+              </a:tr>
+              <a:tr h="679268">
+                <a:tc>
+                  <a:txBody>
+                    <a:bodyPr/>
+                    <a:lstStyle/>
+                    <a:p>
+                      <a:pPr algn="l">
+                        <a:defRPr sz="1050" b="0">
+                          <a:solidFill>
+                            <a:srgbClr val="0F172A"/>
+                          </a:solidFill>
+                          <a:latin typeface="Arial"/>
+                        </a:defRPr>
+                      </a:pPr>
+                      <a:r>
+                        <a:t>Phase 2 Single-Slice ViT</a:t>
+                      </a:r>
+                    </a:p>
+                  </a:txBody>
+                  <a:tcPr>
+                    <a:solidFill>
+                      <a:srgbClr val="FFFFFF"/>
+                    </a:solidFill>
+                  </a:tcPr>
+                </a:tc>
+                <a:tc>
+                  <a:txBody>
+                    <a:bodyPr/>
+                    <a:lstStyle/>
+                    <a:p>
+                      <a:pPr algn="ctr">
+                        <a:defRPr sz="1050" b="0">
+                          <a:solidFill>
+                            <a:srgbClr val="0F172A"/>
+                          </a:solidFill>
+                          <a:latin typeface="Arial"/>
+                        </a:defRPr>
+                      </a:pPr>
+                      <a:r>
+                        <a:t>6-Class Action</a:t>
+                      </a:r>
+                    </a:p>
+                  </a:txBody>
+                  <a:tcPr>
+                    <a:solidFill>
+                      <a:srgbClr val="FFFFFF"/>
+                    </a:solidFill>
+                  </a:tcPr>
+                </a:tc>
+                <a:tc>
+                  <a:txBody>
+                    <a:bodyPr/>
+                    <a:lstStyle/>
+                    <a:p>
+                      <a:pPr algn="ctr">
+                        <a:defRPr sz="1050" b="0">
+                          <a:solidFill>
+                            <a:srgbClr val="0F172A"/>
+                          </a:solidFill>
+                          <a:latin typeface="Arial"/>
+                        </a:defRPr>
+                      </a:pPr>
+                      <a:r>
+                        <a:t>9.8M (38.4 MB)</a:t>
+                      </a:r>
+                    </a:p>
+                  </a:txBody>
+                  <a:tcPr>
+                    <a:solidFill>
+                      <a:srgbClr val="FFFFFF"/>
+                    </a:solidFill>
+                  </a:tcPr>
+                </a:tc>
+                <a:tc>
+                  <a:txBody>
+                    <a:bodyPr/>
+                    <a:lstStyle/>
+                    <a:p>
+                      <a:pPr algn="ctr">
+                        <a:defRPr sz="1050" b="0">
+                          <a:solidFill>
+                            <a:srgbClr val="0F172A"/>
+                          </a:solidFill>
+                          <a:latin typeface="Arial"/>
+                        </a:defRPr>
+                      </a:pPr>
+                      <a:r>
+                        <a:t>66.82%</a:t>
+                      </a:r>
+                    </a:p>
+                  </a:txBody>
+                  <a:tcPr>
+                    <a:solidFill>
+                      <a:srgbClr val="FFFFFF"/>
+                    </a:solidFill>
+                  </a:tcPr>
+                </a:tc>
+                <a:tc>
+                  <a:txBody>
+                    <a:bodyPr/>
+                    <a:lstStyle/>
+                    <a:p>
+                      <a:pPr algn="ctr">
+                        <a:defRPr sz="1050" b="0">
+                          <a:solidFill>
+                            <a:srgbClr val="0F172A"/>
+                          </a:solidFill>
+                          <a:latin typeface="Arial"/>
+                        </a:defRPr>
+                      </a:pPr>
+                      <a:r>
+                        <a:t>71.23%</a:t>
+                      </a:r>
+                    </a:p>
+                  </a:txBody>
+                  <a:tcPr>
+                    <a:solidFill>
+                      <a:srgbClr val="FFFFFF"/>
+                    </a:solidFill>
+                  </a:tcPr>
+                </a:tc>
+                <a:tc>
+                  <a:txBody>
+                    <a:bodyPr/>
+                    <a:lstStyle/>
+                    <a:p>
+                      <a:pPr algn="ctr">
+                        <a:defRPr sz="1050" b="0">
+                          <a:solidFill>
+                            <a:srgbClr val="0F172A"/>
+                          </a:solidFill>
+                          <a:latin typeface="Arial"/>
+                        </a:defRPr>
+                      </a:pPr>
+                      <a:r>
+                        <a:t>71.41% F1</a:t>
+                      </a:r>
+                    </a:p>
+                  </a:txBody>
+                  <a:tcPr>
+                    <a:solidFill>
+                      <a:srgbClr val="FFFFFF"/>
+                    </a:solidFill>
+                  </a:tcPr>
+                </a:tc>
+              </a:tr>
+              <a:tr h="679268">
+                <a:tc>
+                  <a:txBody>
+                    <a:bodyPr/>
+                    <a:lstStyle/>
+                    <a:p>
+                      <a:pPr algn="l">
+                        <a:defRPr sz="1050" b="1">
+                          <a:solidFill>
+                            <a:srgbClr val="16A34A"/>
+                          </a:solidFill>
+                          <a:latin typeface="Arial"/>
+                        </a:defRPr>
+                      </a:pPr>
+                      <a:r>
+                        <a:t>Phase 2 Refined TSN VideoViT 🏆</a:t>
+                      </a:r>
+                    </a:p>
+                  </a:txBody>
+                  <a:tcPr>
+                    <a:solidFill>
+                      <a:srgbClr val="F0FDF4"/>
+                    </a:solidFill>
+                  </a:tcPr>
+                </a:tc>
+                <a:tc>
+                  <a:txBody>
+                    <a:bodyPr/>
+                    <a:lstStyle/>
+                    <a:p>
+                      <a:pPr algn="ctr">
+                        <a:defRPr sz="1050" b="1">
+                          <a:solidFill>
+                            <a:srgbClr val="16A34A"/>
+                          </a:solidFill>
+                          <a:latin typeface="Arial"/>
+                        </a:defRPr>
+                      </a:pPr>
+                      <a:r>
+                        <a:t>6-Class Action</a:t>
+                      </a:r>
+                    </a:p>
+                  </a:txBody>
+                  <a:tcPr>
+                    <a:solidFill>
+                      <a:srgbClr val="F0FDF4"/>
+                    </a:solidFill>
+                  </a:tcPr>
+                </a:tc>
+                <a:tc>
+                  <a:txBody>
+                    <a:bodyPr/>
+                    <a:lstStyle/>
+                    <a:p>
+                      <a:pPr algn="ctr">
+                        <a:defRPr sz="1050" b="1">
+                          <a:solidFill>
+                            <a:srgbClr val="16A34A"/>
+                          </a:solidFill>
+                          <a:latin typeface="Arial"/>
+                        </a:defRPr>
+                      </a:pPr>
+                      <a:r>
+                        <a:t>9.9M (38.4 MB)</a:t>
+                      </a:r>
+                    </a:p>
+                  </a:txBody>
+                  <a:tcPr>
+                    <a:solidFill>
+                      <a:srgbClr val="F0FDF4"/>
+                    </a:solidFill>
+                  </a:tcPr>
+                </a:tc>
+                <a:tc>
+                  <a:txBody>
+                    <a:bodyPr/>
+                    <a:lstStyle/>
+                    <a:p>
+                      <a:pPr algn="ctr">
+                        <a:defRPr sz="1050" b="1">
+                          <a:solidFill>
+                            <a:srgbClr val="16A34A"/>
+                          </a:solidFill>
+                          <a:latin typeface="Arial"/>
+                        </a:defRPr>
+                      </a:pPr>
+                      <a:r>
+                        <a:t>79.15%</a:t>
+                      </a:r>
+                    </a:p>
+                  </a:txBody>
+                  <a:tcPr>
+                    <a:solidFill>
+                      <a:srgbClr val="F0FDF4"/>
+                    </a:solidFill>
+                  </a:tcPr>
+                </a:tc>
+                <a:tc>
+                  <a:txBody>
+                    <a:bodyPr/>
+                    <a:lstStyle/>
+                    <a:p>
+                      <a:pPr algn="ctr">
+                        <a:defRPr sz="1050" b="1">
+                          <a:solidFill>
+                            <a:srgbClr val="16A34A"/>
+                          </a:solidFill>
+                          <a:latin typeface="Arial"/>
+                        </a:defRPr>
+                      </a:pPr>
+                      <a:r>
+                        <a:t>77.36%</a:t>
+                      </a:r>
+                    </a:p>
+                  </a:txBody>
+                  <a:tcPr>
+                    <a:solidFill>
+                      <a:srgbClr val="F0FDF4"/>
+                    </a:solidFill>
+                  </a:tcPr>
+                </a:tc>
+                <a:tc>
+                  <a:txBody>
+                    <a:bodyPr/>
+                    <a:lstStyle/>
+                    <a:p>
+                      <a:pPr algn="ctr">
+                        <a:defRPr sz="1050" b="1">
+                          <a:solidFill>
+                            <a:srgbClr val="16A34A"/>
+                          </a:solidFill>
+                          <a:latin typeface="Arial"/>
+                        </a:defRPr>
+                      </a:pPr>
+                      <a:r>
+                        <a:t>77.61% F1</a:t>
+                      </a:r>
+                    </a:p>
+                  </a:txBody>
+                  <a:tcPr>
+                    <a:solidFill>
+                      <a:srgbClr val="F0FDF4"/>
+                    </a:solidFill>
+                  </a:tcPr>
+                </a:tc>
+              </a:tr>
+              <a:tr h="679272">
+                <a:tc>
+                  <a:txBody>
+                    <a:bodyPr/>
+                    <a:lstStyle/>
+                    <a:p>
+                      <a:pPr algn="l">
+                        <a:defRPr sz="1050" b="1">
+                          <a:solidFill>
+                            <a:srgbClr val="16A34A"/>
+                          </a:solidFill>
+                          <a:latin typeface="Arial"/>
+                        </a:defRPr>
+                      </a:pPr>
+                      <a:r>
+                        <a:t>Phase 3 Watchlist Face Match 🏆</a:t>
+                      </a:r>
+                    </a:p>
+                  </a:txBody>
+                  <a:tcPr>
+                    <a:solidFill>
+                      <a:srgbClr val="F0FDF4"/>
+                    </a:solidFill>
+                  </a:tcPr>
+                </a:tc>
+                <a:tc>
+                  <a:txBody>
+                    <a:bodyPr/>
+                    <a:lstStyle/>
+                    <a:p>
+                      <a:pPr algn="ctr">
+                        <a:defRPr sz="1050" b="1">
+                          <a:solidFill>
+                            <a:srgbClr val="16A34A"/>
+                          </a:solidFill>
+                          <a:latin typeface="Arial"/>
+                        </a:defRPr>
+                      </a:pPr>
+                      <a:r>
+                        <a:t>Identity Embed</a:t>
+                      </a:r>
+                    </a:p>
+                  </a:txBody>
+                  <a:tcPr>
+                    <a:solidFill>
+                      <a:srgbClr val="F0FDF4"/>
+                    </a:solidFill>
+                  </a:tcPr>
+                </a:tc>
+                <a:tc>
+                  <a:txBody>
+                    <a:bodyPr/>
+                    <a:lstStyle/>
+                    <a:p>
+                      <a:pPr algn="ctr">
+                        <a:defRPr sz="1050" b="1">
+                          <a:solidFill>
+                            <a:srgbClr val="16A34A"/>
+                          </a:solidFill>
+                          <a:latin typeface="Arial"/>
+                        </a:defRPr>
+                      </a:pPr>
+                      <a:r>
+                        <a:t>4.2M (16.8 MB)</a:t>
+                      </a:r>
+                    </a:p>
+                  </a:txBody>
+                  <a:tcPr>
+                    <a:solidFill>
+                      <a:srgbClr val="F0FDF4"/>
+                    </a:solidFill>
+                  </a:tcPr>
+                </a:tc>
+                <a:tc>
+                  <a:txBody>
+                    <a:bodyPr/>
+                    <a:lstStyle/>
+                    <a:p>
+                      <a:pPr algn="ctr">
+                        <a:defRPr sz="1050" b="1">
+                          <a:solidFill>
+                            <a:srgbClr val="16A34A"/>
+                          </a:solidFill>
+                          <a:latin typeface="Arial"/>
+                        </a:defRPr>
+                      </a:pPr>
+                      <a:r>
+                        <a:t>99.10%</a:t>
+                      </a:r>
+                    </a:p>
+                  </a:txBody>
+                  <a:tcPr>
+                    <a:solidFill>
+                      <a:srgbClr val="F0FDF4"/>
+                    </a:solidFill>
+                  </a:tcPr>
+                </a:tc>
+                <a:tc>
+                  <a:txBody>
+                    <a:bodyPr/>
+                    <a:lstStyle/>
+                    <a:p>
+                      <a:pPr algn="ctr">
+                        <a:defRPr sz="1050" b="1">
+                          <a:solidFill>
+                            <a:srgbClr val="16A34A"/>
+                          </a:solidFill>
+                          <a:latin typeface="Arial"/>
+                        </a:defRPr>
+                      </a:pPr>
+                      <a:r>
+                        <a:t>98.40%</a:t>
+                      </a:r>
+                    </a:p>
+                  </a:txBody>
+                  <a:tcPr>
+                    <a:solidFill>
+                      <a:srgbClr val="F0FDF4"/>
+                    </a:solidFill>
+                  </a:tcPr>
+                </a:tc>
+                <a:tc>
+                  <a:txBody>
+                    <a:bodyPr/>
+                    <a:lstStyle/>
+                    <a:p>
+                      <a:pPr algn="ctr">
+                        <a:defRPr sz="1050" b="1">
+                          <a:solidFill>
+                            <a:srgbClr val="16A34A"/>
+                          </a:solidFill>
+                          <a:latin typeface="Arial"/>
+                        </a:defRPr>
+                      </a:pPr>
+                      <a:r>
+                        <a:t>98.40% Match</a:t>
+                      </a:r>
+                    </a:p>
+                  </a:txBody>
+                  <a:tcPr>
+                    <a:solidFill>
+                      <a:srgbClr val="F0FDF4"/>
+                    </a:solidFill>
+                  </a:tcPr>
+                </a:tc>
+              </a:tr>
+            </a:tbl>
+          </a:graphicData>
+        </a:graphic>
+      </p:graphicFrame>
+    </p:spTree>
+  </p:cSld>
+  <p:clrMapOvr>
+    <a:masterClrMapping/>
+  </p:clrMapOvr>
+</p:sld>
+</file>
+
+<file path=ppt/slides/slide13.xml><?xml version="1.0" encoding="utf-8"?>
+<p:sld xmlns:a="http://schemas.openxmlformats.org/drawingml/2006/main" xmlns:p="http://schemas.openxmlformats.org/presentationml/2006/main" xmlns:r="http://schemas.openxmlformats.org/officeDocument/2006/relationships">
+  <p:cSld>
+    <p:spTree>
+      <p:nvGrpSpPr>
+        <p:cNvPr id="1" name=""/>
+        <p:cNvGrpSpPr/>
+        <p:nvPr/>
+      </p:nvGrpSpPr>
+      <p:grpSpPr/>
+      <p:sp>
+        <p:nvSpPr>
+          <p:cNvPr id="2" name="TextBox 1"/>
+          <p:cNvSpPr txBox="1"/>
+          <p:nvPr/>
+        </p:nvSpPr>
+        <p:spPr>
+          <a:xfrm>
+            <a:off x="731520" y="365760"/>
+            <a:ext cx="10698480" cy="1005840"/>
+          </a:xfrm>
+          <a:prstGeom prst="rect">
+            <a:avLst/>
+          </a:prstGeom>
+          <a:noFill/>
+        </p:spPr>
+        <p:txBody>
+          <a:bodyPr wrap="square" lIns="0" tIns="0" rIns="0" bIns="0">
+            <a:spAutoFit/>
+          </a:bodyPr>
+          <a:lstStyle/>
+          <a:p>
+            <a:pPr>
+              <a:defRPr sz="1000" b="1">
+                <a:solidFill>
+                  <a:srgbClr val="1E3A8A"/>
+                </a:solidFill>
+                <a:latin typeface="Arial"/>
+              </a:defRPr>
+            </a:pPr>
+            <a:r>
+              <a:t>9. COMPUTATIONAL EFFICIENCY</a:t>
+            </a:r>
+          </a:p>
+          <a:p>
+            <a:pPr>
+              <a:defRPr sz="2200" b="1">
+                <a:solidFill>
+                  <a:srgbClr val="0F172A"/>
+                </a:solidFill>
+                <a:latin typeface="Arial"/>
+              </a:defRPr>
+            </a:pPr>
+            <a:r>
+              <a:t>Real-Time Inference Latency &amp; Edge Deployment Profile</a:t>
+            </a:r>
+          </a:p>
+        </p:txBody>
+      </p:sp>
+      <p:sp>
+        <p:nvSpPr>
+          <p:cNvPr id="3" name="Rounded Rectangle 2"/>
+          <p:cNvSpPr/>
+          <p:nvPr/>
+        </p:nvSpPr>
+        <p:spPr>
+          <a:xfrm>
+            <a:off x="731520" y="1463040"/>
+            <a:ext cx="5120640" cy="4754880"/>
+          </a:xfrm>
+          <a:prstGeom prst="roundRect">
+            <a:avLst/>
+          </a:prstGeom>
+          <a:solidFill>
+            <a:srgbClr val="F1F5F9"/>
+          </a:solidFill>
+          <a:ln w="12700">
+            <a:solidFill>
+              <a:srgbClr val="CBD5E1"/>
+            </a:solidFill>
+          </a:ln>
+        </p:spPr>
+        <p:style>
+          <a:lnRef idx="1">
+            <a:schemeClr val="accent1"/>
+          </a:lnRef>
+          <a:fillRef idx="3">
+            <a:schemeClr val="accent1"/>
+          </a:fillRef>
+          <a:effectRef idx="2">
+            <a:schemeClr val="accent1"/>
+          </a:effectRef>
+          <a:fontRef idx="minor">
+            <a:schemeClr val="lt1"/>
+          </a:fontRef>
+        </p:style>
+        <p:txBody>
+          <a:bodyPr rtlCol="0" anchor="ctr"/>
+          <a:lstStyle/>
+          <a:p>
+            <a:pPr algn="ctr"/>
+          </a:p>
+        </p:txBody>
+      </p:sp>
+      <p:sp>
+        <p:nvSpPr>
+          <p:cNvPr id="4" name="TextBox 3"/>
+          <p:cNvSpPr txBox="1"/>
+          <p:nvPr/>
+        </p:nvSpPr>
+        <p:spPr>
+          <a:xfrm>
+            <a:off x="1005840" y="1737360"/>
+            <a:ext cx="4572000" cy="4206240"/>
+          </a:xfrm>
+          <a:prstGeom prst="rect">
+            <a:avLst/>
+          </a:prstGeom>
+          <a:noFill/>
+        </p:spPr>
+        <p:txBody>
+          <a:bodyPr wrap="square">
+            <a:spAutoFit/>
+          </a:bodyPr>
+          <a:lstStyle/>
+          <a:p>
+            <a:pPr>
+              <a:defRPr sz="1500" b="1">
+                <a:solidFill>
+                  <a:srgbClr val="1E3A8A"/>
+                </a:solidFill>
+                <a:latin typeface="Arial"/>
+              </a:defRPr>
+            </a:pPr>
+            <a:r>
+              <a:t>⚡ Per-Stage Latency Breakdown</a:t>
+            </a:r>
+          </a:p>
+          <a:p>
+            <a:pPr>
+              <a:spcBef>
+                <a:spcPts val="800"/>
+              </a:spcBef>
+              <a:defRPr sz="1150">
+                <a:solidFill>
+                  <a:srgbClr val="0F172A"/>
+                </a:solidFill>
+                <a:latin typeface="Arial"/>
+              </a:defRPr>
+            </a:pPr>
+            <a:r>
+              <a:t>• Stage 1 Binary Gate (VideoViT): ~18 ms / chunk (55+ FPS real-time throughput).</a:t>
+            </a:r>
+          </a:p>
+          <a:p>
+            <a:pPr>
+              <a:spcBef>
+                <a:spcPts val="800"/>
+              </a:spcBef>
+              <a:defRPr sz="1150">
+                <a:solidFill>
+                  <a:srgbClr val="0F172A"/>
+                </a:solidFill>
+                <a:latin typeface="Arial"/>
+              </a:defRPr>
+            </a:pPr>
+            <a:r>
+              <a:t>• Stage 2 Action ViT (TSN-ViT): ~35 ms / chunk (Triggered selectively only upon threat).</a:t>
+            </a:r>
+          </a:p>
+          <a:p>
+            <a:pPr>
+              <a:spcBef>
+                <a:spcPts val="800"/>
+              </a:spcBef>
+              <a:defRPr sz="1150">
+                <a:solidFill>
+                  <a:srgbClr val="0F172A"/>
+                </a:solidFill>
+                <a:latin typeface="Arial"/>
+              </a:defRPr>
+            </a:pPr>
+            <a:r>
+              <a:t>• Stage 3A Weapon Detection (YOLOv8): ~12 ms / keyframe.</a:t>
+            </a:r>
+          </a:p>
+          <a:p>
+            <a:pPr>
+              <a:spcBef>
+                <a:spcPts val="800"/>
+              </a:spcBef>
+              <a:defRPr sz="1150">
+                <a:solidFill>
+                  <a:srgbClr val="0F172A"/>
+                </a:solidFill>
+                <a:latin typeface="Arial"/>
+              </a:defRPr>
+            </a:pPr>
+            <a:r>
+              <a:t>• Stage 3B Face Recognition &amp; Match: ~15 ms / suspect face.</a:t>
+            </a:r>
+          </a:p>
+          <a:p>
+            <a:pPr>
+              <a:spcBef>
+                <a:spcPts val="800"/>
+              </a:spcBef>
+              <a:defRPr sz="1150">
+                <a:solidFill>
+                  <a:srgbClr val="0F172A"/>
+                </a:solidFill>
+                <a:latin typeface="Arial"/>
+              </a:defRPr>
+            </a:pPr>
+            <a:r>
+              <a:t>• Stage 4 Dossier Generation &amp; JSON Export: &lt; 5 ms.</a:t>
+            </a:r>
+          </a:p>
+          <a:p>
+            <a:pPr>
+              <a:spcBef>
+                <a:spcPts val="800"/>
+              </a:spcBef>
+              <a:defRPr sz="1150">
+                <a:solidFill>
+                  <a:srgbClr val="0F172A"/>
+                </a:solidFill>
+                <a:latin typeface="Arial"/>
+              </a:defRPr>
+            </a:pPr>
+            <a:r>
+              <a:t>• Total End-to-End Latency: Under 90 ms from live CCTV frame to police dossier generation!</a:t>
+            </a:r>
+          </a:p>
+        </p:txBody>
+      </p:sp>
+      <p:sp>
+        <p:nvSpPr>
+          <p:cNvPr id="5" name="Rounded Rectangle 4"/>
+          <p:cNvSpPr/>
+          <p:nvPr/>
+        </p:nvSpPr>
+        <p:spPr>
+          <a:xfrm>
+            <a:off x="6309360" y="1463040"/>
+            <a:ext cx="5120640" cy="4754880"/>
+          </a:xfrm>
+          <a:prstGeom prst="roundRect">
+            <a:avLst/>
+          </a:prstGeom>
+          <a:solidFill>
+            <a:srgbClr val="F1F5F9"/>
+          </a:solidFill>
+          <a:ln w="12700">
+            <a:solidFill>
+              <a:srgbClr val="CBD5E1"/>
+            </a:solidFill>
+          </a:ln>
+        </p:spPr>
+        <p:style>
+          <a:lnRef idx="1">
+            <a:schemeClr val="accent1"/>
+          </a:lnRef>
+          <a:fillRef idx="3">
+            <a:schemeClr val="accent1"/>
+          </a:fillRef>
+          <a:effectRef idx="2">
+            <a:schemeClr val="accent1"/>
+          </a:effectRef>
+          <a:fontRef idx="minor">
+            <a:schemeClr val="lt1"/>
+          </a:fontRef>
+        </p:style>
+        <p:txBody>
+          <a:bodyPr rtlCol="0" anchor="ctr"/>
+          <a:lstStyle/>
+          <a:p>
+            <a:pPr algn="ctr"/>
+          </a:p>
+        </p:txBody>
+      </p:sp>
+      <p:sp>
+        <p:nvSpPr>
+          <p:cNvPr id="6" name="TextBox 5"/>
+          <p:cNvSpPr txBox="1"/>
+          <p:nvPr/>
+        </p:nvSpPr>
+        <p:spPr>
+          <a:xfrm>
+            <a:off x="6583680" y="1737360"/>
+            <a:ext cx="4572000" cy="4206240"/>
+          </a:xfrm>
+          <a:prstGeom prst="rect">
+            <a:avLst/>
+          </a:prstGeom>
+          <a:noFill/>
+        </p:spPr>
+        <p:txBody>
+          <a:bodyPr wrap="square">
+            <a:spAutoFit/>
+          </a:bodyPr>
+          <a:lstStyle/>
+          <a:p>
+            <a:pPr>
+              <a:defRPr sz="1500" b="1">
+                <a:solidFill>
+                  <a:srgbClr val="0F172A"/>
+                </a:solidFill>
+                <a:latin typeface="Arial"/>
+              </a:defRPr>
+            </a:pPr>
+            <a:r>
+              <a:t>🖥️ Hardware Portability &amp; Multi-Stream</a:t>
+            </a:r>
+          </a:p>
+          <a:p>
+            <a:pPr>
+              <a:spcBef>
+                <a:spcPts val="800"/>
+              </a:spcBef>
+              <a:defRPr sz="1150">
+                <a:solidFill>
+                  <a:srgbClr val="0F172A"/>
+                </a:solidFill>
+                <a:latin typeface="Arial"/>
+              </a:defRPr>
+            </a:pPr>
+            <a:r>
+              <a:t>• Edge Hardware Compatibility: Models run on NVIDIA Jetson Orin/Xavier, standard multi-core CPUs, and data-center GPUs.</a:t>
+            </a:r>
+          </a:p>
+          <a:p>
+            <a:pPr>
+              <a:spcBef>
+                <a:spcPts val="800"/>
+              </a:spcBef>
+              <a:defRPr sz="1150">
+                <a:solidFill>
+                  <a:srgbClr val="0F172A"/>
+                </a:solidFill>
+                <a:latin typeface="Arial"/>
+              </a:defRPr>
+            </a:pPr>
+            <a:r>
+              <a:t>• Multi-Stream Camera Concurrency: 1 server with 32 CPU threads handles over 25 concurrent RTSP CCTV camera feeds simultaneously.</a:t>
+            </a:r>
+          </a:p>
+          <a:p>
+            <a:pPr>
+              <a:spcBef>
+                <a:spcPts val="800"/>
+              </a:spcBef>
+              <a:defRPr sz="1150">
+                <a:solidFill>
+                  <a:srgbClr val="0F172A"/>
+                </a:solidFill>
+                <a:latin typeface="Arial"/>
+              </a:defRPr>
+            </a:pPr>
+            <a:r>
+              <a:t>• Zero-Bandwidth Idle Mode: 99% of normal video streams are processed locally without cloud video streaming costs.</a:t>
+            </a:r>
+          </a:p>
+          <a:p>
+            <a:pPr>
+              <a:spcBef>
+                <a:spcPts val="800"/>
+              </a:spcBef>
+              <a:defRPr sz="1150">
+                <a:solidFill>
+                  <a:srgbClr val="0F172A"/>
+                </a:solidFill>
+                <a:latin typeface="Arial"/>
+              </a:defRPr>
+            </a:pPr>
+            <a:r>
+              <a:t>• Fault Tolerance: Automatic exception recovery ensures continuous 24/7 uptime during network drops or camera reconnections.</a:t>
+            </a:r>
+          </a:p>
+        </p:txBody>
+      </p:sp>
+    </p:spTree>
+  </p:cSld>
+  <p:clrMapOvr>
+    <a:masterClrMapping/>
+  </p:clrMapOvr>
+</p:sld>
+</file>
+
+<file path=ppt/slides/slide14.xml><?xml version="1.0" encoding="utf-8"?>
+<p:sld xmlns:a="http://schemas.openxmlformats.org/drawingml/2006/main" xmlns:p="http://schemas.openxmlformats.org/presentationml/2006/main" xmlns:r="http://schemas.openxmlformats.org/officeDocument/2006/relationships">
+  <p:cSld>
+    <p:spTree>
+      <p:nvGrpSpPr>
+        <p:cNvPr id="1" name=""/>
+        <p:cNvGrpSpPr/>
+        <p:nvPr/>
+      </p:nvGrpSpPr>
+      <p:grpSpPr/>
+      <p:sp>
+        <p:nvSpPr>
+          <p:cNvPr id="2" name="Rectangle 1"/>
+          <p:cNvSpPr/>
+          <p:nvPr/>
+        </p:nvSpPr>
+        <p:spPr>
+          <a:xfrm>
+            <a:off x="0" y="0"/>
+            <a:ext cx="12191695" cy="6858000"/>
+          </a:xfrm>
+          <a:prstGeom prst="rect">
+            <a:avLst/>
+          </a:prstGeom>
+          <a:solidFill>
+            <a:srgbClr val="0F172A"/>
+          </a:solidFill>
+          <a:ln>
+            <a:noFill/>
+          </a:ln>
+        </p:spPr>
+        <p:style>
+          <a:lnRef idx="1">
+            <a:schemeClr val="accent1"/>
+          </a:lnRef>
+          <a:fillRef idx="3">
+            <a:schemeClr val="accent1"/>
+          </a:fillRef>
+          <a:effectRef idx="2">
+            <a:schemeClr val="accent1"/>
+          </a:effectRef>
+          <a:fontRef idx="minor">
+            <a:schemeClr val="lt1"/>
+          </a:fontRef>
+        </p:style>
+        <p:txBody>
+          <a:bodyPr rtlCol="0" anchor="ctr"/>
+          <a:lstStyle/>
+          <a:p>
+            <a:pPr algn="ctr"/>
+          </a:p>
+        </p:txBody>
+      </p:sp>
+      <p:sp>
+        <p:nvSpPr>
+          <p:cNvPr id="3" name="TextBox 2"/>
+          <p:cNvSpPr txBox="1"/>
+          <p:nvPr/>
+        </p:nvSpPr>
+        <p:spPr>
+          <a:xfrm>
+            <a:off x="914400" y="914400"/>
+            <a:ext cx="10332720" cy="5029200"/>
+          </a:xfrm>
+          <a:prstGeom prst="rect">
+            <a:avLst/>
+          </a:prstGeom>
+          <a:noFill/>
+        </p:spPr>
+        <p:txBody>
+          <a:bodyPr wrap="square">
+            <a:spAutoFit/>
+          </a:bodyPr>
+          <a:lstStyle/>
+          <a:p>
+            <a:pPr>
+              <a:defRPr sz="2600" b="1">
+                <a:solidFill>
+                  <a:srgbClr val="FFFFFF"/>
+                </a:solidFill>
+                <a:latin typeface="Arial"/>
+              </a:defRPr>
+            </a:pPr>
+            <a:r>
+              <a:t>RESEARCH CONTRIBUTIONS &amp; FUTURE ROADMAP</a:t>
+            </a:r>
+          </a:p>
+          <a:p>
+            <a:pPr>
+              <a:spcBef>
+                <a:spcPts val="1400"/>
+              </a:spcBef>
+              <a:defRPr sz="1250">
+                <a:solidFill>
+                  <a:srgbClr val="E2E8F0"/>
+                </a:solidFill>
+                <a:latin typeface="Arial"/>
+              </a:defRPr>
+            </a:pPr>
+            <a:r>
+              <a:t>✅ Solved the Speed vs Accuracy Surveillance Paradox: Fast continuous screening (95.50% Accuracy) coupled with on-demand fine-grained action classification (77.36% Accuracy) and weapon fusion (&gt;95%).</a:t>
+            </a:r>
+          </a:p>
+          <a:p>
+            <a:pPr>
+              <a:spcBef>
+                <a:spcPts val="1400"/>
+              </a:spcBef>
+              <a:defRPr sz="1250">
+                <a:solidFill>
+                  <a:srgbClr val="E2E8F0"/>
+                </a:solidFill>
+                <a:latin typeface="Arial"/>
+              </a:defRPr>
+            </a:pPr>
+            <a:r>
+              <a:t>✅ Automated Evidence Synthesis: Eliminates operator cognitive fatigue and generates court-ready forensic incident dossiers in sub-90 ms.</a:t>
+            </a:r>
+          </a:p>
+          <a:p>
+            <a:pPr>
+              <a:spcBef>
+                <a:spcPts val="1400"/>
+              </a:spcBef>
+              <a:defRPr sz="1250">
+                <a:solidFill>
+                  <a:srgbClr val="E2E8F0"/>
+                </a:solidFill>
+                <a:latin typeface="Arial"/>
+              </a:defRPr>
+            </a:pPr>
+            <a:r>
+              <a:t>✅ Robust Against Real-World CCTV Artifacts: Unsharp masking, CLAHE contrast, and TSN temporal sampling ensure high accuracy across dark and blurry feeds.</a:t>
+            </a:r>
+          </a:p>
+          <a:p>
+            <a:pPr>
+              <a:spcBef>
+                <a:spcPts val="1400"/>
+              </a:spcBef>
+              <a:defRPr sz="1250">
+                <a:solidFill>
+                  <a:srgbClr val="E2E8F0"/>
+                </a:solidFill>
+                <a:latin typeface="Arial"/>
+              </a:defRPr>
+            </a:pPr>
+            <a:r>
+              <a:t>✅ Fully Replicable Open-Source Benchmark: Complete codebase, trained checkpoints, and Excel sheets maintained on GitHub: github.com/Visshu78/Realtime_Crime_detection.</a:t>
+            </a:r>
+          </a:p>
+          <a:p>
+            <a:pPr>
+              <a:spcBef>
+                <a:spcPts val="1400"/>
+              </a:spcBef>
+              <a:defRPr sz="1250">
+                <a:solidFill>
+                  <a:srgbClr val="E2E8F0"/>
+                </a:solidFill>
+                <a:latin typeface="Arial"/>
+              </a:defRPr>
+            </a:pPr>
+            <a:r>
+              <a:t>🔮 Future Scope: Multi-camera 3D person re-identification (city-wide tracking) and acoustic sensor fusion for gunshot/scream detection in blind spots.</a:t>
+            </a:r>
+          </a:p>
+        </p:txBody>
+      </p:sp>
+    </p:spTree>
+  </p:cSld>
+  <p:clrMapOvr>
+    <a:masterClrMapping/>
+  </p:clrMapOvr>
+</p:sld>
+</file>
+
+<file path=ppt/slides/slide2.xml><?xml version="1.0" encoding="utf-8"?>
+<p:sld xmlns:a="http://schemas.openxmlformats.org/drawingml/2006/main" xmlns:p="http://schemas.openxmlformats.org/presentationml/2006/main" xmlns:r="http://schemas.openxmlformats.org/officeDocument/2006/relationships">
+  <p:cSld>
+    <p:spTree>
+      <p:nvGrpSpPr>
+        <p:cNvPr id="1" name=""/>
+        <p:cNvGrpSpPr/>
+        <p:nvPr/>
+      </p:nvGrpSpPr>
+      <p:grpSpPr/>
+      <p:sp>
+        <p:nvSpPr>
+          <p:cNvPr id="2" name="TextBox 1"/>
+          <p:cNvSpPr txBox="1"/>
+          <p:nvPr/>
+        </p:nvSpPr>
+        <p:spPr>
+          <a:xfrm>
+            <a:off x="731520" y="365760"/>
+            <a:ext cx="10698480" cy="1005840"/>
+          </a:xfrm>
+          <a:prstGeom prst="rect">
+            <a:avLst/>
+          </a:prstGeom>
+          <a:noFill/>
+        </p:spPr>
+        <p:txBody>
+          <a:bodyPr wrap="square" lIns="0" tIns="0" rIns="0" bIns="0">
+            <a:spAutoFit/>
+          </a:bodyPr>
+          <a:lstStyle/>
+          <a:p>
+            <a:pPr>
+              <a:defRPr sz="1000" b="1">
+                <a:solidFill>
+                  <a:srgbClr val="1E3A8A"/>
+                </a:solidFill>
+                <a:latin typeface="Arial"/>
+              </a:defRPr>
+            </a:pPr>
+            <a:r>
+              <a:t>1. PROBLEM FORMULATION</a:t>
+            </a:r>
+          </a:p>
+          <a:p>
+            <a:pPr>
+              <a:defRPr sz="2200" b="1">
+                <a:solidFill>
+                  <a:srgbClr val="0F172A"/>
+                </a:solidFill>
+                <a:latin typeface="Arial"/>
+              </a:defRPr>
+            </a:pPr>
+            <a:r>
+              <a:t>Research Motivation &amp; Literature Gaps</a:t>
+            </a:r>
+          </a:p>
+        </p:txBody>
+      </p:sp>
+      <p:sp>
+        <p:nvSpPr>
+          <p:cNvPr id="3" name="Rounded Rectangle 2"/>
+          <p:cNvSpPr/>
+          <p:nvPr/>
+        </p:nvSpPr>
+        <p:spPr>
+          <a:xfrm>
+            <a:off x="731520" y="1463040"/>
+            <a:ext cx="5120640" cy="4754880"/>
+          </a:xfrm>
+          <a:prstGeom prst="roundRect">
+            <a:avLst/>
+          </a:prstGeom>
+          <a:solidFill>
+            <a:srgbClr val="F1F5F9"/>
+          </a:solidFill>
+          <a:ln w="12700">
+            <a:solidFill>
+              <a:srgbClr val="CBD5E1"/>
+            </a:solidFill>
+          </a:ln>
+        </p:spPr>
+        <p:style>
+          <a:lnRef idx="1">
+            <a:schemeClr val="accent1"/>
+          </a:lnRef>
+          <a:fillRef idx="3">
+            <a:schemeClr val="accent1"/>
+          </a:fillRef>
+          <a:effectRef idx="2">
+            <a:schemeClr val="accent1"/>
+          </a:effectRef>
+          <a:fontRef idx="minor">
+            <a:schemeClr val="lt1"/>
+          </a:fontRef>
+        </p:style>
+        <p:txBody>
+          <a:bodyPr rtlCol="0" anchor="ctr"/>
+          <a:lstStyle/>
+          <a:p>
+            <a:pPr algn="ctr"/>
+          </a:p>
+        </p:txBody>
+      </p:sp>
+      <p:sp>
+        <p:nvSpPr>
+          <p:cNvPr id="4" name="TextBox 3"/>
+          <p:cNvSpPr txBox="1"/>
+          <p:nvPr/>
+        </p:nvSpPr>
+        <p:spPr>
+          <a:xfrm>
+            <a:off x="1005840" y="1737360"/>
+            <a:ext cx="4572000" cy="4206240"/>
+          </a:xfrm>
+          <a:prstGeom prst="rect">
+            <a:avLst/>
+          </a:prstGeom>
+          <a:noFill/>
+        </p:spPr>
+        <p:txBody>
+          <a:bodyPr wrap="square">
+            <a:spAutoFit/>
+          </a:bodyPr>
+          <a:lstStyle/>
+          <a:p>
+            <a:pPr>
+              <a:defRPr sz="1500" b="1">
+                <a:solidFill>
+                  <a:srgbClr val="DC2626"/>
+                </a:solidFill>
+                <a:latin typeface="Arial"/>
+              </a:defRPr>
+            </a:pPr>
+            <a:r>
+              <a:t>⚠️ Limitations in Existing Literature</a:t>
+            </a:r>
+          </a:p>
+          <a:p>
+            <a:pPr>
+              <a:spcBef>
+                <a:spcPts val="800"/>
+              </a:spcBef>
+              <a:defRPr sz="1150">
+                <a:solidFill>
+                  <a:srgbClr val="0F172A"/>
+                </a:solidFill>
+                <a:latin typeface="Arial"/>
+              </a:defRPr>
+            </a:pPr>
+            <a:r>
+              <a:t>• Heavy Monolithic 3D CNNs: Prior research (I3D, SlowFast-101, C3D) demands massive GPU memory per stream, making multi-camera city scaling computationally intractable.</a:t>
+            </a:r>
+          </a:p>
+          <a:p>
+            <a:pPr>
+              <a:spcBef>
+                <a:spcPts val="800"/>
+              </a:spcBef>
+              <a:defRPr sz="1150">
+                <a:solidFill>
+                  <a:srgbClr val="0F172A"/>
+                </a:solidFill>
+                <a:latin typeface="Arial"/>
+              </a:defRPr>
+            </a:pPr>
+            <a:r>
+              <a:t>• Cognitive Operator Fatigue: Human vigilance drops by &gt;95% after 20 minutes of continuous screen monitoring, leading to delayed or missed police dispatches.</a:t>
+            </a:r>
+          </a:p>
+          <a:p>
+            <a:pPr>
+              <a:spcBef>
+                <a:spcPts val="800"/>
+              </a:spcBef>
+              <a:defRPr sz="1150">
+                <a:solidFill>
+                  <a:srgbClr val="0F172A"/>
+                </a:solidFill>
+                <a:latin typeface="Arial"/>
+              </a:defRPr>
+            </a:pPr>
+            <a:r>
+              <a:t>• Legal Label Ambiguity: Datasets like UCF-Crime suffer from visual overlap (e.g. Stealing vs Burglary vs Robbery), causing severe classification confusion (22-29% accuracy).</a:t>
+            </a:r>
+          </a:p>
+          <a:p>
+            <a:pPr>
+              <a:spcBef>
+                <a:spcPts val="800"/>
+              </a:spcBef>
+              <a:defRPr sz="1150">
+                <a:solidFill>
+                  <a:srgbClr val="0F172A"/>
+                </a:solidFill>
+                <a:latin typeface="Arial"/>
+              </a:defRPr>
+            </a:pPr>
+            <a:r>
+              <a:t>• Lack of Evidence Synthesis: Existing systems output isolated alert flags rather than synthesized, court-ready forensic incident records.</a:t>
+            </a:r>
+          </a:p>
+        </p:txBody>
+      </p:sp>
+      <p:sp>
+        <p:nvSpPr>
+          <p:cNvPr id="5" name="Rounded Rectangle 4"/>
+          <p:cNvSpPr/>
+          <p:nvPr/>
+        </p:nvSpPr>
+        <p:spPr>
+          <a:xfrm>
+            <a:off x="6309360" y="1463040"/>
+            <a:ext cx="5120640" cy="4754880"/>
+          </a:xfrm>
+          <a:prstGeom prst="roundRect">
+            <a:avLst/>
+          </a:prstGeom>
+          <a:solidFill>
+            <a:srgbClr val="F1F5F9"/>
+          </a:solidFill>
+          <a:ln w="12700">
+            <a:solidFill>
+              <a:srgbClr val="CBD5E1"/>
+            </a:solidFill>
+          </a:ln>
+        </p:spPr>
+        <p:style>
+          <a:lnRef idx="1">
+            <a:schemeClr val="accent1"/>
+          </a:lnRef>
+          <a:fillRef idx="3">
+            <a:schemeClr val="accent1"/>
+          </a:fillRef>
+          <a:effectRef idx="2">
+            <a:schemeClr val="accent1"/>
+          </a:effectRef>
+          <a:fontRef idx="minor">
+            <a:schemeClr val="lt1"/>
+          </a:fontRef>
+        </p:style>
+        <p:txBody>
+          <a:bodyPr rtlCol="0" anchor="ctr"/>
+          <a:lstStyle/>
+          <a:p>
+            <a:pPr algn="ctr"/>
+          </a:p>
+        </p:txBody>
+      </p:sp>
+      <p:sp>
+        <p:nvSpPr>
+          <p:cNvPr id="6" name="TextBox 5"/>
+          <p:cNvSpPr txBox="1"/>
+          <p:nvPr/>
+        </p:nvSpPr>
+        <p:spPr>
+          <a:xfrm>
+            <a:off x="6583680" y="1737360"/>
+            <a:ext cx="4572000" cy="4206240"/>
+          </a:xfrm>
+          <a:prstGeom prst="rect">
+            <a:avLst/>
+          </a:prstGeom>
+          <a:noFill/>
+        </p:spPr>
+        <p:txBody>
+          <a:bodyPr wrap="square">
+            <a:spAutoFit/>
+          </a:bodyPr>
+          <a:lstStyle/>
+          <a:p>
+            <a:pPr>
+              <a:defRPr sz="1500" b="1">
+                <a:solidFill>
+                  <a:srgbClr val="1E3A8A"/>
+                </a:solidFill>
+                <a:latin typeface="Arial"/>
+              </a:defRPr>
+            </a:pPr>
+            <a:r>
+              <a:t>🎯 Our Proposed Research Contributions</a:t>
+            </a:r>
+          </a:p>
+          <a:p>
+            <a:pPr>
+              <a:spcBef>
+                <a:spcPts val="800"/>
+              </a:spcBef>
+              <a:defRPr sz="1150">
+                <a:solidFill>
+                  <a:srgbClr val="0F172A"/>
+                </a:solidFill>
+                <a:latin typeface="Arial"/>
+              </a:defRPr>
+            </a:pPr>
+            <a:r>
+              <a:t>• Hierarchical Cascaded Inference: Ultra-efficient 24/7 Gatekeeper filters &gt;99% of normal video, selectively triggering deeper action ViTs only upon verified crime events.</a:t>
+            </a:r>
+          </a:p>
+          <a:p>
+            <a:pPr>
+              <a:spcBef>
+                <a:spcPts val="800"/>
+              </a:spcBef>
+              <a:defRPr sz="1150">
+                <a:solidFill>
+                  <a:srgbClr val="0F172A"/>
+                </a:solidFill>
+                <a:latin typeface="Arial"/>
+              </a:defRPr>
+            </a:pPr>
+            <a:r>
+              <a:t>• Visual Preprocessing Restoration: Integrated Unsharp Masking (USM) edge enhancement and CLAHE contrast to restore structural motion gradients in noisy CCTV.</a:t>
+            </a:r>
+          </a:p>
+          <a:p>
+            <a:pPr>
+              <a:spcBef>
+                <a:spcPts val="800"/>
+              </a:spcBef>
+              <a:defRPr sz="1150">
+                <a:solidFill>
+                  <a:srgbClr val="0F172A"/>
+                </a:solidFill>
+                <a:latin typeface="Arial"/>
+              </a:defRPr>
+            </a:pPr>
+            <a:r>
+              <a:t>• Class-Balanced Focal Loss (beta=0.999): Effectively solves severe real-world dataset imbalance across violent crime classes (e.g. Abuse vs Riot).</a:t>
+            </a:r>
+          </a:p>
+          <a:p>
+            <a:pPr>
+              <a:spcBef>
+                <a:spcPts val="800"/>
+              </a:spcBef>
+              <a:defRPr sz="1150">
+                <a:solidFill>
+                  <a:srgbClr val="0F172A"/>
+                </a:solidFill>
+                <a:latin typeface="Arial"/>
+              </a:defRPr>
+            </a:pPr>
+            <a:r>
+              <a:t>• Multi-Modal Bayesian Decision Fusion: Fuses spatial YOLOv8 weapon bounding boxes with temporal action tokens to elevate shooting confidence to &gt;95%.</a:t>
+            </a:r>
+          </a:p>
+        </p:txBody>
+      </p:sp>
+    </p:spTree>
+  </p:cSld>
+  <p:clrMapOvr>
+    <a:masterClrMapping/>
+  </p:clrMapOvr>
+</p:sld>
+</file>
+
+<file path=ppt/slides/slide3.xml><?xml version="1.0" encoding="utf-8"?>
+<p:sld xmlns:a="http://schemas.openxmlformats.org/drawingml/2006/main" xmlns:p="http://schemas.openxmlformats.org/presentationml/2006/main" xmlns:r="http://schemas.openxmlformats.org/officeDocument/2006/relationships">
+  <p:cSld>
+    <p:spTree>
+      <p:nvGrpSpPr>
+        <p:cNvPr id="1" name=""/>
+        <p:cNvGrpSpPr/>
+        <p:nvPr/>
+      </p:nvGrpSpPr>
+      <p:grpSpPr/>
+      <p:sp>
+        <p:nvSpPr>
+          <p:cNvPr id="2" name="TextBox 1"/>
+          <p:cNvSpPr txBox="1"/>
+          <p:nvPr/>
+        </p:nvSpPr>
+        <p:spPr>
+          <a:xfrm>
+            <a:off x="731520" y="365760"/>
+            <a:ext cx="10698480" cy="1005840"/>
+          </a:xfrm>
+          <a:prstGeom prst="rect">
+            <a:avLst/>
+          </a:prstGeom>
+          <a:noFill/>
+        </p:spPr>
+        <p:txBody>
+          <a:bodyPr wrap="square" lIns="0" tIns="0" rIns="0" bIns="0">
+            <a:spAutoFit/>
+          </a:bodyPr>
+          <a:lstStyle/>
+          <a:p>
+            <a:pPr>
+              <a:defRPr sz="1000" b="1">
+                <a:solidFill>
+                  <a:srgbClr val="1E3A8A"/>
+                </a:solidFill>
+                <a:latin typeface="Arial"/>
+              </a:defRPr>
+            </a:pPr>
+            <a:r>
+              <a:t>2. SYSTEM DESIGN</a:t>
+            </a:r>
+          </a:p>
+          <a:p>
+            <a:pPr>
+              <a:defRPr sz="2200" b="1">
+                <a:solidFill>
+                  <a:srgbClr val="0F172A"/>
+                </a:solidFill>
+                <a:latin typeface="Arial"/>
+              </a:defRPr>
+            </a:pPr>
+            <a:r>
+              <a:t>Hierarchical Cascaded Surveillance Architecture</a:t>
+            </a:r>
+          </a:p>
+        </p:txBody>
+      </p:sp>
+      <p:sp>
+        <p:nvSpPr>
+          <p:cNvPr id="3" name="Rounded Rectangle 2"/>
+          <p:cNvSpPr/>
+          <p:nvPr/>
+        </p:nvSpPr>
+        <p:spPr>
+          <a:xfrm>
+            <a:off x="731520" y="1463040"/>
+            <a:ext cx="2560320" cy="4754880"/>
+          </a:xfrm>
+          <a:prstGeom prst="roundRect">
+            <a:avLst/>
+          </a:prstGeom>
+          <a:solidFill>
+            <a:srgbClr val="F1F5F9"/>
+          </a:solidFill>
+          <a:ln w="19050">
+            <a:solidFill>
+              <a:srgbClr val="1E3A8A"/>
+            </a:solidFill>
+          </a:ln>
+        </p:spPr>
+        <p:style>
+          <a:lnRef idx="1">
+            <a:schemeClr val="accent1"/>
+          </a:lnRef>
+          <a:fillRef idx="3">
+            <a:schemeClr val="accent1"/>
+          </a:fillRef>
+          <a:effectRef idx="2">
+            <a:schemeClr val="accent1"/>
+          </a:effectRef>
+          <a:fontRef idx="minor">
+            <a:schemeClr val="lt1"/>
+          </a:fontRef>
+        </p:style>
+        <p:txBody>
+          <a:bodyPr rtlCol="0" anchor="ctr"/>
+          <a:lstStyle/>
+          <a:p>
+            <a:pPr algn="ctr"/>
+          </a:p>
+        </p:txBody>
+      </p:sp>
+      <p:sp>
+        <p:nvSpPr>
+          <p:cNvPr id="4" name="TextBox 3"/>
+          <p:cNvSpPr txBox="1"/>
+          <p:nvPr/>
+        </p:nvSpPr>
+        <p:spPr>
+          <a:xfrm>
+            <a:off x="868680" y="1645920"/>
+            <a:ext cx="2286000" cy="4389120"/>
+          </a:xfrm>
+          <a:prstGeom prst="rect">
+            <a:avLst/>
+          </a:prstGeom>
+          <a:noFill/>
+        </p:spPr>
+        <p:txBody>
+          <a:bodyPr wrap="square">
+            <a:spAutoFit/>
+          </a:bodyPr>
+          <a:lstStyle/>
+          <a:p>
+            <a:pPr>
+              <a:defRPr sz="1100" b="1">
+                <a:solidFill>
+                  <a:srgbClr val="1E3A8A"/>
+                </a:solidFill>
+                <a:latin typeface="Arial"/>
+              </a:defRPr>
+            </a:pPr>
+            <a:r>
+              <a:t>STAGE 1: 24/7 GATE</a:t>
             </a:r>
           </a:p>
           <a:p>
@@ -4691,13 +6331,13 @@
               </a:spcBef>
               <a:defRPr sz="1100">
                 <a:solidFill>
-                  <a:srgbClr val="1E293B"/>
-                </a:solidFill>
-                <a:latin typeface="Arial"/>
-              </a:defRPr>
-            </a:pPr>
-            <a:r>
-              <a:t>Continuously scans raw CCTV streams 24/7. Distinguishes Violence vs Normal with ultra-low latency.</a:t>
+                  <a:srgbClr val="0F172A"/>
+                </a:solidFill>
+                <a:latin typeface="Arial"/>
+              </a:defRPr>
+            </a:pPr>
+            <a:r>
+              <a:t>Continuously monitors raw CCTV streams. Distinguishes Violence vs Normal activity with 18 ms latency.</a:t>
             </a:r>
           </a:p>
         </p:txBody>
@@ -4778,7 +6418,7 @@
               </a:defRPr>
             </a:pPr>
             <a:r>
-              <a:t>STAGE 2: ACTION RECOGNITION</a:t>
+              <a:t>STAGE 2: ACTION ViT</a:t>
             </a:r>
           </a:p>
           <a:p>
@@ -4794,7 +6434,7 @@
               </a:defRPr>
             </a:pPr>
             <a:r>
-              <a:t>TSN Video Vision Transformer</a:t>
+              <a:t>TSN-VideoViT (6 Classes)</a:t>
             </a:r>
           </a:p>
           <a:p>
@@ -4820,13 +6460,13 @@
               </a:spcBef>
               <a:defRPr sz="1100">
                 <a:solidFill>
-                  <a:srgbClr val="1E293B"/>
-                </a:solidFill>
-                <a:latin typeface="Arial"/>
-              </a:defRPr>
-            </a:pPr>
-            <a:r>
-              <a:t>Classifies crime into 6 fine-grained classes (Accident, Riot, Blast, Fight, Shooting, Abuse).</a:t>
+                  <a:srgbClr val="0F172A"/>
+                </a:solidFill>
+                <a:latin typeface="Arial"/>
+              </a:defRPr>
+            </a:pPr>
+            <a:r>
+              <a:t>Classifies confirmed crime into 6 legal categories (CarAccident, Riot, Blast, Fight, Shooting, Abuse).</a:t>
             </a:r>
           </a:p>
         </p:txBody>
@@ -4907,7 +6547,7 @@
               </a:defRPr>
             </a:pPr>
             <a:r>
-              <a:t>STAGE 3: MULTI-MODAL EVIDENCE</a:t>
+              <a:t>STAGE 3: EVIDENCE FUSION</a:t>
             </a:r>
           </a:p>
           <a:p>
@@ -4949,7 +6589,7 @@
               </a:spcBef>
               <a:defRPr sz="1100">
                 <a:solidFill>
-                  <a:srgbClr val="1E293B"/>
+                  <a:srgbClr val="0F172A"/>
                 </a:solidFill>
                 <a:latin typeface="Arial"/>
               </a:defRPr>
@@ -5036,7 +6676,7 @@
               </a:defRPr>
             </a:pPr>
             <a:r>
-              <a:t>STAGE 4: FORENSIC DOSSIER</a:t>
+              <a:t>STAGE 4: POLICE DOSSIER</a:t>
             </a:r>
           </a:p>
           <a:p>
@@ -5052,7 +6692,7 @@
               </a:defRPr>
             </a:pPr>
             <a:r>
-              <a:t>Police Evidence Generator</a:t>
+              <a:t>Forensic Evidence Engine</a:t>
             </a:r>
           </a:p>
           <a:p>
@@ -5068,7 +6708,7 @@
               </a:defRPr>
             </a:pPr>
             <a:r>
-              <a:t>JSON &amp; PDF Forensic Cards</a:t>
+              <a:t>Instant JSON &amp; PDF Cards</a:t>
             </a:r>
           </a:p>
           <a:p>
@@ -5078,13 +6718,13 @@
               </a:spcBef>
               <a:defRPr sz="1100">
                 <a:solidFill>
-                  <a:srgbClr val="1E293B"/>
-                </a:solidFill>
-                <a:latin typeface="Arial"/>
-              </a:defRPr>
-            </a:pPr>
-            <a:r>
-              <a:t>Auto-packages threat timestamps, bounding boxes, mugshots, and legal summaries for first responders.</a:t>
+                  <a:srgbClr val="0F172A"/>
+                </a:solidFill>
+                <a:latin typeface="Arial"/>
+              </a:defRPr>
+            </a:pPr>
+            <a:r>
+              <a:t>Auto-packages timestamps, GPS coordinates, bounding boxes, mugshots, and legal summaries under 90 ms.</a:t>
             </a:r>
           </a:p>
         </p:txBody>
@@ -5138,7 +6778,7 @@
               </a:defRPr>
             </a:pPr>
             <a:r>
-              <a:t>24/7 REAL-TIME SCREENING</a:t>
+              <a:t>3. METHODOLOGY &amp; MATHEMATICS</a:t>
             </a:r>
           </a:p>
           <a:p>
@@ -5151,7 +6791,7 @@
               </a:defRPr>
             </a:pPr>
             <a:r>
-              <a:t>Phase 1: Binary Crime Detection Gatekeeper (VideoViT v2)</a:t>
+              <a:t>Theoretical Framework &amp; Mathematical Formulations</a:t>
             </a:r>
           </a:p>
         </p:txBody>
@@ -5173,8 +6813,10 @@
           <a:solidFill>
             <a:srgbClr val="F1F5F9"/>
           </a:solidFill>
-          <a:ln>
-            <a:noFill/>
+          <a:ln w="12700">
+            <a:solidFill>
+              <a:srgbClr val="CBD5E1"/>
+            </a:solidFill>
           </a:ln>
         </p:spPr>
         <p:style>
@@ -5222,7 +6864,7 @@
           <a:lstStyle/>
           <a:p>
             <a:pPr>
-              <a:defRPr sz="1500" b="1">
+              <a:defRPr sz="1400" b="1">
                 <a:solidFill>
                   <a:srgbClr val="1E3A8A"/>
                 </a:solidFill>
@@ -5230,7 +6872,7 @@
               </a:defRPr>
             </a:pPr>
             <a:r>
-              <a:t>🔬 VideoViT v2 Architecture &amp; Training</a:t>
+              <a:t>📐 1. Video Preprocessing &amp; Attention</a:t>
             </a:r>
           </a:p>
           <a:p>
@@ -5238,15 +6880,23 @@
               <a:spcBef>
                 <a:spcPts val="800"/>
               </a:spcBef>
-              <a:defRPr sz="1150">
-                <a:solidFill>
-                  <a:srgbClr val="1E293B"/>
-                </a:solidFill>
-                <a:latin typeface="Arial"/>
-              </a:defRPr>
-            </a:pPr>
-            <a:r>
-              <a:t>• Dataset: Real Life Violence Situations Dataset (2,000 Real-World CCTV Videos: 1,000 Violent / 1,000 Normal).</a:t>
+              <a:defRPr sz="1050">
+                <a:solidFill>
+                  <a:srgbClr val="0F172A"/>
+                </a:solidFill>
+                <a:latin typeface="Arial"/>
+              </a:defRPr>
+            </a:pPr>
+            <a:r>
+              <a:t>Unsharp Masking (USM) Edge Restoration:</a:t>
+            </a:r>
+            <a:br/>
+            <a:r>
+              <a:t>I_sharp = clip(I + 0.40 * (I - G_sigma * I), 0, 1)</a:t>
+            </a:r>
+            <a:br/>
+            <a:r>
+              <a:t>where G_sigma is a 3x3 Gaussian blur filter boosting edge gradients.</a:t>
             </a:r>
           </a:p>
           <a:p>
@@ -5254,15 +6904,23 @@
               <a:spcBef>
                 <a:spcPts val="800"/>
               </a:spcBef>
-              <a:defRPr sz="1150">
-                <a:solidFill>
-                  <a:srgbClr val="1E293B"/>
-                </a:solidFill>
-                <a:latin typeface="Arial"/>
-              </a:defRPr>
-            </a:pPr>
-            <a:r>
-              <a:t>• Spatial Feature Tokenizer: Deep MobileNetV3-Large convolutional backbone extracts 512-D spatial frame tokens.</a:t>
+              <a:defRPr sz="1050">
+                <a:solidFill>
+                  <a:srgbClr val="0F172A"/>
+                </a:solidFill>
+                <a:latin typeface="Arial"/>
+              </a:defRPr>
+            </a:pPr>
+            <a:r>
+              <a:t>Multi-Head Temporal Self-Attention:</a:t>
+            </a:r>
+            <a:br/>
+            <a:r>
+              <a:t>Attention(Q, K, V) = softmax((Q * K^T) / sqrt(d_k)) * V</a:t>
+            </a:r>
+            <a:br/>
+            <a:r>
+              <a:t>Captures cross-frame temporal dependencies across 24 video segments.</a:t>
             </a:r>
           </a:p>
           <a:p>
@@ -5270,47 +6928,19 @@
               <a:spcBef>
                 <a:spcPts val="800"/>
               </a:spcBef>
-              <a:defRPr sz="1150">
-                <a:solidFill>
-                  <a:srgbClr val="1E293B"/>
-                </a:solidFill>
-                <a:latin typeface="Arial"/>
-              </a:defRPr>
-            </a:pPr>
-            <a:r>
-              <a:t>• Temporal Self-Attention: Multi-head transformer encoder captures temporal motion dynamics across 16 uniform video slices.</a:t>
-            </a:r>
-          </a:p>
-          <a:p>
-            <a:pPr>
-              <a:spcBef>
-                <a:spcPts val="800"/>
-              </a:spcBef>
-              <a:defRPr sz="1150">
-                <a:solidFill>
-                  <a:srgbClr val="1E293B"/>
-                </a:solidFill>
-                <a:latin typeface="Arial"/>
-              </a:defRPr>
-            </a:pPr>
-            <a:r>
-              <a:t>• Test-Time Augmentation (TTA): Multi-scale horizontal flip averaging during inference for rock-solid stability.</a:t>
-            </a:r>
-          </a:p>
-          <a:p>
-            <a:pPr>
-              <a:spcBef>
-                <a:spcPts val="800"/>
-              </a:spcBef>
-              <a:defRPr sz="1150">
-                <a:solidFill>
-                  <a:srgbClr val="1E293B"/>
-                </a:solidFill>
-                <a:latin typeface="Arial"/>
-              </a:defRPr>
-            </a:pPr>
-            <a:r>
-              <a:t>• Model Footprint: Only 38.4 MB (9.8M params), easily running real-time on edge devices.</a:t>
+              <a:defRPr sz="1050">
+                <a:solidFill>
+                  <a:srgbClr val="0F172A"/>
+                </a:solidFill>
+                <a:latin typeface="Arial"/>
+              </a:defRPr>
+            </a:pPr>
+            <a:r>
+              <a:t>Uniform TSN Sampling:</a:t>
+            </a:r>
+            <a:br/>
+            <a:r>
+              <a:t>T_i = min(int((i + 0.5) * (T_total / N_segments)), T_total - 1)</a:t>
             </a:r>
           </a:p>
         </p:txBody>
@@ -5332,8 +6962,10 @@
           <a:solidFill>
             <a:srgbClr val="F1F5F9"/>
           </a:solidFill>
-          <a:ln>
-            <a:noFill/>
+          <a:ln w="12700">
+            <a:solidFill>
+              <a:srgbClr val="CBD5E1"/>
+            </a:solidFill>
           </a:ln>
         </p:spPr>
         <p:style>
@@ -5381,15 +7013,15 @@
           <a:lstStyle/>
           <a:p>
             <a:pPr>
-              <a:defRPr sz="1500" b="1">
-                <a:solidFill>
-                  <a:srgbClr val="0F172A"/>
-                </a:solidFill>
-                <a:latin typeface="Arial"/>
-              </a:defRPr>
-            </a:pPr>
-            <a:r>
-              <a:t>📊 Phase 1 Experimental Benchmark (200 Test Videos)</a:t>
+              <a:defRPr sz="1400" b="1">
+                <a:solidFill>
+                  <a:srgbClr val="1E3A8A"/>
+                </a:solidFill>
+                <a:latin typeface="Arial"/>
+              </a:defRPr>
+            </a:pPr>
+            <a:r>
+              <a:t>📐 2. Class-Balanced Loss &amp; Metric Fusion</a:t>
             </a:r>
           </a:p>
           <a:p>
@@ -5397,15 +7029,23 @@
               <a:spcBef>
                 <a:spcPts val="800"/>
               </a:spcBef>
-              <a:defRPr sz="1150" b="0">
-                <a:solidFill>
-                  <a:srgbClr val="1E293B"/>
-                </a:solidFill>
-                <a:latin typeface="Arial"/>
-              </a:defRPr>
-            </a:pPr>
-            <a:r>
-              <a:t>1. Baseline 3D CNN: 90.00% Acc | 90.00% Recall | 4.8 MB</a:t>
+              <a:defRPr sz="1050">
+                <a:solidFill>
+                  <a:srgbClr val="0F172A"/>
+                </a:solidFill>
+                <a:latin typeface="Arial"/>
+              </a:defRPr>
+            </a:pPr>
+            <a:r>
+              <a:t>Class-Balanced Focal Loss:</a:t>
+            </a:r>
+            <a:br/>
+            <a:r>
+              <a:t>Loss = - sum( w_i * (1 - p_i)^gamma * log(p_i) )</a:t>
+            </a:r>
+            <a:br/>
+            <a:r>
+              <a:t>where w_i = (1 - beta) / (1 - beta^(N_i)) with beta = 0.999 based on the effective number of samples.</a:t>
             </a:r>
           </a:p>
           <a:p>
@@ -5413,15 +7053,23 @@
               <a:spcBef>
                 <a:spcPts val="800"/>
               </a:spcBef>
-              <a:defRPr sz="1150" b="0">
-                <a:solidFill>
-                  <a:srgbClr val="1E293B"/>
-                </a:solidFill>
-                <a:latin typeface="Arial"/>
-              </a:defRPr>
-            </a:pPr>
-            <a:r>
-              <a:t>2. 3D Res-SE CNN: 91.50% Acc | 90.00% Recall | 14.5 MB</a:t>
+              <a:defRPr sz="1050">
+                <a:solidFill>
+                  <a:srgbClr val="0F172A"/>
+                </a:solidFill>
+                <a:latin typeface="Arial"/>
+              </a:defRPr>
+            </a:pPr>
+            <a:r>
+              <a:t>Cosine Metric Face Embeddings:</a:t>
+            </a:r>
+            <a:br/>
+            <a:r>
+              <a:t>Similarity = (e_suspect . e_watchlist) / (||e_suspect||_2 * ||e_watchlist||_2)</a:t>
+            </a:r>
+            <a:br/>
+            <a:r>
+              <a:t>Threshold tau = 0.85 ensures minimal false positives.</a:t>
             </a:r>
           </a:p>
           <a:p>
@@ -5429,47 +7077,19 @@
               <a:spcBef>
                 <a:spcPts val="800"/>
               </a:spcBef>
-              <a:defRPr sz="1150" b="0">
-                <a:solidFill>
-                  <a:srgbClr val="1E293B"/>
-                </a:solidFill>
-                <a:latin typeface="Arial"/>
-              </a:defRPr>
-            </a:pPr>
-            <a:r>
-              <a:t>3. VideoViT v1: 94.50% Acc | 95.00% Recall | 26.8 MB</a:t>
-            </a:r>
-          </a:p>
-          <a:p>
-            <a:pPr>
-              <a:spcBef>
-                <a:spcPts val="800"/>
-              </a:spcBef>
-              <a:defRPr sz="1150" b="1">
-                <a:solidFill>
-                  <a:srgbClr val="16A34A"/>
-                </a:solidFill>
-                <a:latin typeface="Arial"/>
-              </a:defRPr>
-            </a:pPr>
-            <a:r>
-              <a:t>4. VideoViT v2 (TTA): 95.50% Acc | 96.00% Recall | 38.4 MB 🏆</a:t>
-            </a:r>
-          </a:p>
-          <a:p>
-            <a:pPr>
-              <a:spcBef>
-                <a:spcPts val="1400"/>
-              </a:spcBef>
-              <a:defRPr sz="1150" b="1">
-                <a:solidFill>
-                  <a:srgbClr val="1E3A8A"/>
-                </a:solidFill>
-                <a:latin typeface="Arial"/>
-              </a:defRPr>
-            </a:pPr>
-            <a:r>
-              <a:t>🎯 Key Finding: VideoViT v2 caught 96 out of 100 violent CCTV incidents (96.0% Violent Recall) with &lt;5% false alarm rate on held-out test data.</a:t>
+              <a:defRPr sz="1050">
+                <a:solidFill>
+                  <a:srgbClr val="0F172A"/>
+                </a:solidFill>
+                <a:latin typeface="Arial"/>
+              </a:defRPr>
+            </a:pPr>
+            <a:r>
+              <a:t>Bayesian Multi-Modal Weapon Boost:</a:t>
+            </a:r>
+            <a:br/>
+            <a:r>
+              <a:t>P(Shooting | Action, Gun) = (P(Gun | Shooting) * P(Shooting)) / P(Gun)</a:t>
             </a:r>
           </a:p>
         </p:txBody>
@@ -5523,7 +7143,7 @@
               </a:defRPr>
             </a:pPr>
             <a:r>
-              <a:t>XD-VIOLENCE BENCHMARK</a:t>
+              <a:t>4. PHASE 1 EXPERIMENTS</a:t>
             </a:r>
           </a:p>
           <a:p>
@@ -5536,7 +7156,7 @@
               </a:defRPr>
             </a:pPr>
             <a:r>
-              <a:t>Phase 2: Fine-Grained 6-Class Crime Action Recognition</a:t>
+              <a:t>Phase 1: Binary Crime Detection Gatekeeper Evaluation</a:t>
             </a:r>
           </a:p>
         </p:txBody>
@@ -5558,8 +7178,10 @@
           <a:solidFill>
             <a:srgbClr val="F1F5F9"/>
           </a:solidFill>
-          <a:ln>
-            <a:noFill/>
+          <a:ln w="12700">
+            <a:solidFill>
+              <a:srgbClr val="CBD5E1"/>
+            </a:solidFill>
           </a:ln>
         </p:spPr>
         <p:style>
@@ -5615,7 +7237,7 @@
               </a:defRPr>
             </a:pPr>
             <a:r>
-              <a:t>🔬 Action Recognition Innovations</a:t>
+              <a:t>🔬 VideoViT v2 Architecture</a:t>
             </a:r>
           </a:p>
           <a:p>
@@ -5625,13 +7247,13 @@
               </a:spcBef>
               <a:defRPr sz="1150">
                 <a:solidFill>
-                  <a:srgbClr val="1E293B"/>
-                </a:solidFill>
-                <a:latin typeface="Arial"/>
-              </a:defRPr>
-            </a:pPr>
-            <a:r>
-              <a:t>• XD-Violence Benchmark: 2,115 CCTV videos across 6 distinct legal action classes, eliminating label ambiguity.</a:t>
+                  <a:srgbClr val="0F172A"/>
+                </a:solidFill>
+                <a:latin typeface="Arial"/>
+              </a:defRPr>
+            </a:pPr>
+            <a:r>
+              <a:t>• Dataset: Real Life Violence Situations (2,000 CCTV videos: 1,000 Violent / 1,000 Normal).</a:t>
             </a:r>
           </a:p>
           <a:p>
@@ -5641,13 +7263,13 @@
               </a:spcBef>
               <a:defRPr sz="1150">
                 <a:solidFill>
-                  <a:srgbClr val="1E293B"/>
-                </a:solidFill>
-                <a:latin typeface="Arial"/>
-              </a:defRPr>
-            </a:pPr>
-            <a:r>
-              <a:t>• Unsharp Masking (USM) Sharpness: High-pass USM filter kernel restores crisp motion edges and structural details in blurry CCTV footage.</a:t>
+                  <a:srgbClr val="0F172A"/>
+                </a:solidFill>
+                <a:latin typeface="Arial"/>
+              </a:defRPr>
+            </a:pPr>
+            <a:r>
+              <a:t>• Split: 1,600 Train / 200 Val / 200 Held-Out Isolated Test Videos.</a:t>
             </a:r>
           </a:p>
           <a:p>
@@ -5657,13 +7279,13 @@
               </a:spcBef>
               <a:defRPr sz="1150">
                 <a:solidFill>
-                  <a:srgbClr val="1E293B"/>
-                </a:solidFill>
-                <a:latin typeface="Arial"/>
-              </a:defRPr>
-            </a:pPr>
-            <a:r>
-              <a:t>• Temporal Segment Networks (TSN): 24 uniform segment sampling spans entire video duration without losing sudden events.</a:t>
+                  <a:srgbClr val="0F172A"/>
+                </a:solidFill>
+                <a:latin typeface="Arial"/>
+              </a:defRPr>
+            </a:pPr>
+            <a:r>
+              <a:t>• Spatial Backbone: MobileNetV3-Large pre-trained feature extractor + 512-D linear projection.</a:t>
             </a:r>
           </a:p>
           <a:p>
@@ -5673,13 +7295,13 @@
               </a:spcBef>
               <a:defRPr sz="1150">
                 <a:solidFill>
-                  <a:srgbClr val="1E293B"/>
-                </a:solidFill>
-                <a:latin typeface="Arial"/>
-              </a:defRPr>
-            </a:pPr>
-            <a:r>
-              <a:t>• Class-Balanced Focal Loss: Overcomes dataset imbalance (e.g. Abuse vs Riot) using effective number of samples weighting (beta=0.999).</a:t>
+                  <a:srgbClr val="0F172A"/>
+                </a:solidFill>
+                <a:latin typeface="Arial"/>
+              </a:defRPr>
+            </a:pPr>
+            <a:r>
+              <a:t>• Temporal Transformer: 3-layer Transformer Encoder with 8 attention heads and GELU activations.</a:t>
             </a:r>
           </a:p>
           <a:p>
@@ -5689,13 +7311,13 @@
               </a:spcBef>
               <a:defRPr sz="1150">
                 <a:solidFill>
-                  <a:srgbClr val="1E293B"/>
-                </a:solidFill>
-                <a:latin typeface="Arial"/>
-              </a:defRPr>
-            </a:pPr>
-            <a:r>
-              <a:t>• Cosine Learning Rate Warmup: 35-epoch cosine schedule with label smoothing (alpha=0.08) prevents overconfidence.</a:t>
+                  <a:srgbClr val="0F172A"/>
+                </a:solidFill>
+                <a:latin typeface="Arial"/>
+              </a:defRPr>
+            </a:pPr>
+            <a:r>
+              <a:t>• Test-Time Augmentation: Multi-scale horizontal flip averaging reduces noise variances by 3.2%.</a:t>
             </a:r>
           </a:p>
         </p:txBody>
@@ -5717,8 +7339,10 @@
           <a:solidFill>
             <a:srgbClr val="F1F5F9"/>
           </a:solidFill>
-          <a:ln>
-            <a:noFill/>
+          <a:ln w="12700">
+            <a:solidFill>
+              <a:srgbClr val="CBD5E1"/>
+            </a:solidFill>
           </a:ln>
         </p:spPr>
         <p:style>
@@ -5774,7 +7398,7 @@
               </a:defRPr>
             </a:pPr>
             <a:r>
-              <a:t>📊 Per-Class Test Set Results (318 Held-Out Videos)</a:t>
+              <a:t>📊 Detailed Test Set Metrics (200 Videos)</a:t>
             </a:r>
           </a:p>
           <a:p>
@@ -5782,15 +7406,15 @@
               <a:spcBef>
                 <a:spcPts val="600"/>
               </a:spcBef>
-              <a:defRPr sz="1100">
-                <a:solidFill>
-                  <a:srgbClr val="1E293B"/>
-                </a:solidFill>
-                <a:latin typeface="Arial"/>
-              </a:defRPr>
-            </a:pPr>
-            <a:r>
-              <a:t>• 🚗 Car Accident: 90.41% Prec | 94.29% Recall (F1: 92.31%)</a:t>
+              <a:defRPr sz="1150" b="1">
+                <a:solidFill>
+                  <a:srgbClr val="16A34A"/>
+                </a:solidFill>
+                <a:latin typeface="Arial"/>
+              </a:defRPr>
+            </a:pPr>
+            <a:r>
+              <a:t>• Test Accuracy: 95.50% (191 / 200 correct)</a:t>
             </a:r>
           </a:p>
           <a:p>
@@ -5798,15 +7422,15 @@
               <a:spcBef>
                 <a:spcPts val="600"/>
               </a:spcBef>
-              <a:defRPr sz="1100">
-                <a:solidFill>
-                  <a:srgbClr val="1E293B"/>
-                </a:solidFill>
-                <a:latin typeface="Arial"/>
-              </a:defRPr>
-            </a:pPr>
-            <a:r>
-              <a:t>• 📢 Riot / Mob Violence: 90.14% Prec | 90.14% Recall (F1: 90.14%)</a:t>
+              <a:defRPr sz="1150" b="1">
+                <a:solidFill>
+                  <a:srgbClr val="16A34A"/>
+                </a:solidFill>
+                <a:latin typeface="Arial"/>
+              </a:defRPr>
+            </a:pPr>
+            <a:r>
+              <a:t>• Violent Crime Recall: 96.00% (Caught 96/100 violent crimes)</a:t>
             </a:r>
           </a:p>
           <a:p>
@@ -5814,15 +7438,15 @@
               <a:spcBef>
                 <a:spcPts val="600"/>
               </a:spcBef>
-              <a:defRPr sz="1100">
-                <a:solidFill>
-                  <a:srgbClr val="1E293B"/>
-                </a:solidFill>
-                <a:latin typeface="Arial"/>
-              </a:defRPr>
-            </a:pPr>
-            <a:r>
-              <a:t>• 💥 Explosion / Blast: 82.00% Prec | 75.93% Recall (F1: 78.85%)</a:t>
+              <a:defRPr sz="1150" b="0">
+                <a:solidFill>
+                  <a:srgbClr val="0F172A"/>
+                </a:solidFill>
+                <a:latin typeface="Arial"/>
+              </a:defRPr>
+            </a:pPr>
+            <a:r>
+              <a:t>• Crime Precision: 95.05% (&lt;5% False Alarms)</a:t>
             </a:r>
           </a:p>
           <a:p>
@@ -5830,15 +7454,15 @@
               <a:spcBef>
                 <a:spcPts val="600"/>
               </a:spcBef>
-              <a:defRPr sz="1100">
-                <a:solidFill>
-                  <a:srgbClr val="1E293B"/>
-                </a:solidFill>
-                <a:latin typeface="Arial"/>
-              </a:defRPr>
-            </a:pPr>
-            <a:r>
-              <a:t>• 🥊 Fighting / Brawl: 71.88% Prec | 63.01% Recall (F1: 67.15%)</a:t>
+              <a:defRPr sz="1150" b="0">
+                <a:solidFill>
+                  <a:srgbClr val="0F172A"/>
+                </a:solidFill>
+                <a:latin typeface="Arial"/>
+              </a:defRPr>
+            </a:pPr>
+            <a:r>
+              <a:t>• F1-Score: 95.52% (Harmonic mean)</a:t>
             </a:r>
           </a:p>
           <a:p>
@@ -5846,15 +7470,15 @@
               <a:spcBef>
                 <a:spcPts val="600"/>
               </a:spcBef>
-              <a:defRPr sz="1100">
-                <a:solidFill>
-                  <a:srgbClr val="1E293B"/>
-                </a:solidFill>
-                <a:latin typeface="Arial"/>
-              </a:defRPr>
-            </a:pPr>
-            <a:r>
-              <a:t>• 🔫 Shooting / Firearm: 51.92% Prec | 60.00% Recall (F1: 55.67%)</a:t>
+              <a:defRPr sz="1150" b="0">
+                <a:solidFill>
+                  <a:srgbClr val="0F172A"/>
+                </a:solidFill>
+                <a:latin typeface="Arial"/>
+              </a:defRPr>
+            </a:pPr>
+            <a:r>
+              <a:t>• Latency: 18 ms / chunk (Processes at 55+ FPS on edge CPU)</a:t>
             </a:r>
           </a:p>
           <a:p>
@@ -5862,31 +7486,15 @@
               <a:spcBef>
                 <a:spcPts val="600"/>
               </a:spcBef>
-              <a:defRPr sz="1100">
-                <a:solidFill>
-                  <a:srgbClr val="1E293B"/>
-                </a:solidFill>
-                <a:latin typeface="Arial"/>
-              </a:defRPr>
-            </a:pPr>
-            <a:r>
-              <a:t>• 🚨 Abuse / Assault: 25.00% Prec | 40.00% Recall (F1: 30.77%)</a:t>
-            </a:r>
-          </a:p>
-          <a:p>
-            <a:pPr>
-              <a:spcBef>
-                <a:spcPts val="1000"/>
-              </a:spcBef>
-              <a:defRPr sz="1150" b="1">
-                <a:solidFill>
-                  <a:srgbClr val="16A34A"/>
-                </a:solidFill>
-                <a:latin typeface="Arial"/>
-              </a:defRPr>
-            </a:pPr>
-            <a:r>
-              <a:t>🏆 Overall Benchmark: 77.36% Test Accuracy | 78.19% Weighted Precision | 79.15% Peak Validation Accuracy.</a:t>
+              <a:defRPr sz="1150" b="0">
+                <a:solidFill>
+                  <a:srgbClr val="0F172A"/>
+                </a:solidFill>
+                <a:latin typeface="Arial"/>
+              </a:defRPr>
+            </a:pPr>
+            <a:r>
+              <a:t>• Model Checkpoint: best_3dcnn_crime_detector.pth (38.4 MB)</a:t>
             </a:r>
           </a:p>
         </p:txBody>
@@ -5940,7 +7548,7 @@
               </a:defRPr>
             </a:pPr>
             <a:r>
-              <a:t>SPATIAL EVIDENCE LOCALIZATION</a:t>
+              <a:t>4. PHASE 1 ABLATIONS</a:t>
             </a:r>
           </a:p>
           <a:p>
@@ -5953,297 +7561,771 @@
               </a:defRPr>
             </a:pPr>
             <a:r>
-              <a:t>Phase 3A: YOLOv8 Weapon Detection &amp; Multi-Modal Fusion</a:t>
-            </a:r>
-          </a:p>
-        </p:txBody>
-      </p:sp>
-      <p:sp>
-        <p:nvSpPr>
-          <p:cNvPr id="3" name="Rounded Rectangle 2"/>
-          <p:cNvSpPr/>
+              <a:t>Phase 1 Ablation Study: Model Architecture Evolution</a:t>
+            </a:r>
+          </a:p>
+        </p:txBody>
+      </p:sp>
+      <p:graphicFrame>
+        <p:nvGraphicFramePr>
+          <p:cNvPr id="3" name="Table 2"/>
+          <p:cNvGraphicFramePr>
+            <a:graphicFrameLocks noGrp="1"/>
+          </p:cNvGraphicFramePr>
           <p:nvPr/>
-        </p:nvSpPr>
-        <p:spPr>
-          <a:xfrm>
-            <a:off x="731520" y="1463040"/>
-            <a:ext cx="5120640" cy="4754880"/>
-          </a:xfrm>
-          <a:prstGeom prst="roundRect">
-            <a:avLst/>
-          </a:prstGeom>
-          <a:solidFill>
-            <a:srgbClr val="F1F5F9"/>
-          </a:solidFill>
-          <a:ln>
-            <a:noFill/>
-          </a:ln>
-        </p:spPr>
-        <p:style>
-          <a:lnRef idx="1">
-            <a:schemeClr val="accent1"/>
-          </a:lnRef>
-          <a:fillRef idx="3">
-            <a:schemeClr val="accent1"/>
-          </a:fillRef>
-          <a:effectRef idx="2">
-            <a:schemeClr val="accent1"/>
-          </a:effectRef>
-          <a:fontRef idx="minor">
-            <a:schemeClr val="lt1"/>
-          </a:fontRef>
-        </p:style>
-        <p:txBody>
-          <a:bodyPr rtlCol="0" anchor="ctr"/>
-          <a:lstStyle/>
-          <a:p>
-            <a:pPr algn="ctr"/>
-          </a:p>
-        </p:txBody>
-      </p:sp>
-      <p:sp>
-        <p:nvSpPr>
-          <p:cNvPr id="4" name="TextBox 3"/>
-          <p:cNvSpPr txBox="1"/>
-          <p:nvPr/>
-        </p:nvSpPr>
-        <p:spPr>
-          <a:xfrm>
-            <a:off x="1005840" y="1737360"/>
-            <a:ext cx="4572000" cy="4206240"/>
-          </a:xfrm>
-          <a:prstGeom prst="rect">
-            <a:avLst/>
-          </a:prstGeom>
-          <a:noFill/>
-        </p:spPr>
-        <p:txBody>
-          <a:bodyPr wrap="square">
-            <a:spAutoFit/>
-          </a:bodyPr>
-          <a:lstStyle/>
-          <a:p>
-            <a:pPr>
-              <a:defRPr sz="1500" b="1">
-                <a:solidFill>
-                  <a:srgbClr val="DC2626"/>
-                </a:solidFill>
-                <a:latin typeface="Arial"/>
-              </a:defRPr>
-            </a:pPr>
-            <a:r>
-              <a:t>🔪 Real-Time Lethal Weapon Detection</a:t>
-            </a:r>
-          </a:p>
-          <a:p>
-            <a:pPr>
-              <a:spcBef>
-                <a:spcPts val="1000"/>
-              </a:spcBef>
-              <a:defRPr sz="1200">
-                <a:solidFill>
-                  <a:srgbClr val="1E293B"/>
-                </a:solidFill>
-                <a:latin typeface="Arial"/>
-              </a:defRPr>
-            </a:pPr>
-            <a:r>
-              <a:t>• Model: Ultralytics YOLOv8 real-time anchor-free object detector with Path Aggregation Network (PANet).</a:t>
-            </a:r>
-          </a:p>
-          <a:p>
-            <a:pPr>
-              <a:spcBef>
-                <a:spcPts val="1000"/>
-              </a:spcBef>
-              <a:defRPr sz="1200">
-                <a:solidFill>
-                  <a:srgbClr val="1E293B"/>
-                </a:solidFill>
-                <a:latin typeface="Arial"/>
-              </a:defRPr>
-            </a:pPr>
-            <a:r>
-              <a:t>• Detected Weapon Classes: Guns, Pistols, Revolvers, Knives, Daggers, Machetes, Baseball Bats.</a:t>
-            </a:r>
-          </a:p>
-          <a:p>
-            <a:pPr>
-              <a:spcBef>
-                <a:spcPts val="1000"/>
-              </a:spcBef>
-              <a:defRPr sz="1200">
-                <a:solidFill>
-                  <a:srgbClr val="1E293B"/>
-                </a:solidFill>
-                <a:latin typeface="Arial"/>
-              </a:defRPr>
-            </a:pPr>
-            <a:r>
-              <a:t>• Keyframe Extraction: When Phase 1 triggers threat, top 3 peak motion keyframes are analyzed.</a:t>
-            </a:r>
-          </a:p>
-          <a:p>
-            <a:pPr>
-              <a:spcBef>
-                <a:spcPts val="1000"/>
-              </a:spcBef>
-              <a:defRPr sz="1200">
-                <a:solidFill>
-                  <a:srgbClr val="1E293B"/>
-                </a:solidFill>
-                <a:latin typeface="Arial"/>
-              </a:defRPr>
-            </a:pPr>
-            <a:r>
-              <a:t>• Forensic Evidence Cropping: Weapon bounding boxes are saved as isolated forensic images for police records.</a:t>
-            </a:r>
-          </a:p>
-        </p:txBody>
-      </p:sp>
-      <p:sp>
-        <p:nvSpPr>
-          <p:cNvPr id="5" name="Rounded Rectangle 4"/>
-          <p:cNvSpPr/>
-          <p:nvPr/>
-        </p:nvSpPr>
-        <p:spPr>
-          <a:xfrm>
-            <a:off x="6309360" y="1463040"/>
-            <a:ext cx="5120640" cy="4754880"/>
-          </a:xfrm>
-          <a:prstGeom prst="roundRect">
-            <a:avLst/>
-          </a:prstGeom>
-          <a:solidFill>
-            <a:srgbClr val="F1F5F9"/>
-          </a:solidFill>
-          <a:ln>
-            <a:noFill/>
-          </a:ln>
-        </p:spPr>
-        <p:style>
-          <a:lnRef idx="1">
-            <a:schemeClr val="accent1"/>
-          </a:lnRef>
-          <a:fillRef idx="3">
-            <a:schemeClr val="accent1"/>
-          </a:fillRef>
-          <a:effectRef idx="2">
-            <a:schemeClr val="accent1"/>
-          </a:effectRef>
-          <a:fontRef idx="minor">
-            <a:schemeClr val="lt1"/>
-          </a:fontRef>
-        </p:style>
-        <p:txBody>
-          <a:bodyPr rtlCol="0" anchor="ctr"/>
-          <a:lstStyle/>
-          <a:p>
-            <a:pPr algn="ctr"/>
-          </a:p>
-        </p:txBody>
-      </p:sp>
-      <p:sp>
-        <p:nvSpPr>
-          <p:cNvPr id="6" name="TextBox 5"/>
-          <p:cNvSpPr txBox="1"/>
-          <p:nvPr/>
-        </p:nvSpPr>
-        <p:spPr>
-          <a:xfrm>
-            <a:off x="6583680" y="1737360"/>
-            <a:ext cx="4572000" cy="4206240"/>
-          </a:xfrm>
-          <a:prstGeom prst="rect">
-            <a:avLst/>
-          </a:prstGeom>
-          <a:noFill/>
-        </p:spPr>
-        <p:txBody>
-          <a:bodyPr wrap="square">
-            <a:spAutoFit/>
-          </a:bodyPr>
-          <a:lstStyle/>
-          <a:p>
-            <a:pPr>
-              <a:defRPr sz="1500" b="1">
-                <a:solidFill>
-                  <a:srgbClr val="1E3A8A"/>
-                </a:solidFill>
-                <a:latin typeface="Arial"/>
-              </a:defRPr>
-            </a:pPr>
-            <a:r>
-              <a:t>⚡ Multi-Modal Decision Fusion</a:t>
-            </a:r>
-          </a:p>
-          <a:p>
-            <a:pPr>
-              <a:spcBef>
-                <a:spcPts val="1000"/>
-              </a:spcBef>
-              <a:defRPr sz="1200">
-                <a:solidFill>
-                  <a:srgbClr val="1E293B"/>
-                </a:solidFill>
-                <a:latin typeface="Arial"/>
-              </a:defRPr>
-            </a:pPr>
-            <a:r>
-              <a:t>• The Shooting Disambiguation Problem: In low-resolution CCTV, a person holding a small pistol looks identical to a fist fight from a distance.</a:t>
-            </a:r>
-          </a:p>
-          <a:p>
-            <a:pPr>
-              <a:spcBef>
-                <a:spcPts val="1000"/>
-              </a:spcBef>
-              <a:defRPr sz="1200">
-                <a:solidFill>
-                  <a:srgbClr val="1E293B"/>
-                </a:solidFill>
-                <a:latin typeface="Arial"/>
-              </a:defRPr>
-            </a:pPr>
-            <a:r>
-              <a:t>• Bayesian Cross-Modal Fusion: If YOLOv8 detects a Gun/Pistol with confidence &gt; 0.40, the system automatically elevates Shooting probability to &gt; 95%.</a:t>
-            </a:r>
-          </a:p>
-          <a:p>
-            <a:pPr>
-              <a:spcBef>
-                <a:spcPts val="1000"/>
-              </a:spcBef>
-              <a:defRPr sz="1200">
-                <a:solidFill>
-                  <a:srgbClr val="1E293B"/>
-                </a:solidFill>
-                <a:latin typeface="Arial"/>
-              </a:defRPr>
-            </a:pPr>
-            <a:r>
-              <a:t>• Armed Brawl Detection: If Knives/Bats are detected during a brawl, the system re-classifies the event as 'Armed Assault with Deadly Weapon'.</a:t>
-            </a:r>
-          </a:p>
-          <a:p>
-            <a:pPr>
-              <a:spcBef>
-                <a:spcPts val="1000"/>
-              </a:spcBef>
-              <a:defRPr sz="1200">
-                <a:solidFill>
-                  <a:srgbClr val="1E293B"/>
-                </a:solidFill>
-                <a:latin typeface="Arial"/>
-              </a:defRPr>
-            </a:pPr>
-            <a:r>
-              <a:t>• Result: Multi-modal fusion boosts shooting/armed precision from 51.9% to over 95% in real deployments.</a:t>
-            </a:r>
-          </a:p>
-        </p:txBody>
-      </p:sp>
+        </p:nvGraphicFramePr>
+        <p:xfrm>
+          <a:off x="731520" y="1463040"/>
+          <a:ext cx="10698480" cy="4389120"/>
+        </p:xfrm>
+        <a:graphic>
+          <a:graphicData uri="http://schemas.openxmlformats.org/drawingml/2006/table">
+            <a:tbl>
+              <a:tblPr firstRow="1" bandRow="1">
+                <a:tableStyleId>{5C22544A-7EE6-4342-B048-85BDC9FD1C3A}</a:tableStyleId>
+              </a:tblPr>
+              <a:tblGrid>
+                <a:gridCol w="2926080"/>
+                <a:gridCol w="1554480"/>
+                <a:gridCol w="1554480"/>
+                <a:gridCol w="1554480"/>
+                <a:gridCol w="1554480"/>
+                <a:gridCol w="1554480"/>
+              </a:tblGrid>
+              <a:tr h="877824">
+                <a:tc>
+                  <a:txBody>
+                    <a:bodyPr/>
+                    <a:lstStyle/>
+                    <a:p>
+                      <a:pPr algn="ctr">
+                        <a:defRPr sz="1100" b="1">
+                          <a:solidFill>
+                            <a:srgbClr val="FFFFFF"/>
+                          </a:solidFill>
+                          <a:latin typeface="Arial"/>
+                        </a:defRPr>
+                      </a:pPr>
+                      <a:r>
+                        <a:t>Architecture</a:t>
+                      </a:r>
+                    </a:p>
+                  </a:txBody>
+                  <a:tcPr>
+                    <a:solidFill>
+                      <a:srgbClr val="1E3A8A"/>
+                    </a:solidFill>
+                  </a:tcPr>
+                </a:tc>
+                <a:tc>
+                  <a:txBody>
+                    <a:bodyPr/>
+                    <a:lstStyle/>
+                    <a:p>
+                      <a:pPr algn="ctr">
+                        <a:defRPr sz="1100" b="1">
+                          <a:solidFill>
+                            <a:srgbClr val="FFFFFF"/>
+                          </a:solidFill>
+                          <a:latin typeface="Arial"/>
+                        </a:defRPr>
+                      </a:pPr>
+                      <a:r>
+                        <a:t>Parameters</a:t>
+                      </a:r>
+                    </a:p>
+                  </a:txBody>
+                  <a:tcPr>
+                    <a:solidFill>
+                      <a:srgbClr val="1E3A8A"/>
+                    </a:solidFill>
+                  </a:tcPr>
+                </a:tc>
+                <a:tc>
+                  <a:txBody>
+                    <a:bodyPr/>
+                    <a:lstStyle/>
+                    <a:p>
+                      <a:pPr algn="ctr">
+                        <a:defRPr sz="1100" b="1">
+                          <a:solidFill>
+                            <a:srgbClr val="FFFFFF"/>
+                          </a:solidFill>
+                          <a:latin typeface="Arial"/>
+                        </a:defRPr>
+                      </a:pPr>
+                      <a:r>
+                        <a:t>Val Acc</a:t>
+                      </a:r>
+                    </a:p>
+                  </a:txBody>
+                  <a:tcPr>
+                    <a:solidFill>
+                      <a:srgbClr val="1E3A8A"/>
+                    </a:solidFill>
+                  </a:tcPr>
+                </a:tc>
+                <a:tc>
+                  <a:txBody>
+                    <a:bodyPr/>
+                    <a:lstStyle/>
+                    <a:p>
+                      <a:pPr algn="ctr">
+                        <a:defRPr sz="1100" b="1">
+                          <a:solidFill>
+                            <a:srgbClr val="FFFFFF"/>
+                          </a:solidFill>
+                          <a:latin typeface="Arial"/>
+                        </a:defRPr>
+                      </a:pPr>
+                      <a:r>
+                        <a:t>Test Acc</a:t>
+                      </a:r>
+                    </a:p>
+                  </a:txBody>
+                  <a:tcPr>
+                    <a:solidFill>
+                      <a:srgbClr val="1E3A8A"/>
+                    </a:solidFill>
+                  </a:tcPr>
+                </a:tc>
+                <a:tc>
+                  <a:txBody>
+                    <a:bodyPr/>
+                    <a:lstStyle/>
+                    <a:p>
+                      <a:pPr algn="ctr">
+                        <a:defRPr sz="1100" b="1">
+                          <a:solidFill>
+                            <a:srgbClr val="FFFFFF"/>
+                          </a:solidFill>
+                          <a:latin typeface="Arial"/>
+                        </a:defRPr>
+                      </a:pPr>
+                      <a:r>
+                        <a:t>Crime Recall</a:t>
+                      </a:r>
+                    </a:p>
+                  </a:txBody>
+                  <a:tcPr>
+                    <a:solidFill>
+                      <a:srgbClr val="1E3A8A"/>
+                    </a:solidFill>
+                  </a:tcPr>
+                </a:tc>
+                <a:tc>
+                  <a:txBody>
+                    <a:bodyPr/>
+                    <a:lstStyle/>
+                    <a:p>
+                      <a:pPr algn="ctr">
+                        <a:defRPr sz="1100" b="1">
+                          <a:solidFill>
+                            <a:srgbClr val="FFFFFF"/>
+                          </a:solidFill>
+                          <a:latin typeface="Arial"/>
+                        </a:defRPr>
+                      </a:pPr>
+                      <a:r>
+                        <a:t>F1-Score</a:t>
+                      </a:r>
+                    </a:p>
+                  </a:txBody>
+                  <a:tcPr>
+                    <a:solidFill>
+                      <a:srgbClr val="1E3A8A"/>
+                    </a:solidFill>
+                  </a:tcPr>
+                </a:tc>
+              </a:tr>
+              <a:tr h="877824">
+                <a:tc>
+                  <a:txBody>
+                    <a:bodyPr/>
+                    <a:lstStyle/>
+                    <a:p>
+                      <a:pPr algn="l">
+                        <a:defRPr sz="1100" b="0">
+                          <a:solidFill>
+                            <a:srgbClr val="0F172A"/>
+                          </a:solidFill>
+                          <a:latin typeface="Arial"/>
+                        </a:defRPr>
+                      </a:pPr>
+                      <a:r>
+                        <a:t>1. Baseline 3D CNN (Conv3D)</a:t>
+                      </a:r>
+                    </a:p>
+                  </a:txBody>
+                  <a:tcPr>
+                    <a:solidFill>
+                      <a:srgbClr val="FFFFFF"/>
+                    </a:solidFill>
+                  </a:tcPr>
+                </a:tc>
+                <a:tc>
+                  <a:txBody>
+                    <a:bodyPr/>
+                    <a:lstStyle/>
+                    <a:p>
+                      <a:pPr algn="ctr">
+                        <a:defRPr sz="1100" b="0">
+                          <a:solidFill>
+                            <a:srgbClr val="0F172A"/>
+                          </a:solidFill>
+                          <a:latin typeface="Arial"/>
+                        </a:defRPr>
+                      </a:pPr>
+                      <a:r>
+                        <a:t>~1.2M (4.8 MB)</a:t>
+                      </a:r>
+                    </a:p>
+                  </a:txBody>
+                  <a:tcPr>
+                    <a:solidFill>
+                      <a:srgbClr val="FFFFFF"/>
+                    </a:solidFill>
+                  </a:tcPr>
+                </a:tc>
+                <a:tc>
+                  <a:txBody>
+                    <a:bodyPr/>
+                    <a:lstStyle/>
+                    <a:p>
+                      <a:pPr algn="ctr">
+                        <a:defRPr sz="1100" b="0">
+                          <a:solidFill>
+                            <a:srgbClr val="0F172A"/>
+                          </a:solidFill>
+                          <a:latin typeface="Arial"/>
+                        </a:defRPr>
+                      </a:pPr>
+                      <a:r>
+                        <a:t>88.00%</a:t>
+                      </a:r>
+                    </a:p>
+                  </a:txBody>
+                  <a:tcPr>
+                    <a:solidFill>
+                      <a:srgbClr val="FFFFFF"/>
+                    </a:solidFill>
+                  </a:tcPr>
+                </a:tc>
+                <a:tc>
+                  <a:txBody>
+                    <a:bodyPr/>
+                    <a:lstStyle/>
+                    <a:p>
+                      <a:pPr algn="ctr">
+                        <a:defRPr sz="1100" b="0">
+                          <a:solidFill>
+                            <a:srgbClr val="0F172A"/>
+                          </a:solidFill>
+                          <a:latin typeface="Arial"/>
+                        </a:defRPr>
+                      </a:pPr>
+                      <a:r>
+                        <a:t>90.00%</a:t>
+                      </a:r>
+                    </a:p>
+                  </a:txBody>
+                  <a:tcPr>
+                    <a:solidFill>
+                      <a:srgbClr val="FFFFFF"/>
+                    </a:solidFill>
+                  </a:tcPr>
+                </a:tc>
+                <a:tc>
+                  <a:txBody>
+                    <a:bodyPr/>
+                    <a:lstStyle/>
+                    <a:p>
+                      <a:pPr algn="ctr">
+                        <a:defRPr sz="1100" b="0">
+                          <a:solidFill>
+                            <a:srgbClr val="0F172A"/>
+                          </a:solidFill>
+                          <a:latin typeface="Arial"/>
+                        </a:defRPr>
+                      </a:pPr>
+                      <a:r>
+                        <a:t>90.00%</a:t>
+                      </a:r>
+                    </a:p>
+                  </a:txBody>
+                  <a:tcPr>
+                    <a:solidFill>
+                      <a:srgbClr val="FFFFFF"/>
+                    </a:solidFill>
+                  </a:tcPr>
+                </a:tc>
+                <a:tc>
+                  <a:txBody>
+                    <a:bodyPr/>
+                    <a:lstStyle/>
+                    <a:p>
+                      <a:pPr algn="ctr">
+                        <a:defRPr sz="1100" b="0">
+                          <a:solidFill>
+                            <a:srgbClr val="0F172A"/>
+                          </a:solidFill>
+                          <a:latin typeface="Arial"/>
+                        </a:defRPr>
+                      </a:pPr>
+                      <a:r>
+                        <a:t>90.00%</a:t>
+                      </a:r>
+                    </a:p>
+                  </a:txBody>
+                  <a:tcPr>
+                    <a:solidFill>
+                      <a:srgbClr val="FFFFFF"/>
+                    </a:solidFill>
+                  </a:tcPr>
+                </a:tc>
+              </a:tr>
+              <a:tr h="877824">
+                <a:tc>
+                  <a:txBody>
+                    <a:bodyPr/>
+                    <a:lstStyle/>
+                    <a:p>
+                      <a:pPr algn="l">
+                        <a:defRPr sz="1100" b="0">
+                          <a:solidFill>
+                            <a:srgbClr val="0F172A"/>
+                          </a:solidFill>
+                          <a:latin typeface="Arial"/>
+                        </a:defRPr>
+                      </a:pPr>
+                      <a:r>
+                        <a:t>2. 3D Res-SE CNN (Channel SE)</a:t>
+                      </a:r>
+                    </a:p>
+                  </a:txBody>
+                  <a:tcPr>
+                    <a:solidFill>
+                      <a:srgbClr val="FFFFFF"/>
+                    </a:solidFill>
+                  </a:tcPr>
+                </a:tc>
+                <a:tc>
+                  <a:txBody>
+                    <a:bodyPr/>
+                    <a:lstStyle/>
+                    <a:p>
+                      <a:pPr algn="ctr">
+                        <a:defRPr sz="1100" b="0">
+                          <a:solidFill>
+                            <a:srgbClr val="0F172A"/>
+                          </a:solidFill>
+                          <a:latin typeface="Arial"/>
+                        </a:defRPr>
+                      </a:pPr>
+                      <a:r>
+                        <a:t>~3.6M (14.5 MB)</a:t>
+                      </a:r>
+                    </a:p>
+                  </a:txBody>
+                  <a:tcPr>
+                    <a:solidFill>
+                      <a:srgbClr val="FFFFFF"/>
+                    </a:solidFill>
+                  </a:tcPr>
+                </a:tc>
+                <a:tc>
+                  <a:txBody>
+                    <a:bodyPr/>
+                    <a:lstStyle/>
+                    <a:p>
+                      <a:pPr algn="ctr">
+                        <a:defRPr sz="1100" b="0">
+                          <a:solidFill>
+                            <a:srgbClr val="0F172A"/>
+                          </a:solidFill>
+                          <a:latin typeface="Arial"/>
+                        </a:defRPr>
+                      </a:pPr>
+                      <a:r>
+                        <a:t>89.00%</a:t>
+                      </a:r>
+                    </a:p>
+                  </a:txBody>
+                  <a:tcPr>
+                    <a:solidFill>
+                      <a:srgbClr val="FFFFFF"/>
+                    </a:solidFill>
+                  </a:tcPr>
+                </a:tc>
+                <a:tc>
+                  <a:txBody>
+                    <a:bodyPr/>
+                    <a:lstStyle/>
+                    <a:p>
+                      <a:pPr algn="ctr">
+                        <a:defRPr sz="1100" b="0">
+                          <a:solidFill>
+                            <a:srgbClr val="0F172A"/>
+                          </a:solidFill>
+                          <a:latin typeface="Arial"/>
+                        </a:defRPr>
+                      </a:pPr>
+                      <a:r>
+                        <a:t>91.50%</a:t>
+                      </a:r>
+                    </a:p>
+                  </a:txBody>
+                  <a:tcPr>
+                    <a:solidFill>
+                      <a:srgbClr val="FFFFFF"/>
+                    </a:solidFill>
+                  </a:tcPr>
+                </a:tc>
+                <a:tc>
+                  <a:txBody>
+                    <a:bodyPr/>
+                    <a:lstStyle/>
+                    <a:p>
+                      <a:pPr algn="ctr">
+                        <a:defRPr sz="1100" b="0">
+                          <a:solidFill>
+                            <a:srgbClr val="0F172A"/>
+                          </a:solidFill>
+                          <a:latin typeface="Arial"/>
+                        </a:defRPr>
+                      </a:pPr>
+                      <a:r>
+                        <a:t>90.00%</a:t>
+                      </a:r>
+                    </a:p>
+                  </a:txBody>
+                  <a:tcPr>
+                    <a:solidFill>
+                      <a:srgbClr val="FFFFFF"/>
+                    </a:solidFill>
+                  </a:tcPr>
+                </a:tc>
+                <a:tc>
+                  <a:txBody>
+                    <a:bodyPr/>
+                    <a:lstStyle/>
+                    <a:p>
+                      <a:pPr algn="ctr">
+                        <a:defRPr sz="1100" b="0">
+                          <a:solidFill>
+                            <a:srgbClr val="0F172A"/>
+                          </a:solidFill>
+                          <a:latin typeface="Arial"/>
+                        </a:defRPr>
+                      </a:pPr>
+                      <a:r>
+                        <a:t>91.37%</a:t>
+                      </a:r>
+                    </a:p>
+                  </a:txBody>
+                  <a:tcPr>
+                    <a:solidFill>
+                      <a:srgbClr val="FFFFFF"/>
+                    </a:solidFill>
+                  </a:tcPr>
+                </a:tc>
+              </a:tr>
+              <a:tr h="877824">
+                <a:tc>
+                  <a:txBody>
+                    <a:bodyPr/>
+                    <a:lstStyle/>
+                    <a:p>
+                      <a:pPr algn="l">
+                        <a:defRPr sz="1100" b="0">
+                          <a:solidFill>
+                            <a:srgbClr val="0F172A"/>
+                          </a:solidFill>
+                          <a:latin typeface="Arial"/>
+                        </a:defRPr>
+                      </a:pPr>
+                      <a:r>
+                        <a:t>3. VideoViT v1 (Standard ViT)</a:t>
+                      </a:r>
+                    </a:p>
+                  </a:txBody>
+                  <a:tcPr>
+                    <a:solidFill>
+                      <a:srgbClr val="FFFFFF"/>
+                    </a:solidFill>
+                  </a:tcPr>
+                </a:tc>
+                <a:tc>
+                  <a:txBody>
+                    <a:bodyPr/>
+                    <a:lstStyle/>
+                    <a:p>
+                      <a:pPr algn="ctr">
+                        <a:defRPr sz="1100" b="0">
+                          <a:solidFill>
+                            <a:srgbClr val="0F172A"/>
+                          </a:solidFill>
+                          <a:latin typeface="Arial"/>
+                        </a:defRPr>
+                      </a:pPr>
+                      <a:r>
+                        <a:t>~6.7M (26.8 MB)</a:t>
+                      </a:r>
+                    </a:p>
+                  </a:txBody>
+                  <a:tcPr>
+                    <a:solidFill>
+                      <a:srgbClr val="FFFFFF"/>
+                    </a:solidFill>
+                  </a:tcPr>
+                </a:tc>
+                <a:tc>
+                  <a:txBody>
+                    <a:bodyPr/>
+                    <a:lstStyle/>
+                    <a:p>
+                      <a:pPr algn="ctr">
+                        <a:defRPr sz="1100" b="0">
+                          <a:solidFill>
+                            <a:srgbClr val="0F172A"/>
+                          </a:solidFill>
+                          <a:latin typeface="Arial"/>
+                        </a:defRPr>
+                      </a:pPr>
+                      <a:r>
+                        <a:t>96.00%</a:t>
+                      </a:r>
+                    </a:p>
+                  </a:txBody>
+                  <a:tcPr>
+                    <a:solidFill>
+                      <a:srgbClr val="FFFFFF"/>
+                    </a:solidFill>
+                  </a:tcPr>
+                </a:tc>
+                <a:tc>
+                  <a:txBody>
+                    <a:bodyPr/>
+                    <a:lstStyle/>
+                    <a:p>
+                      <a:pPr algn="ctr">
+                        <a:defRPr sz="1100" b="0">
+                          <a:solidFill>
+                            <a:srgbClr val="0F172A"/>
+                          </a:solidFill>
+                          <a:latin typeface="Arial"/>
+                        </a:defRPr>
+                      </a:pPr>
+                      <a:r>
+                        <a:t>94.50%</a:t>
+                      </a:r>
+                    </a:p>
+                  </a:txBody>
+                  <a:tcPr>
+                    <a:solidFill>
+                      <a:srgbClr val="FFFFFF"/>
+                    </a:solidFill>
+                  </a:tcPr>
+                </a:tc>
+                <a:tc>
+                  <a:txBody>
+                    <a:bodyPr/>
+                    <a:lstStyle/>
+                    <a:p>
+                      <a:pPr algn="ctr">
+                        <a:defRPr sz="1100" b="0">
+                          <a:solidFill>
+                            <a:srgbClr val="0F172A"/>
+                          </a:solidFill>
+                          <a:latin typeface="Arial"/>
+                        </a:defRPr>
+                      </a:pPr>
+                      <a:r>
+                        <a:t>95.00%</a:t>
+                      </a:r>
+                    </a:p>
+                  </a:txBody>
+                  <a:tcPr>
+                    <a:solidFill>
+                      <a:srgbClr val="FFFFFF"/>
+                    </a:solidFill>
+                  </a:tcPr>
+                </a:tc>
+                <a:tc>
+                  <a:txBody>
+                    <a:bodyPr/>
+                    <a:lstStyle/>
+                    <a:p>
+                      <a:pPr algn="ctr">
+                        <a:defRPr sz="1100" b="0">
+                          <a:solidFill>
+                            <a:srgbClr val="0F172A"/>
+                          </a:solidFill>
+                          <a:latin typeface="Arial"/>
+                        </a:defRPr>
+                      </a:pPr>
+                      <a:r>
+                        <a:t>94.53%</a:t>
+                      </a:r>
+                    </a:p>
+                  </a:txBody>
+                  <a:tcPr>
+                    <a:solidFill>
+                      <a:srgbClr val="FFFFFF"/>
+                    </a:solidFill>
+                  </a:tcPr>
+                </a:tc>
+              </a:tr>
+              <a:tr h="877824">
+                <a:tc>
+                  <a:txBody>
+                    <a:bodyPr/>
+                    <a:lstStyle/>
+                    <a:p>
+                      <a:pPr algn="l">
+                        <a:defRPr sz="1100" b="1">
+                          <a:solidFill>
+                            <a:srgbClr val="16A34A"/>
+                          </a:solidFill>
+                          <a:latin typeface="Arial"/>
+                        </a:defRPr>
+                      </a:pPr>
+                      <a:r>
+                        <a:t>4. VideoViT v2 + TTA (Champion) 🏆</a:t>
+                      </a:r>
+                    </a:p>
+                  </a:txBody>
+                  <a:tcPr>
+                    <a:solidFill>
+                      <a:srgbClr val="F0FDF4"/>
+                    </a:solidFill>
+                  </a:tcPr>
+                </a:tc>
+                <a:tc>
+                  <a:txBody>
+                    <a:bodyPr/>
+                    <a:lstStyle/>
+                    <a:p>
+                      <a:pPr algn="ctr">
+                        <a:defRPr sz="1100" b="1">
+                          <a:solidFill>
+                            <a:srgbClr val="16A34A"/>
+                          </a:solidFill>
+                          <a:latin typeface="Arial"/>
+                        </a:defRPr>
+                      </a:pPr>
+                      <a:r>
+                        <a:t>~9.8M (38.4 MB)</a:t>
+                      </a:r>
+                    </a:p>
+                  </a:txBody>
+                  <a:tcPr>
+                    <a:solidFill>
+                      <a:srgbClr val="F0FDF4"/>
+                    </a:solidFill>
+                  </a:tcPr>
+                </a:tc>
+                <a:tc>
+                  <a:txBody>
+                    <a:bodyPr/>
+                    <a:lstStyle/>
+                    <a:p>
+                      <a:pPr algn="ctr">
+                        <a:defRPr sz="1100" b="1">
+                          <a:solidFill>
+                            <a:srgbClr val="16A34A"/>
+                          </a:solidFill>
+                          <a:latin typeface="Arial"/>
+                        </a:defRPr>
+                      </a:pPr>
+                      <a:r>
+                        <a:t>95.50%</a:t>
+                      </a:r>
+                    </a:p>
+                  </a:txBody>
+                  <a:tcPr>
+                    <a:solidFill>
+                      <a:srgbClr val="F0FDF4"/>
+                    </a:solidFill>
+                  </a:tcPr>
+                </a:tc>
+                <a:tc>
+                  <a:txBody>
+                    <a:bodyPr/>
+                    <a:lstStyle/>
+                    <a:p>
+                      <a:pPr algn="ctr">
+                        <a:defRPr sz="1100" b="1">
+                          <a:solidFill>
+                            <a:srgbClr val="16A34A"/>
+                          </a:solidFill>
+                          <a:latin typeface="Arial"/>
+                        </a:defRPr>
+                      </a:pPr>
+                      <a:r>
+                        <a:t>95.50%</a:t>
+                      </a:r>
+                    </a:p>
+                  </a:txBody>
+                  <a:tcPr>
+                    <a:solidFill>
+                      <a:srgbClr val="F0FDF4"/>
+                    </a:solidFill>
+                  </a:tcPr>
+                </a:tc>
+                <a:tc>
+                  <a:txBody>
+                    <a:bodyPr/>
+                    <a:lstStyle/>
+                    <a:p>
+                      <a:pPr algn="ctr">
+                        <a:defRPr sz="1100" b="1">
+                          <a:solidFill>
+                            <a:srgbClr val="16A34A"/>
+                          </a:solidFill>
+                          <a:latin typeface="Arial"/>
+                        </a:defRPr>
+                      </a:pPr>
+                      <a:r>
+                        <a:t>96.00%</a:t>
+                      </a:r>
+                    </a:p>
+                  </a:txBody>
+                  <a:tcPr>
+                    <a:solidFill>
+                      <a:srgbClr val="F0FDF4"/>
+                    </a:solidFill>
+                  </a:tcPr>
+                </a:tc>
+                <a:tc>
+                  <a:txBody>
+                    <a:bodyPr/>
+                    <a:lstStyle/>
+                    <a:p>
+                      <a:pPr algn="ctr">
+                        <a:defRPr sz="1100" b="1">
+                          <a:solidFill>
+                            <a:srgbClr val="16A34A"/>
+                          </a:solidFill>
+                          <a:latin typeface="Arial"/>
+                        </a:defRPr>
+                      </a:pPr>
+                      <a:r>
+                        <a:t>95.52%</a:t>
+                      </a:r>
+                    </a:p>
+                  </a:txBody>
+                  <a:tcPr>
+                    <a:solidFill>
+                      <a:srgbClr val="F0FDF4"/>
+                    </a:solidFill>
+                  </a:tcPr>
+                </a:tc>
+              </a:tr>
+            </a:tbl>
+          </a:graphicData>
+        </a:graphic>
+      </p:graphicFrame>
     </p:spTree>
   </p:cSld>
   <p:clrMapOvr>
@@ -6293,7 +8375,7 @@
               </a:defRPr>
             </a:pPr>
             <a:r>
-              <a:t>IDENTITY EVIDENCE EXTRACTION</a:t>
+              <a:t>5. PHASE 2 METHODOLOGY</a:t>
             </a:r>
           </a:p>
           <a:p>
@@ -6306,7 +8388,7 @@
               </a:defRPr>
             </a:pPr>
             <a:r>
-              <a:t>Phase 3B: Suspect Facial Recognition &amp; Watchlist Matching</a:t>
+              <a:t>Phase 2: 6-Class Fine-Grained Crime Action Recognition</a:t>
             </a:r>
           </a:p>
         </p:txBody>
@@ -6328,8 +8410,10 @@
           <a:solidFill>
             <a:srgbClr val="F1F5F9"/>
           </a:solidFill>
-          <a:ln>
-            <a:noFill/>
+          <a:ln w="12700">
+            <a:solidFill>
+              <a:srgbClr val="CBD5E1"/>
+            </a:solidFill>
           </a:ln>
         </p:spPr>
         <p:style>
@@ -6385,71 +8469,71 @@
               </a:defRPr>
             </a:pPr>
             <a:r>
-              <a:t>👤 Facial Detection &amp; Deep Embeddings</a:t>
+              <a:t>🔬 XD-Violence Benchmark Design</a:t>
             </a:r>
           </a:p>
           <a:p>
             <a:pPr>
               <a:spcBef>
-                <a:spcPts val="1000"/>
+                <a:spcPts val="800"/>
               </a:spcBef>
-              <a:defRPr sz="1200">
-                <a:solidFill>
-                  <a:srgbClr val="1E293B"/>
-                </a:solidFill>
-                <a:latin typeface="Arial"/>
-              </a:defRPr>
-            </a:pPr>
-            <a:r>
-              <a:t>• Head / Face RoI Localization: YOLOv8 person upper-body bounding box detector crops facial regions even when partially turned or obscured.</a:t>
+              <a:defRPr sz="1150">
+                <a:solidFill>
+                  <a:srgbClr val="0F172A"/>
+                </a:solidFill>
+                <a:latin typeface="Arial"/>
+              </a:defRPr>
+            </a:pPr>
+            <a:r>
+              <a:t>• Dataset Migration: Replaced noisy UCF-Crime (22% accuracy) with XD-Violence (2,115 CCTV videos across 6 distinct legal action classes).</a:t>
             </a:r>
           </a:p>
           <a:p>
             <a:pPr>
               <a:spcBef>
-                <a:spcPts val="1000"/>
+                <a:spcPts val="800"/>
               </a:spcBef>
-              <a:defRPr sz="1200">
-                <a:solidFill>
-                  <a:srgbClr val="1E293B"/>
-                </a:solidFill>
-                <a:latin typeface="Arial"/>
-              </a:defRPr>
-            </a:pPr>
-            <a:r>
-              <a:t>• 512-D Deep Metric Embedder: L2-normalized feature representation maps suspect face crops into identity space.</a:t>
+              <a:defRPr sz="1150">
+                <a:solidFill>
+                  <a:srgbClr val="0F172A"/>
+                </a:solidFill>
+                <a:latin typeface="Arial"/>
+              </a:defRPr>
+            </a:pPr>
+            <a:r>
+              <a:t>• Action Classes: Fighting (484), Shooting (294), Explosion (358), CarAccident (468), Riot (473), Abuse (38).</a:t>
             </a:r>
           </a:p>
           <a:p>
             <a:pPr>
               <a:spcBef>
-                <a:spcPts val="1000"/>
+                <a:spcPts val="800"/>
               </a:spcBef>
-              <a:defRPr sz="1200">
-                <a:solidFill>
-                  <a:srgbClr val="1E293B"/>
-                </a:solidFill>
-                <a:latin typeface="Arial"/>
-              </a:defRPr>
-            </a:pPr>
-            <a:r>
-              <a:t>• Illumination Normalization: Adaptive histogram equalization ensures robust matching under poor night CCTV lighting.</a:t>
+              <a:defRPr sz="1150">
+                <a:solidFill>
+                  <a:srgbClr val="0F172A"/>
+                </a:solidFill>
+                <a:latin typeface="Arial"/>
+              </a:defRPr>
+            </a:pPr>
+            <a:r>
+              <a:t>• Split Protocol: 1,586 Train (4,758 augmented samples) / 211 Validation / 318 Held-Out Test Videos.</a:t>
             </a:r>
           </a:p>
           <a:p>
             <a:pPr>
               <a:spcBef>
-                <a:spcPts val="1000"/>
+                <a:spcPts val="800"/>
               </a:spcBef>
-              <a:defRPr sz="1200">
-                <a:solidFill>
-                  <a:srgbClr val="1E293B"/>
-                </a:solidFill>
-                <a:latin typeface="Arial"/>
-              </a:defRPr>
-            </a:pPr>
-            <a:r>
-              <a:t>• Automated Mugshot Export: High-resolution suspect crops are saved directly into `incident_evidence/faces/`.</a:t>
+              <a:defRPr sz="1150">
+                <a:solidFill>
+                  <a:srgbClr val="0F172A"/>
+                </a:solidFill>
+                <a:latin typeface="Arial"/>
+              </a:defRPr>
+            </a:pPr>
+            <a:r>
+              <a:t>• Optimization: AdamW optimizer (lr=1.5e-4, weight_decay=1e-4) with Cosine Annealing and label smoothing (0.08).</a:t>
             </a:r>
           </a:p>
         </p:txBody>
@@ -6471,8 +8555,10 @@
           <a:solidFill>
             <a:srgbClr val="F1F5F9"/>
           </a:solidFill>
-          <a:ln>
-            <a:noFill/>
+          <a:ln w="12700">
+            <a:solidFill>
+              <a:srgbClr val="CBD5E1"/>
+            </a:solidFill>
           </a:ln>
         </p:spPr>
         <p:style>
@@ -6528,71 +8614,71 @@
               </a:defRPr>
             </a:pPr>
             <a:r>
-              <a:t>🔍 Cosine Similarity Watchlist Matching</a:t>
+              <a:t>📊 Key Methodological Innovations</a:t>
             </a:r>
           </a:p>
           <a:p>
             <a:pPr>
               <a:spcBef>
-                <a:spcPts val="1000"/>
+                <a:spcPts val="800"/>
               </a:spcBef>
-              <a:defRPr sz="1200">
-                <a:solidFill>
-                  <a:srgbClr val="1E293B"/>
-                </a:solidFill>
-                <a:latin typeface="Arial"/>
-              </a:defRPr>
-            </a:pPr>
-            <a:r>
-              <a:t>• Cosine Metric: Evaluates dot product of unit-normalized face embeddings against known offender database.</a:t>
+              <a:defRPr sz="1150">
+                <a:solidFill>
+                  <a:srgbClr val="0F172A"/>
+                </a:solidFill>
+                <a:latin typeface="Arial"/>
+              </a:defRPr>
+            </a:pPr>
+            <a:r>
+              <a:t>• Unsharp Masking (USM): Eliminates motion blur on high-speed punches, firearm recoils, and vehicle impacts.</a:t>
             </a:r>
           </a:p>
           <a:p>
             <a:pPr>
               <a:spcBef>
-                <a:spcPts val="1000"/>
+                <a:spcPts val="800"/>
               </a:spcBef>
-              <a:defRPr sz="1200">
-                <a:solidFill>
-                  <a:srgbClr val="1E293B"/>
-                </a:solidFill>
-                <a:latin typeface="Arial"/>
-              </a:defRPr>
-            </a:pPr>
-            <a:r>
-              <a:t>• Match Confidence Threshold: Strict 0.85 threshold prevents false identity accusations.</a:t>
+              <a:defRPr sz="1150">
+                <a:solidFill>
+                  <a:srgbClr val="0F172A"/>
+                </a:solidFill>
+                <a:latin typeface="Arial"/>
+              </a:defRPr>
+            </a:pPr>
+            <a:r>
+              <a:t>• TSN 24-Segment Sampling: Spans entire duration of incidents, preventing loss of localized rapid violent actions.</a:t>
             </a:r>
           </a:p>
           <a:p>
             <a:pPr>
               <a:spcBef>
-                <a:spcPts val="1000"/>
+                <a:spcPts val="800"/>
               </a:spcBef>
-              <a:defRPr sz="1200">
-                <a:solidFill>
-                  <a:srgbClr val="1E293B"/>
-                </a:solidFill>
-                <a:latin typeface="Arial"/>
-              </a:defRPr>
-            </a:pPr>
-            <a:r>
-              <a:t>• Experimental Test Result: Matched active robbery suspect against police watchlist mugshots with 98.4% identity confidence.</a:t>
+              <a:defRPr sz="1150">
+                <a:solidFill>
+                  <a:srgbClr val="0F172A"/>
+                </a:solidFill>
+                <a:latin typeface="Arial"/>
+              </a:defRPr>
+            </a:pPr>
+            <a:r>
+              <a:t>• Class-Balanced Focal Loss: Dynamic weighting ensures minority classes (e.g. Abuse, Shooting) receive proportional gradient updates.</a:t>
             </a:r>
           </a:p>
           <a:p>
             <a:pPr>
               <a:spcBef>
-                <a:spcPts val="1000"/>
+                <a:spcPts val="800"/>
               </a:spcBef>
-              <a:defRPr sz="1200">
-                <a:solidFill>
-                  <a:srgbClr val="1E293B"/>
-                </a:solidFill>
-                <a:latin typeface="Arial"/>
-              </a:defRPr>
-            </a:pPr>
-            <a:r>
-              <a:t>• Police Alert: Displays Known Suspect Name, Criminal ID, Offense History, and Match Confidence directly on the dispatch terminal.</a:t>
+              <a:defRPr sz="1150">
+                <a:solidFill>
+                  <a:srgbClr val="0F172A"/>
+                </a:solidFill>
+                <a:latin typeface="Arial"/>
+              </a:defRPr>
+            </a:pPr>
+            <a:r>
+              <a:t>• Validated Benchmark: 77.36% Test Accuracy | 78.19% Weighted Precision | 79.15% Peak Validation Accuracy.</a:t>
             </a:r>
           </a:p>
         </p:txBody>
@@ -6646,7 +8732,7 @@
               </a:defRPr>
             </a:pPr>
             <a:r>
-              <a:t>LAW ENFORCEMENT EVIDENCE SYNTHESIS</a:t>
+              <a:t>5. PHASE 2 RESULTS</a:t>
             </a:r>
           </a:p>
           <a:p>
@@ -6659,526 +8745,7 @@
               </a:defRPr>
             </a:pPr>
             <a:r>
-              <a:t>Phase 4: Automated Police Forensic Dossier Generator</a:t>
-            </a:r>
-          </a:p>
-        </p:txBody>
-      </p:sp>
-      <p:sp>
-        <p:nvSpPr>
-          <p:cNvPr id="3" name="Rounded Rectangle 2"/>
-          <p:cNvSpPr/>
-          <p:nvPr/>
-        </p:nvSpPr>
-        <p:spPr>
-          <a:xfrm>
-            <a:off x="731520" y="1463040"/>
-            <a:ext cx="2560320" cy="4754880"/>
-          </a:xfrm>
-          <a:prstGeom prst="roundRect">
-            <a:avLst/>
-          </a:prstGeom>
-          <a:solidFill>
-            <a:srgbClr val="F1F5F9"/>
-          </a:solidFill>
-          <a:ln w="19050">
-            <a:solidFill>
-              <a:srgbClr val="1E3A8A"/>
-            </a:solidFill>
-          </a:ln>
-        </p:spPr>
-        <p:style>
-          <a:lnRef idx="1">
-            <a:schemeClr val="accent1"/>
-          </a:lnRef>
-          <a:fillRef idx="3">
-            <a:schemeClr val="accent1"/>
-          </a:fillRef>
-          <a:effectRef idx="2">
-            <a:schemeClr val="accent1"/>
-          </a:effectRef>
-          <a:fontRef idx="minor">
-            <a:schemeClr val="lt1"/>
-          </a:fontRef>
-        </p:style>
-        <p:txBody>
-          <a:bodyPr rtlCol="0" anchor="ctr"/>
-          <a:lstStyle/>
-          <a:p>
-            <a:pPr algn="ctr"/>
-          </a:p>
-        </p:txBody>
-      </p:sp>
-      <p:sp>
-        <p:nvSpPr>
-          <p:cNvPr id="4" name="TextBox 3"/>
-          <p:cNvSpPr txBox="1"/>
-          <p:nvPr/>
-        </p:nvSpPr>
-        <p:spPr>
-          <a:xfrm>
-            <a:off x="868680" y="1645920"/>
-            <a:ext cx="2286000" cy="4389120"/>
-          </a:xfrm>
-          <a:prstGeom prst="rect">
-            <a:avLst/>
-          </a:prstGeom>
-          <a:noFill/>
-        </p:spPr>
-        <p:txBody>
-          <a:bodyPr wrap="square">
-            <a:spAutoFit/>
-          </a:bodyPr>
-          <a:lstStyle/>
-          <a:p>
-            <a:pPr>
-              <a:defRPr sz="1300" b="1">
-                <a:solidFill>
-                  <a:srgbClr val="1E3A8A"/>
-                </a:solidFill>
-                <a:latin typeface="Arial"/>
-              </a:defRPr>
-            </a:pPr>
-            <a:r>
-              <a:t>📁 Structured JSON Record</a:t>
-            </a:r>
-          </a:p>
-          <a:p>
-            <a:pPr>
-              <a:spcBef>
-                <a:spcPts val="600"/>
-              </a:spcBef>
-              <a:defRPr sz="1100" b="1">
-                <a:solidFill>
-                  <a:srgbClr val="0F172A"/>
-                </a:solidFill>
-                <a:latin typeface="Arial"/>
-              </a:defRPr>
-            </a:pPr>
-            <a:r>
-              <a:t>Forensic Data Interchange</a:t>
-            </a:r>
-          </a:p>
-          <a:p>
-            <a:pPr>
-              <a:spcBef>
-                <a:spcPts val="1000"/>
-              </a:spcBef>
-              <a:defRPr sz="1100">
-                <a:solidFill>
-                  <a:srgbClr val="1E293B"/>
-                </a:solidFill>
-                <a:latin typeface="Arial"/>
-              </a:defRPr>
-            </a:pPr>
-            <a:r>
-              <a:t>Contains complete machine-readable crime metadata: Incident ID, Camera ID, GPS coordinates, Threat Probability (0-100%), Action Class, Weapon Bounding Boxes, and Matched Suspect IDs.</a:t>
-            </a:r>
-          </a:p>
-        </p:txBody>
-      </p:sp>
-      <p:sp>
-        <p:nvSpPr>
-          <p:cNvPr id="5" name="Rounded Rectangle 4"/>
-          <p:cNvSpPr/>
-          <p:nvPr/>
-        </p:nvSpPr>
-        <p:spPr>
-          <a:xfrm>
-            <a:off x="3429000" y="1463040"/>
-            <a:ext cx="2560320" cy="4754880"/>
-          </a:xfrm>
-          <a:prstGeom prst="roundRect">
-            <a:avLst/>
-          </a:prstGeom>
-          <a:solidFill>
-            <a:srgbClr val="F1F5F9"/>
-          </a:solidFill>
-          <a:ln w="19050">
-            <a:solidFill>
-              <a:srgbClr val="DC2626"/>
-            </a:solidFill>
-          </a:ln>
-        </p:spPr>
-        <p:style>
-          <a:lnRef idx="1">
-            <a:schemeClr val="accent1"/>
-          </a:lnRef>
-          <a:fillRef idx="3">
-            <a:schemeClr val="accent1"/>
-          </a:fillRef>
-          <a:effectRef idx="2">
-            <a:schemeClr val="accent1"/>
-          </a:effectRef>
-          <a:fontRef idx="minor">
-            <a:schemeClr val="lt1"/>
-          </a:fontRef>
-        </p:style>
-        <p:txBody>
-          <a:bodyPr rtlCol="0" anchor="ctr"/>
-          <a:lstStyle/>
-          <a:p>
-            <a:pPr algn="ctr"/>
-          </a:p>
-        </p:txBody>
-      </p:sp>
-      <p:sp>
-        <p:nvSpPr>
-          <p:cNvPr id="6" name="TextBox 5"/>
-          <p:cNvSpPr txBox="1"/>
-          <p:nvPr/>
-        </p:nvSpPr>
-        <p:spPr>
-          <a:xfrm>
-            <a:off x="3566160" y="1645920"/>
-            <a:ext cx="2286000" cy="4389120"/>
-          </a:xfrm>
-          <a:prstGeom prst="rect">
-            <a:avLst/>
-          </a:prstGeom>
-          <a:noFill/>
-        </p:spPr>
-        <p:txBody>
-          <a:bodyPr wrap="square">
-            <a:spAutoFit/>
-          </a:bodyPr>
-          <a:lstStyle/>
-          <a:p>
-            <a:pPr>
-              <a:defRPr sz="1300" b="1">
-                <a:solidFill>
-                  <a:srgbClr val="DC2626"/>
-                </a:solidFill>
-                <a:latin typeface="Arial"/>
-              </a:defRPr>
-            </a:pPr>
-            <a:r>
-              <a:t>📄 Police Incident Summary Card</a:t>
-            </a:r>
-          </a:p>
-          <a:p>
-            <a:pPr>
-              <a:spcBef>
-                <a:spcPts val="600"/>
-              </a:spcBef>
-              <a:defRPr sz="1100" b="1">
-                <a:solidFill>
-                  <a:srgbClr val="0F172A"/>
-                </a:solidFill>
-                <a:latin typeface="Arial"/>
-              </a:defRPr>
-            </a:pPr>
-            <a:r>
-              <a:t>Formatted Briefing Report</a:t>
-            </a:r>
-          </a:p>
-          <a:p>
-            <a:pPr>
-              <a:spcBef>
-                <a:spcPts val="1000"/>
-              </a:spcBef>
-              <a:defRPr sz="1100">
-                <a:solidFill>
-                  <a:srgbClr val="1E293B"/>
-                </a:solidFill>
-                <a:latin typeface="Arial"/>
-              </a:defRPr>
-            </a:pPr>
-            <a:r>
-              <a:t>Human-readable tactical summary report ready for dispatch: Priority Level (P1/P2), Dispatch Instructions, Time of Incident, Key Findings, and Action Steps for patrol units.</a:t>
-            </a:r>
-          </a:p>
-        </p:txBody>
-      </p:sp>
-      <p:sp>
-        <p:nvSpPr>
-          <p:cNvPr id="7" name="Rounded Rectangle 6"/>
-          <p:cNvSpPr/>
-          <p:nvPr/>
-        </p:nvSpPr>
-        <p:spPr>
-          <a:xfrm>
-            <a:off x="6126480" y="1463040"/>
-            <a:ext cx="2560320" cy="4754880"/>
-          </a:xfrm>
-          <a:prstGeom prst="roundRect">
-            <a:avLst/>
-          </a:prstGeom>
-          <a:solidFill>
-            <a:srgbClr val="F1F5F9"/>
-          </a:solidFill>
-          <a:ln w="19050">
-            <a:solidFill>
-              <a:srgbClr val="0F172A"/>
-            </a:solidFill>
-          </a:ln>
-        </p:spPr>
-        <p:style>
-          <a:lnRef idx="1">
-            <a:schemeClr val="accent1"/>
-          </a:lnRef>
-          <a:fillRef idx="3">
-            <a:schemeClr val="accent1"/>
-          </a:fillRef>
-          <a:effectRef idx="2">
-            <a:schemeClr val="accent1"/>
-          </a:effectRef>
-          <a:fontRef idx="minor">
-            <a:schemeClr val="lt1"/>
-          </a:fontRef>
-        </p:style>
-        <p:txBody>
-          <a:bodyPr rtlCol="0" anchor="ctr"/>
-          <a:lstStyle/>
-          <a:p>
-            <a:pPr algn="ctr"/>
-          </a:p>
-        </p:txBody>
-      </p:sp>
-      <p:sp>
-        <p:nvSpPr>
-          <p:cNvPr id="8" name="TextBox 7"/>
-          <p:cNvSpPr txBox="1"/>
-          <p:nvPr/>
-        </p:nvSpPr>
-        <p:spPr>
-          <a:xfrm>
-            <a:off x="6263640" y="1645920"/>
-            <a:ext cx="2286000" cy="4389120"/>
-          </a:xfrm>
-          <a:prstGeom prst="rect">
-            <a:avLst/>
-          </a:prstGeom>
-          <a:noFill/>
-        </p:spPr>
-        <p:txBody>
-          <a:bodyPr wrap="square">
-            <a:spAutoFit/>
-          </a:bodyPr>
-          <a:lstStyle/>
-          <a:p>
-            <a:pPr>
-              <a:defRPr sz="1300" b="1">
-                <a:solidFill>
-                  <a:srgbClr val="0F172A"/>
-                </a:solidFill>
-                <a:latin typeface="Arial"/>
-              </a:defRPr>
-            </a:pPr>
-            <a:r>
-              <a:t>🖼️ Keyframe Evidence Snapshot</a:t>
-            </a:r>
-          </a:p>
-          <a:p>
-            <a:pPr>
-              <a:spcBef>
-                <a:spcPts val="600"/>
-              </a:spcBef>
-              <a:defRPr sz="1100" b="1">
-                <a:solidFill>
-                  <a:srgbClr val="0F172A"/>
-                </a:solidFill>
-                <a:latin typeface="Arial"/>
-              </a:defRPr>
-            </a:pPr>
-            <a:r>
-              <a:t>Visual Scene Capture</a:t>
-            </a:r>
-          </a:p>
-          <a:p>
-            <a:pPr>
-              <a:spcBef>
-                <a:spcPts val="1000"/>
-              </a:spcBef>
-              <a:defRPr sz="1100">
-                <a:solidFill>
-                  <a:srgbClr val="1E293B"/>
-                </a:solidFill>
-                <a:latin typeface="Arial"/>
-              </a:defRPr>
-            </a:pPr>
-            <a:r>
-              <a:t>Annotated CCTV frame capturing the exact moment of crime, with bounding boxes over weapons and suspects, timestamped and stamped with camera ID.</a:t>
-            </a:r>
-          </a:p>
-        </p:txBody>
-      </p:sp>
-      <p:sp>
-        <p:nvSpPr>
-          <p:cNvPr id="9" name="Rounded Rectangle 8"/>
-          <p:cNvSpPr/>
-          <p:nvPr/>
-        </p:nvSpPr>
-        <p:spPr>
-          <a:xfrm>
-            <a:off x="8823960" y="1463040"/>
-            <a:ext cx="2560320" cy="4754880"/>
-          </a:xfrm>
-          <a:prstGeom prst="roundRect">
-            <a:avLst/>
-          </a:prstGeom>
-          <a:solidFill>
-            <a:srgbClr val="F1F5F9"/>
-          </a:solidFill>
-          <a:ln w="19050">
-            <a:solidFill>
-              <a:srgbClr val="16A34A"/>
-            </a:solidFill>
-          </a:ln>
-        </p:spPr>
-        <p:style>
-          <a:lnRef idx="1">
-            <a:schemeClr val="accent1"/>
-          </a:lnRef>
-          <a:fillRef idx="3">
-            <a:schemeClr val="accent1"/>
-          </a:fillRef>
-          <a:effectRef idx="2">
-            <a:schemeClr val="accent1"/>
-          </a:effectRef>
-          <a:fontRef idx="minor">
-            <a:schemeClr val="lt1"/>
-          </a:fontRef>
-        </p:style>
-        <p:txBody>
-          <a:bodyPr rtlCol="0" anchor="ctr"/>
-          <a:lstStyle/>
-          <a:p>
-            <a:pPr algn="ctr"/>
-          </a:p>
-        </p:txBody>
-      </p:sp>
-      <p:sp>
-        <p:nvSpPr>
-          <p:cNvPr id="10" name="TextBox 9"/>
-          <p:cNvSpPr txBox="1"/>
-          <p:nvPr/>
-        </p:nvSpPr>
-        <p:spPr>
-          <a:xfrm>
-            <a:off x="8961120" y="1645920"/>
-            <a:ext cx="2286000" cy="4389120"/>
-          </a:xfrm>
-          <a:prstGeom prst="rect">
-            <a:avLst/>
-          </a:prstGeom>
-          <a:noFill/>
-        </p:spPr>
-        <p:txBody>
-          <a:bodyPr wrap="square">
-            <a:spAutoFit/>
-          </a:bodyPr>
-          <a:lstStyle/>
-          <a:p>
-            <a:pPr>
-              <a:defRPr sz="1300" b="1">
-                <a:solidFill>
-                  <a:srgbClr val="16A34A"/>
-                </a:solidFill>
-                <a:latin typeface="Arial"/>
-              </a:defRPr>
-            </a:pPr>
-            <a:r>
-              <a:t>👤 Suspect Mugshot Crop</a:t>
-            </a:r>
-          </a:p>
-          <a:p>
-            <a:pPr>
-              <a:spcBef>
-                <a:spcPts val="600"/>
-              </a:spcBef>
-              <a:defRPr sz="1100" b="1">
-                <a:solidFill>
-                  <a:srgbClr val="0F172A"/>
-                </a:solidFill>
-                <a:latin typeface="Arial"/>
-              </a:defRPr>
-            </a:pPr>
-            <a:r>
-              <a:t>Identity Verification</a:t>
-            </a:r>
-          </a:p>
-          <a:p>
-            <a:pPr>
-              <a:spcBef>
-                <a:spcPts val="1000"/>
-              </a:spcBef>
-              <a:defRPr sz="1100">
-                <a:solidFill>
-                  <a:srgbClr val="1E293B"/>
-                </a:solidFill>
-                <a:latin typeface="Arial"/>
-              </a:defRPr>
-            </a:pPr>
-            <a:r>
-              <a:t>Isolated high-resolution cropped image of the suspect face mapped alongside watchlist mugshots for swift arrest warrant verification.</a:t>
-            </a:r>
-          </a:p>
-        </p:txBody>
-      </p:sp>
-    </p:spTree>
-  </p:cSld>
-  <p:clrMapOvr>
-    <a:masterClrMapping/>
-  </p:clrMapOvr>
-</p:sld>
-</file>
-
-<file path=ppt/slides/slide9.xml><?xml version="1.0" encoding="utf-8"?>
-<p:sld xmlns:a="http://schemas.openxmlformats.org/drawingml/2006/main" xmlns:p="http://schemas.openxmlformats.org/presentationml/2006/main" xmlns:r="http://schemas.openxmlformats.org/officeDocument/2006/relationships">
-  <p:cSld>
-    <p:spTree>
-      <p:nvGrpSpPr>
-        <p:cNvPr id="1" name=""/>
-        <p:cNvGrpSpPr/>
-        <p:nvPr/>
-      </p:nvGrpSpPr>
-      <p:grpSpPr/>
-      <p:sp>
-        <p:nvSpPr>
-          <p:cNvPr id="2" name="TextBox 1"/>
-          <p:cNvSpPr txBox="1"/>
-          <p:nvPr/>
-        </p:nvSpPr>
-        <p:spPr>
-          <a:xfrm>
-            <a:off x="731520" y="365760"/>
-            <a:ext cx="10698480" cy="1005840"/>
-          </a:xfrm>
-          <a:prstGeom prst="rect">
-            <a:avLst/>
-          </a:prstGeom>
-          <a:noFill/>
-        </p:spPr>
-        <p:txBody>
-          <a:bodyPr wrap="square" lIns="0" tIns="0" rIns="0" bIns="0">
-            <a:spAutoFit/>
-          </a:bodyPr>
-          <a:lstStyle/>
-          <a:p>
-            <a:pPr>
-              <a:defRPr sz="1000" b="1">
-                <a:solidFill>
-                  <a:srgbClr val="1E3A8A"/>
-                </a:solidFill>
-                <a:latin typeface="Arial"/>
-              </a:defRPr>
-            </a:pPr>
-            <a:r>
-              <a:t>EXPERIMENTAL VALIDATION</a:t>
-            </a:r>
-          </a:p>
-          <a:p>
-            <a:pPr>
-              <a:defRPr sz="2200" b="1">
-                <a:solidFill>
-                  <a:srgbClr val="0F172A"/>
-                </a:solidFill>
-                <a:latin typeface="Arial"/>
-              </a:defRPr>
-            </a:pPr>
-            <a:r>
-              <a:t>Comprehensive Performance &amp; Benchmark Comparison</a:t>
+              <a:t>Phase 2 Detailed Per-Class Evaluation &amp; Confusion Matrix</a:t>
             </a:r>
           </a:p>
         </p:txBody>
@@ -7203,13 +8770,12 @@
               </a:tblPr>
               <a:tblGrid>
                 <a:gridCol w="2926080"/>
-                <a:gridCol w="1463040"/>
-                <a:gridCol w="1371600"/>
-                <a:gridCol w="1645920"/>
-                <a:gridCol w="1645920"/>
-                <a:gridCol w="1645920"/>
+                <a:gridCol w="1920240"/>
+                <a:gridCol w="1920240"/>
+                <a:gridCol w="1920240"/>
+                <a:gridCol w="2011680"/>
               </a:tblGrid>
-              <a:tr h="679268">
+              <a:tr h="594360">
                 <a:tc>
                   <a:txBody>
                     <a:bodyPr/>
@@ -7224,7 +8790,7 @@
                         </a:defRPr>
                       </a:pPr>
                       <a:r>
-                        <a:t>Model / Pipeline Stage</a:t>
+                        <a:t>Crime Category</a:t>
                       </a:r>
                     </a:p>
                   </a:txBody>
@@ -7248,7 +8814,7 @@
                         </a:defRPr>
                       </a:pPr>
                       <a:r>
-                        <a:t>Model Type</a:t>
+                        <a:t>Precision</a:t>
                       </a:r>
                     </a:p>
                   </a:txBody>
@@ -7272,7 +8838,7 @@
                         </a:defRPr>
                       </a:pPr>
                       <a:r>
-                        <a:t>Params / Size</a:t>
+                        <a:t>Recall</a:t>
                       </a:r>
                     </a:p>
                   </a:txBody>
@@ -7296,7 +8862,7 @@
                         </a:defRPr>
                       </a:pPr>
                       <a:r>
-                        <a:t>Val Accuracy</a:t>
+                        <a:t>F1-Score</a:t>
                       </a:r>
                     </a:p>
                   </a:txBody>
@@ -7320,7 +8886,7 @@
                         </a:defRPr>
                       </a:pPr>
                       <a:r>
-                        <a:t>Test Accuracy</a:t>
+                        <a:t>Test Support</a:t>
                       </a:r>
                     </a:p>
                   </a:txBody>
@@ -7330,32 +8896,8 @@
                     </a:solidFill>
                   </a:tcPr>
                 </a:tc>
-                <a:tc>
-                  <a:txBody>
-                    <a:bodyPr/>
-                    <a:lstStyle/>
-                    <a:p>
-                      <a:pPr algn="ctr">
-                        <a:defRPr sz="1100" b="1">
-                          <a:solidFill>
-                            <a:srgbClr val="FFFFFF"/>
-                          </a:solidFill>
-                          <a:latin typeface="Arial"/>
-                        </a:defRPr>
-                      </a:pPr>
-                      <a:r>
-                        <a:t>Recall / F1</a:t>
-                      </a:r>
-                    </a:p>
-                  </a:txBody>
-                  <a:tcPr>
-                    <a:solidFill>
-                      <a:srgbClr val="1E3A8A"/>
-                    </a:solidFill>
-                  </a:tcPr>
-                </a:tc>
               </a:tr>
-              <a:tr h="679268">
+              <a:tr h="594360">
                 <a:tc>
                   <a:txBody>
                     <a:bodyPr/>
@@ -7364,13 +8906,13 @@
                       <a:pPr algn="l">
                         <a:defRPr sz="1050" b="0">
                           <a:solidFill>
-                            <a:srgbClr val="1E293B"/>
-                          </a:solidFill>
-                          <a:latin typeface="Arial"/>
-                        </a:defRPr>
-                      </a:pPr>
-                      <a:r>
-                        <a:t>Phase 1 Baseline 3D CNN</a:t>
+                            <a:srgbClr val="0F172A"/>
+                          </a:solidFill>
+                          <a:latin typeface="Arial"/>
+                        </a:defRPr>
+                      </a:pPr>
+                      <a:r>
+                        <a:t>🚗 Car Accident</a:t>
                       </a:r>
                     </a:p>
                   </a:txBody>
@@ -7388,13 +8930,13 @@
                       <a:pPr algn="ctr">
                         <a:defRPr sz="1050" b="0">
                           <a:solidFill>
-                            <a:srgbClr val="1E293B"/>
-                          </a:solidFill>
-                          <a:latin typeface="Arial"/>
-                        </a:defRPr>
-                      </a:pPr>
-                      <a:r>
-                        <a:t>Binary Gate</a:t>
+                            <a:srgbClr val="0F172A"/>
+                          </a:solidFill>
+                          <a:latin typeface="Arial"/>
+                        </a:defRPr>
+                      </a:pPr>
+                      <a:r>
+                        <a:t>90.41%</a:t>
                       </a:r>
                     </a:p>
                   </a:txBody>
@@ -7412,13 +8954,13 @@
                       <a:pPr algn="ctr">
                         <a:defRPr sz="1050" b="0">
                           <a:solidFill>
-                            <a:srgbClr val="1E293B"/>
-                          </a:solidFill>
-                          <a:latin typeface="Arial"/>
-                        </a:defRPr>
-                      </a:pPr>
-                      <a:r>
-                        <a:t>1.2M (4.8 MB)</a:t>
+                            <a:srgbClr val="0F172A"/>
+                          </a:solidFill>
+                          <a:latin typeface="Arial"/>
+                        </a:defRPr>
+                      </a:pPr>
+                      <a:r>
+                        <a:t>94.29%</a:t>
                       </a:r>
                     </a:p>
                   </a:txBody>
@@ -7436,13 +8978,13 @@
                       <a:pPr algn="ctr">
                         <a:defRPr sz="1050" b="0">
                           <a:solidFill>
-                            <a:srgbClr val="1E293B"/>
-                          </a:solidFill>
-                          <a:latin typeface="Arial"/>
-                        </a:defRPr>
-                      </a:pPr>
-                      <a:r>
-                        <a:t>88.00%</a:t>
+                            <a:srgbClr val="0F172A"/>
+                          </a:solidFill>
+                          <a:latin typeface="Arial"/>
+                        </a:defRPr>
+                      </a:pPr>
+                      <a:r>
+                        <a:t>92.31%</a:t>
                       </a:r>
                     </a:p>
                   </a:txBody>
@@ -7460,13 +9002,39 @@
                       <a:pPr algn="ctr">
                         <a:defRPr sz="1050" b="0">
                           <a:solidFill>
-                            <a:srgbClr val="1E293B"/>
-                          </a:solidFill>
-                          <a:latin typeface="Arial"/>
-                        </a:defRPr>
-                      </a:pPr>
-                      <a:r>
-                        <a:t>90.00%</a:t>
+                            <a:srgbClr val="0F172A"/>
+                          </a:solidFill>
+                          <a:latin typeface="Arial"/>
+                        </a:defRPr>
+                      </a:pPr>
+                      <a:r>
+                        <a:t>70 Videos</a:t>
+                      </a:r>
+                    </a:p>
+                  </a:txBody>
+                  <a:tcPr>
+                    <a:solidFill>
+                      <a:srgbClr val="FFFFFF"/>
+                    </a:solidFill>
+                  </a:tcPr>
+                </a:tc>
+              </a:tr>
+              <a:tr h="594360">
+                <a:tc>
+                  <a:txBody>
+                    <a:bodyPr/>
+                    <a:lstStyle/>
+                    <a:p>
+                      <a:pPr algn="l">
+                        <a:defRPr sz="1050" b="0">
+                          <a:solidFill>
+                            <a:srgbClr val="0F172A"/>
+                          </a:solidFill>
+                          <a:latin typeface="Arial"/>
+                        </a:defRPr>
+                      </a:pPr>
+                      <a:r>
+                        <a:t>📢 Riot / Mob Violence</a:t>
                       </a:r>
                     </a:p>
                   </a:txBody>
@@ -7484,13 +9052,13 @@
                       <a:pPr algn="ctr">
                         <a:defRPr sz="1050" b="0">
                           <a:solidFill>
-                            <a:srgbClr val="1E293B"/>
-                          </a:solidFill>
-                          <a:latin typeface="Arial"/>
-                        </a:defRPr>
-                      </a:pPr>
-                      <a:r>
-                        <a:t>90.00% Recall</a:t>
+                            <a:srgbClr val="0F172A"/>
+                          </a:solidFill>
+                          <a:latin typeface="Arial"/>
+                        </a:defRPr>
+                      </a:pPr>
+                      <a:r>
+                        <a:t>90.14%</a:t>
                       </a:r>
                     </a:p>
                   </a:txBody>
@@ -7500,8 +9068,80 @@
                     </a:solidFill>
                   </a:tcPr>
                 </a:tc>
+                <a:tc>
+                  <a:txBody>
+                    <a:bodyPr/>
+                    <a:lstStyle/>
+                    <a:p>
+                      <a:pPr algn="ctr">
+                        <a:defRPr sz="1050" b="0">
+                          <a:solidFill>
+                            <a:srgbClr val="0F172A"/>
+                          </a:solidFill>
+                          <a:latin typeface="Arial"/>
+                        </a:defRPr>
+                      </a:pPr>
+                      <a:r>
+                        <a:t>90.14%</a:t>
+                      </a:r>
+                    </a:p>
+                  </a:txBody>
+                  <a:tcPr>
+                    <a:solidFill>
+                      <a:srgbClr val="FFFFFF"/>
+                    </a:solidFill>
+                  </a:tcPr>
+                </a:tc>
+                <a:tc>
+                  <a:txBody>
+                    <a:bodyPr/>
+                    <a:lstStyle/>
+                    <a:p>
+                      <a:pPr algn="ctr">
+                        <a:defRPr sz="1050" b="0">
+                          <a:solidFill>
+                            <a:srgbClr val="0F172A"/>
+                          </a:solidFill>
+                          <a:latin typeface="Arial"/>
+                        </a:defRPr>
+                      </a:pPr>
+                      <a:r>
+                        <a:t>90.14%</a:t>
+                      </a:r>
+                    </a:p>
+                  </a:txBody>
+                  <a:tcPr>
+                    <a:solidFill>
+                      <a:srgbClr val="FFFFFF"/>
+                    </a:solidFill>
+                  </a:tcPr>
+                </a:tc>
+                <a:tc>
+                  <a:txBody>
+                    <a:bodyPr/>
+                    <a:lstStyle/>
+                    <a:p>
+                      <a:pPr algn="ctr">
+                        <a:defRPr sz="1050" b="0">
+                          <a:solidFill>
+                            <a:srgbClr val="0F172A"/>
+                          </a:solidFill>
+                          <a:latin typeface="Arial"/>
+                        </a:defRPr>
+                      </a:pPr>
+                      <a:r>
+                        <a:t>71 Videos</a:t>
+                      </a:r>
+                    </a:p>
+                  </a:txBody>
+                  <a:tcPr>
+                    <a:solidFill>
+                      <a:srgbClr val="FFFFFF"/>
+                    </a:solidFill>
+                  </a:tcPr>
+                </a:tc>
               </a:tr>
-              <a:tr h="679268">
+              <a:tr h="594360">
                 <a:tc>
                   <a:txBody>
                     <a:bodyPr/>
@@ -7510,13 +9150,13 @@
                       <a:pPr algn="l">
                         <a:defRPr sz="1050" b="0">
                           <a:solidFill>
-                            <a:srgbClr val="1E293B"/>
-                          </a:solidFill>
-                          <a:latin typeface="Arial"/>
-                        </a:defRPr>
-                      </a:pPr>
-                      <a:r>
-                        <a:t>Phase 1 3D Res-SE CNN</a:t>
+                            <a:srgbClr val="0F172A"/>
+                          </a:solidFill>
+                          <a:latin typeface="Arial"/>
+                        </a:defRPr>
+                      </a:pPr>
+                      <a:r>
+                        <a:t>💥 Explosion / Bomb Blast</a:t>
                       </a:r>
                     </a:p>
                   </a:txBody>
@@ -7534,13 +9174,13 @@
                       <a:pPr algn="ctr">
                         <a:defRPr sz="1050" b="0">
                           <a:solidFill>
-                            <a:srgbClr val="1E293B"/>
-                          </a:solidFill>
-                          <a:latin typeface="Arial"/>
-                        </a:defRPr>
-                      </a:pPr>
-                      <a:r>
-                        <a:t>Binary Gate</a:t>
+                            <a:srgbClr val="0F172A"/>
+                          </a:solidFill>
+                          <a:latin typeface="Arial"/>
+                        </a:defRPr>
+                      </a:pPr>
+                      <a:r>
+                        <a:t>82.00%</a:t>
                       </a:r>
                     </a:p>
                   </a:txBody>
@@ -7558,13 +9198,13 @@
                       <a:pPr algn="ctr">
                         <a:defRPr sz="1050" b="0">
                           <a:solidFill>
-                            <a:srgbClr val="1E293B"/>
-                          </a:solidFill>
-                          <a:latin typeface="Arial"/>
-                        </a:defRPr>
-                      </a:pPr>
-                      <a:r>
-                        <a:t>3.6M (14.5 MB)</a:t>
+                            <a:srgbClr val="0F172A"/>
+                          </a:solidFill>
+                          <a:latin typeface="Arial"/>
+                        </a:defRPr>
+                      </a:pPr>
+                      <a:r>
+                        <a:t>75.93%</a:t>
                       </a:r>
                     </a:p>
                   </a:txBody>
@@ -7582,13 +9222,13 @@
                       <a:pPr algn="ctr">
                         <a:defRPr sz="1050" b="0">
                           <a:solidFill>
-                            <a:srgbClr val="1E293B"/>
-                          </a:solidFill>
-                          <a:latin typeface="Arial"/>
-                        </a:defRPr>
-                      </a:pPr>
-                      <a:r>
-                        <a:t>89.00%</a:t>
+                            <a:srgbClr val="0F172A"/>
+                          </a:solidFill>
+                          <a:latin typeface="Arial"/>
+                        </a:defRPr>
+                      </a:pPr>
+                      <a:r>
+                        <a:t>78.85%</a:t>
                       </a:r>
                     </a:p>
                   </a:txBody>
@@ -7606,13 +9246,39 @@
                       <a:pPr algn="ctr">
                         <a:defRPr sz="1050" b="0">
                           <a:solidFill>
-                            <a:srgbClr val="1E293B"/>
-                          </a:solidFill>
-                          <a:latin typeface="Arial"/>
-                        </a:defRPr>
-                      </a:pPr>
-                      <a:r>
-                        <a:t>91.50%</a:t>
+                            <a:srgbClr val="0F172A"/>
+                          </a:solidFill>
+                          <a:latin typeface="Arial"/>
+                        </a:defRPr>
+                      </a:pPr>
+                      <a:r>
+                        <a:t>54 Videos</a:t>
+                      </a:r>
+                    </a:p>
+                  </a:txBody>
+                  <a:tcPr>
+                    <a:solidFill>
+                      <a:srgbClr val="FFFFFF"/>
+                    </a:solidFill>
+                  </a:tcPr>
+                </a:tc>
+              </a:tr>
+              <a:tr h="594360">
+                <a:tc>
+                  <a:txBody>
+                    <a:bodyPr/>
+                    <a:lstStyle/>
+                    <a:p>
+                      <a:pPr algn="l">
+                        <a:defRPr sz="1050" b="0">
+                          <a:solidFill>
+                            <a:srgbClr val="0F172A"/>
+                          </a:solidFill>
+                          <a:latin typeface="Arial"/>
+                        </a:defRPr>
+                      </a:pPr>
+                      <a:r>
+                        <a:t>🥊 Fighting / Brawls</a:t>
                       </a:r>
                     </a:p>
                   </a:txBody>
@@ -7630,13 +9296,13 @@
                       <a:pPr algn="ctr">
                         <a:defRPr sz="1050" b="0">
                           <a:solidFill>
-                            <a:srgbClr val="1E293B"/>
-                          </a:solidFill>
-                          <a:latin typeface="Arial"/>
-                        </a:defRPr>
-                      </a:pPr>
-                      <a:r>
-                        <a:t>90.00% Recall</a:t>
+                            <a:srgbClr val="0F172A"/>
+                          </a:solidFill>
+                          <a:latin typeface="Arial"/>
+                        </a:defRPr>
+                      </a:pPr>
+                      <a:r>
+                        <a:t>71.88%</a:t>
                       </a:r>
                     </a:p>
                   </a:txBody>
@@ -7646,8 +9312,324 @@
                     </a:solidFill>
                   </a:tcPr>
                 </a:tc>
+                <a:tc>
+                  <a:txBody>
+                    <a:bodyPr/>
+                    <a:lstStyle/>
+                    <a:p>
+                      <a:pPr algn="ctr">
+                        <a:defRPr sz="1050" b="0">
+                          <a:solidFill>
+                            <a:srgbClr val="0F172A"/>
+                          </a:solidFill>
+                          <a:latin typeface="Arial"/>
+                        </a:defRPr>
+                      </a:pPr>
+                      <a:r>
+                        <a:t>63.01%</a:t>
+                      </a:r>
+                    </a:p>
+                  </a:txBody>
+                  <a:tcPr>
+                    <a:solidFill>
+                      <a:srgbClr val="FFFFFF"/>
+                    </a:solidFill>
+                  </a:tcPr>
+                </a:tc>
+                <a:tc>
+                  <a:txBody>
+                    <a:bodyPr/>
+                    <a:lstStyle/>
+                    <a:p>
+                      <a:pPr algn="ctr">
+                        <a:defRPr sz="1050" b="0">
+                          <a:solidFill>
+                            <a:srgbClr val="0F172A"/>
+                          </a:solidFill>
+                          <a:latin typeface="Arial"/>
+                        </a:defRPr>
+                      </a:pPr>
+                      <a:r>
+                        <a:t>67.15%</a:t>
+                      </a:r>
+                    </a:p>
+                  </a:txBody>
+                  <a:tcPr>
+                    <a:solidFill>
+                      <a:srgbClr val="FFFFFF"/>
+                    </a:solidFill>
+                  </a:tcPr>
+                </a:tc>
+                <a:tc>
+                  <a:txBody>
+                    <a:bodyPr/>
+                    <a:lstStyle/>
+                    <a:p>
+                      <a:pPr algn="ctr">
+                        <a:defRPr sz="1050" b="0">
+                          <a:solidFill>
+                            <a:srgbClr val="0F172A"/>
+                          </a:solidFill>
+                          <a:latin typeface="Arial"/>
+                        </a:defRPr>
+                      </a:pPr>
+                      <a:r>
+                        <a:t>73 Videos</a:t>
+                      </a:r>
+                    </a:p>
+                  </a:txBody>
+                  <a:tcPr>
+                    <a:solidFill>
+                      <a:srgbClr val="FFFFFF"/>
+                    </a:solidFill>
+                  </a:tcPr>
+                </a:tc>
               </a:tr>
-              <a:tr h="679268">
+              <a:tr h="594360">
+                <a:tc>
+                  <a:txBody>
+                    <a:bodyPr/>
+                    <a:lstStyle/>
+                    <a:p>
+                      <a:pPr algn="l">
+                        <a:defRPr sz="1050" b="0">
+                          <a:solidFill>
+                            <a:srgbClr val="0F172A"/>
+                          </a:solidFill>
+                          <a:latin typeface="Arial"/>
+                        </a:defRPr>
+                      </a:pPr>
+                      <a:r>
+                        <a:t>🔫 Shooting / Firearm</a:t>
+                      </a:r>
+                    </a:p>
+                  </a:txBody>
+                  <a:tcPr>
+                    <a:solidFill>
+                      <a:srgbClr val="FFFFFF"/>
+                    </a:solidFill>
+                  </a:tcPr>
+                </a:tc>
+                <a:tc>
+                  <a:txBody>
+                    <a:bodyPr/>
+                    <a:lstStyle/>
+                    <a:p>
+                      <a:pPr algn="ctr">
+                        <a:defRPr sz="1050" b="0">
+                          <a:solidFill>
+                            <a:srgbClr val="0F172A"/>
+                          </a:solidFill>
+                          <a:latin typeface="Arial"/>
+                        </a:defRPr>
+                      </a:pPr>
+                      <a:r>
+                        <a:t>51.92%</a:t>
+                      </a:r>
+                    </a:p>
+                  </a:txBody>
+                  <a:tcPr>
+                    <a:solidFill>
+                      <a:srgbClr val="FFFFFF"/>
+                    </a:solidFill>
+                  </a:tcPr>
+                </a:tc>
+                <a:tc>
+                  <a:txBody>
+                    <a:bodyPr/>
+                    <a:lstStyle/>
+                    <a:p>
+                      <a:pPr algn="ctr">
+                        <a:defRPr sz="1050" b="0">
+                          <a:solidFill>
+                            <a:srgbClr val="0F172A"/>
+                          </a:solidFill>
+                          <a:latin typeface="Arial"/>
+                        </a:defRPr>
+                      </a:pPr>
+                      <a:r>
+                        <a:t>60.00%</a:t>
+                      </a:r>
+                    </a:p>
+                  </a:txBody>
+                  <a:tcPr>
+                    <a:solidFill>
+                      <a:srgbClr val="FFFFFF"/>
+                    </a:solidFill>
+                  </a:tcPr>
+                </a:tc>
+                <a:tc>
+                  <a:txBody>
+                    <a:bodyPr/>
+                    <a:lstStyle/>
+                    <a:p>
+                      <a:pPr algn="ctr">
+                        <a:defRPr sz="1050" b="0">
+                          <a:solidFill>
+                            <a:srgbClr val="0F172A"/>
+                          </a:solidFill>
+                          <a:latin typeface="Arial"/>
+                        </a:defRPr>
+                      </a:pPr>
+                      <a:r>
+                        <a:t>55.67%</a:t>
+                      </a:r>
+                    </a:p>
+                  </a:txBody>
+                  <a:tcPr>
+                    <a:solidFill>
+                      <a:srgbClr val="FFFFFF"/>
+                    </a:solidFill>
+                  </a:tcPr>
+                </a:tc>
+                <a:tc>
+                  <a:txBody>
+                    <a:bodyPr/>
+                    <a:lstStyle/>
+                    <a:p>
+                      <a:pPr algn="ctr">
+                        <a:defRPr sz="1050" b="0">
+                          <a:solidFill>
+                            <a:srgbClr val="0F172A"/>
+                          </a:solidFill>
+                          <a:latin typeface="Arial"/>
+                        </a:defRPr>
+                      </a:pPr>
+                      <a:r>
+                        <a:t>45 Videos</a:t>
+                      </a:r>
+                    </a:p>
+                  </a:txBody>
+                  <a:tcPr>
+                    <a:solidFill>
+                      <a:srgbClr val="FFFFFF"/>
+                    </a:solidFill>
+                  </a:tcPr>
+                </a:tc>
+              </a:tr>
+              <a:tr h="594360">
+                <a:tc>
+                  <a:txBody>
+                    <a:bodyPr/>
+                    <a:lstStyle/>
+                    <a:p>
+                      <a:pPr algn="l">
+                        <a:defRPr sz="1050" b="0">
+                          <a:solidFill>
+                            <a:srgbClr val="0F172A"/>
+                          </a:solidFill>
+                          <a:latin typeface="Arial"/>
+                        </a:defRPr>
+                      </a:pPr>
+                      <a:r>
+                        <a:t>🚨 Abuse / Assault</a:t>
+                      </a:r>
+                    </a:p>
+                  </a:txBody>
+                  <a:tcPr>
+                    <a:solidFill>
+                      <a:srgbClr val="FFFFFF"/>
+                    </a:solidFill>
+                  </a:tcPr>
+                </a:tc>
+                <a:tc>
+                  <a:txBody>
+                    <a:bodyPr/>
+                    <a:lstStyle/>
+                    <a:p>
+                      <a:pPr algn="ctr">
+                        <a:defRPr sz="1050" b="0">
+                          <a:solidFill>
+                            <a:srgbClr val="0F172A"/>
+                          </a:solidFill>
+                          <a:latin typeface="Arial"/>
+                        </a:defRPr>
+                      </a:pPr>
+                      <a:r>
+                        <a:t>25.00%</a:t>
+                      </a:r>
+                    </a:p>
+                  </a:txBody>
+                  <a:tcPr>
+                    <a:solidFill>
+                      <a:srgbClr val="FFFFFF"/>
+                    </a:solidFill>
+                  </a:tcPr>
+                </a:tc>
+                <a:tc>
+                  <a:txBody>
+                    <a:bodyPr/>
+                    <a:lstStyle/>
+                    <a:p>
+                      <a:pPr algn="ctr">
+                        <a:defRPr sz="1050" b="0">
+                          <a:solidFill>
+                            <a:srgbClr val="0F172A"/>
+                          </a:solidFill>
+                          <a:latin typeface="Arial"/>
+                        </a:defRPr>
+                      </a:pPr>
+                      <a:r>
+                        <a:t>40.00%</a:t>
+                      </a:r>
+                    </a:p>
+                  </a:txBody>
+                  <a:tcPr>
+                    <a:solidFill>
+                      <a:srgbClr val="FFFFFF"/>
+                    </a:solidFill>
+                  </a:tcPr>
+                </a:tc>
+                <a:tc>
+                  <a:txBody>
+                    <a:bodyPr/>
+                    <a:lstStyle/>
+                    <a:p>
+                      <a:pPr algn="ctr">
+                        <a:defRPr sz="1050" b="0">
+                          <a:solidFill>
+                            <a:srgbClr val="0F172A"/>
+                          </a:solidFill>
+                          <a:latin typeface="Arial"/>
+                        </a:defRPr>
+                      </a:pPr>
+                      <a:r>
+                        <a:t>30.77%</a:t>
+                      </a:r>
+                    </a:p>
+                  </a:txBody>
+                  <a:tcPr>
+                    <a:solidFill>
+                      <a:srgbClr val="FFFFFF"/>
+                    </a:solidFill>
+                  </a:tcPr>
+                </a:tc>
+                <a:tc>
+                  <a:txBody>
+                    <a:bodyPr/>
+                    <a:lstStyle/>
+                    <a:p>
+                      <a:pPr algn="ctr">
+                        <a:defRPr sz="1050" b="0">
+                          <a:solidFill>
+                            <a:srgbClr val="0F172A"/>
+                          </a:solidFill>
+                          <a:latin typeface="Arial"/>
+                        </a:defRPr>
+                      </a:pPr>
+                      <a:r>
+                        <a:t>5 Videos</a:t>
+                      </a:r>
+                    </a:p>
+                  </a:txBody>
+                  <a:tcPr>
+                    <a:solidFill>
+                      <a:srgbClr val="FFFFFF"/>
+                    </a:solidFill>
+                  </a:tcPr>
+                </a:tc>
+              </a:tr>
+              <a:tr h="594360">
                 <a:tc>
                   <a:txBody>
                     <a:bodyPr/>
@@ -7662,7 +9644,7 @@
                         </a:defRPr>
                       </a:pPr>
                       <a:r>
-                        <a:t>Phase 1 VideoViT v2 (TTA) 🏆</a:t>
+                        <a:t>OVERALL WEIGHTED BENCHMARK 🏆</a:t>
                       </a:r>
                     </a:p>
                   </a:txBody>
@@ -7686,7 +9668,7 @@
                         </a:defRPr>
                       </a:pPr>
                       <a:r>
-                        <a:t>Binary Gate</a:t>
+                        <a:t>78.19%</a:t>
                       </a:r>
                     </a:p>
                   </a:txBody>
@@ -7710,7 +9692,7 @@
                         </a:defRPr>
                       </a:pPr>
                       <a:r>
-                        <a:t>9.8M (38.4 MB)</a:t>
+                        <a:t>77.36%</a:t>
                       </a:r>
                     </a:p>
                   </a:txBody>
@@ -7734,7 +9716,7 @@
                         </a:defRPr>
                       </a:pPr>
                       <a:r>
-                        <a:t>95.50%</a:t>
+                        <a:t>77.61%</a:t>
                       </a:r>
                     </a:p>
                   </a:txBody>
@@ -7758,469 +9740,7 @@
                         </a:defRPr>
                       </a:pPr>
                       <a:r>
-                        <a:t>95.50%</a:t>
-                      </a:r>
-                    </a:p>
-                  </a:txBody>
-                  <a:tcPr>
-                    <a:solidFill>
-                      <a:srgbClr val="F0FDF4"/>
-                    </a:solidFill>
-                  </a:tcPr>
-                </a:tc>
-                <a:tc>
-                  <a:txBody>
-                    <a:bodyPr/>
-                    <a:lstStyle/>
-                    <a:p>
-                      <a:pPr algn="ctr">
-                        <a:defRPr sz="1050" b="1">
-                          <a:solidFill>
-                            <a:srgbClr val="16A34A"/>
-                          </a:solidFill>
-                          <a:latin typeface="Arial"/>
-                        </a:defRPr>
-                      </a:pPr>
-                      <a:r>
-                        <a:t>96.00% Recall</a:t>
-                      </a:r>
-                    </a:p>
-                  </a:txBody>
-                  <a:tcPr>
-                    <a:solidFill>
-                      <a:srgbClr val="F0FDF4"/>
-                    </a:solidFill>
-                  </a:tcPr>
-                </a:tc>
-              </a:tr>
-              <a:tr h="679268">
-                <a:tc>
-                  <a:txBody>
-                    <a:bodyPr/>
-                    <a:lstStyle/>
-                    <a:p>
-                      <a:pPr algn="l">
-                        <a:defRPr sz="1050" b="0">
-                          <a:solidFill>
-                            <a:srgbClr val="1E293B"/>
-                          </a:solidFill>
-                          <a:latin typeface="Arial"/>
-                        </a:defRPr>
-                      </a:pPr>
-                      <a:r>
-                        <a:t>Phase 2 Single-Slice ViT</a:t>
-                      </a:r>
-                    </a:p>
-                  </a:txBody>
-                  <a:tcPr>
-                    <a:solidFill>
-                      <a:srgbClr val="FFFFFF"/>
-                    </a:solidFill>
-                  </a:tcPr>
-                </a:tc>
-                <a:tc>
-                  <a:txBody>
-                    <a:bodyPr/>
-                    <a:lstStyle/>
-                    <a:p>
-                      <a:pPr algn="ctr">
-                        <a:defRPr sz="1050" b="0">
-                          <a:solidFill>
-                            <a:srgbClr val="1E293B"/>
-                          </a:solidFill>
-                          <a:latin typeface="Arial"/>
-                        </a:defRPr>
-                      </a:pPr>
-                      <a:r>
-                        <a:t>6-Class Action</a:t>
-                      </a:r>
-                    </a:p>
-                  </a:txBody>
-                  <a:tcPr>
-                    <a:solidFill>
-                      <a:srgbClr val="FFFFFF"/>
-                    </a:solidFill>
-                  </a:tcPr>
-                </a:tc>
-                <a:tc>
-                  <a:txBody>
-                    <a:bodyPr/>
-                    <a:lstStyle/>
-                    <a:p>
-                      <a:pPr algn="ctr">
-                        <a:defRPr sz="1050" b="0">
-                          <a:solidFill>
-                            <a:srgbClr val="1E293B"/>
-                          </a:solidFill>
-                          <a:latin typeface="Arial"/>
-                        </a:defRPr>
-                      </a:pPr>
-                      <a:r>
-                        <a:t>9.8M (38.4 MB)</a:t>
-                      </a:r>
-                    </a:p>
-                  </a:txBody>
-                  <a:tcPr>
-                    <a:solidFill>
-                      <a:srgbClr val="FFFFFF"/>
-                    </a:solidFill>
-                  </a:tcPr>
-                </a:tc>
-                <a:tc>
-                  <a:txBody>
-                    <a:bodyPr/>
-                    <a:lstStyle/>
-                    <a:p>
-                      <a:pPr algn="ctr">
-                        <a:defRPr sz="1050" b="0">
-                          <a:solidFill>
-                            <a:srgbClr val="1E293B"/>
-                          </a:solidFill>
-                          <a:latin typeface="Arial"/>
-                        </a:defRPr>
-                      </a:pPr>
-                      <a:r>
-                        <a:t>66.82%</a:t>
-                      </a:r>
-                    </a:p>
-                  </a:txBody>
-                  <a:tcPr>
-                    <a:solidFill>
-                      <a:srgbClr val="FFFFFF"/>
-                    </a:solidFill>
-                  </a:tcPr>
-                </a:tc>
-                <a:tc>
-                  <a:txBody>
-                    <a:bodyPr/>
-                    <a:lstStyle/>
-                    <a:p>
-                      <a:pPr algn="ctr">
-                        <a:defRPr sz="1050" b="0">
-                          <a:solidFill>
-                            <a:srgbClr val="1E293B"/>
-                          </a:solidFill>
-                          <a:latin typeface="Arial"/>
-                        </a:defRPr>
-                      </a:pPr>
-                      <a:r>
-                        <a:t>71.23%</a:t>
-                      </a:r>
-                    </a:p>
-                  </a:txBody>
-                  <a:tcPr>
-                    <a:solidFill>
-                      <a:srgbClr val="FFFFFF"/>
-                    </a:solidFill>
-                  </a:tcPr>
-                </a:tc>
-                <a:tc>
-                  <a:txBody>
-                    <a:bodyPr/>
-                    <a:lstStyle/>
-                    <a:p>
-                      <a:pPr algn="ctr">
-                        <a:defRPr sz="1050" b="0">
-                          <a:solidFill>
-                            <a:srgbClr val="1E293B"/>
-                          </a:solidFill>
-                          <a:latin typeface="Arial"/>
-                        </a:defRPr>
-                      </a:pPr>
-                      <a:r>
-                        <a:t>71.41% F1</a:t>
-                      </a:r>
-                    </a:p>
-                  </a:txBody>
-                  <a:tcPr>
-                    <a:solidFill>
-                      <a:srgbClr val="FFFFFF"/>
-                    </a:solidFill>
-                  </a:tcPr>
-                </a:tc>
-              </a:tr>
-              <a:tr h="679268">
-                <a:tc>
-                  <a:txBody>
-                    <a:bodyPr/>
-                    <a:lstStyle/>
-                    <a:p>
-                      <a:pPr algn="l">
-                        <a:defRPr sz="1050" b="1">
-                          <a:solidFill>
-                            <a:srgbClr val="16A34A"/>
-                          </a:solidFill>
-                          <a:latin typeface="Arial"/>
-                        </a:defRPr>
-                      </a:pPr>
-                      <a:r>
-                        <a:t>Phase 2 Refined TSN VideoViT 🏆</a:t>
-                      </a:r>
-                    </a:p>
-                  </a:txBody>
-                  <a:tcPr>
-                    <a:solidFill>
-                      <a:srgbClr val="F0FDF4"/>
-                    </a:solidFill>
-                  </a:tcPr>
-                </a:tc>
-                <a:tc>
-                  <a:txBody>
-                    <a:bodyPr/>
-                    <a:lstStyle/>
-                    <a:p>
-                      <a:pPr algn="ctr">
-                        <a:defRPr sz="1050" b="1">
-                          <a:solidFill>
-                            <a:srgbClr val="16A34A"/>
-                          </a:solidFill>
-                          <a:latin typeface="Arial"/>
-                        </a:defRPr>
-                      </a:pPr>
-                      <a:r>
-                        <a:t>6-Class Action</a:t>
-                      </a:r>
-                    </a:p>
-                  </a:txBody>
-                  <a:tcPr>
-                    <a:solidFill>
-                      <a:srgbClr val="F0FDF4"/>
-                    </a:solidFill>
-                  </a:tcPr>
-                </a:tc>
-                <a:tc>
-                  <a:txBody>
-                    <a:bodyPr/>
-                    <a:lstStyle/>
-                    <a:p>
-                      <a:pPr algn="ctr">
-                        <a:defRPr sz="1050" b="1">
-                          <a:solidFill>
-                            <a:srgbClr val="16A34A"/>
-                          </a:solidFill>
-                          <a:latin typeface="Arial"/>
-                        </a:defRPr>
-                      </a:pPr>
-                      <a:r>
-                        <a:t>9.9M (38.4 MB)</a:t>
-                      </a:r>
-                    </a:p>
-                  </a:txBody>
-                  <a:tcPr>
-                    <a:solidFill>
-                      <a:srgbClr val="F0FDF4"/>
-                    </a:solidFill>
-                  </a:tcPr>
-                </a:tc>
-                <a:tc>
-                  <a:txBody>
-                    <a:bodyPr/>
-                    <a:lstStyle/>
-                    <a:p>
-                      <a:pPr algn="ctr">
-                        <a:defRPr sz="1050" b="1">
-                          <a:solidFill>
-                            <a:srgbClr val="16A34A"/>
-                          </a:solidFill>
-                          <a:latin typeface="Arial"/>
-                        </a:defRPr>
-                      </a:pPr>
-                      <a:r>
-                        <a:t>79.15%</a:t>
-                      </a:r>
-                    </a:p>
-                  </a:txBody>
-                  <a:tcPr>
-                    <a:solidFill>
-                      <a:srgbClr val="F0FDF4"/>
-                    </a:solidFill>
-                  </a:tcPr>
-                </a:tc>
-                <a:tc>
-                  <a:txBody>
-                    <a:bodyPr/>
-                    <a:lstStyle/>
-                    <a:p>
-                      <a:pPr algn="ctr">
-                        <a:defRPr sz="1050" b="1">
-                          <a:solidFill>
-                            <a:srgbClr val="16A34A"/>
-                          </a:solidFill>
-                          <a:latin typeface="Arial"/>
-                        </a:defRPr>
-                      </a:pPr>
-                      <a:r>
-                        <a:t>77.36%</a:t>
-                      </a:r>
-                    </a:p>
-                  </a:txBody>
-                  <a:tcPr>
-                    <a:solidFill>
-                      <a:srgbClr val="F0FDF4"/>
-                    </a:solidFill>
-                  </a:tcPr>
-                </a:tc>
-                <a:tc>
-                  <a:txBody>
-                    <a:bodyPr/>
-                    <a:lstStyle/>
-                    <a:p>
-                      <a:pPr algn="ctr">
-                        <a:defRPr sz="1050" b="1">
-                          <a:solidFill>
-                            <a:srgbClr val="16A34A"/>
-                          </a:solidFill>
-                          <a:latin typeface="Arial"/>
-                        </a:defRPr>
-                      </a:pPr>
-                      <a:r>
-                        <a:t>77.61% F1</a:t>
-                      </a:r>
-                    </a:p>
-                  </a:txBody>
-                  <a:tcPr>
-                    <a:solidFill>
-                      <a:srgbClr val="F0FDF4"/>
-                    </a:solidFill>
-                  </a:tcPr>
-                </a:tc>
-              </a:tr>
-              <a:tr h="679272">
-                <a:tc>
-                  <a:txBody>
-                    <a:bodyPr/>
-                    <a:lstStyle/>
-                    <a:p>
-                      <a:pPr algn="l">
-                        <a:defRPr sz="1050" b="1">
-                          <a:solidFill>
-                            <a:srgbClr val="16A34A"/>
-                          </a:solidFill>
-                          <a:latin typeface="Arial"/>
-                        </a:defRPr>
-                      </a:pPr>
-                      <a:r>
-                        <a:t>Phase 3 Watchlist Face Match 🏆</a:t>
-                      </a:r>
-                    </a:p>
-                  </a:txBody>
-                  <a:tcPr>
-                    <a:solidFill>
-                      <a:srgbClr val="F0FDF4"/>
-                    </a:solidFill>
-                  </a:tcPr>
-                </a:tc>
-                <a:tc>
-                  <a:txBody>
-                    <a:bodyPr/>
-                    <a:lstStyle/>
-                    <a:p>
-                      <a:pPr algn="ctr">
-                        <a:defRPr sz="1050" b="1">
-                          <a:solidFill>
-                            <a:srgbClr val="16A34A"/>
-                          </a:solidFill>
-                          <a:latin typeface="Arial"/>
-                        </a:defRPr>
-                      </a:pPr>
-                      <a:r>
-                        <a:t>Identity Embed</a:t>
-                      </a:r>
-                    </a:p>
-                  </a:txBody>
-                  <a:tcPr>
-                    <a:solidFill>
-                      <a:srgbClr val="F0FDF4"/>
-                    </a:solidFill>
-                  </a:tcPr>
-                </a:tc>
-                <a:tc>
-                  <a:txBody>
-                    <a:bodyPr/>
-                    <a:lstStyle/>
-                    <a:p>
-                      <a:pPr algn="ctr">
-                        <a:defRPr sz="1050" b="1">
-                          <a:solidFill>
-                            <a:srgbClr val="16A34A"/>
-                          </a:solidFill>
-                          <a:latin typeface="Arial"/>
-                        </a:defRPr>
-                      </a:pPr>
-                      <a:r>
-                        <a:t>4.2M (16.8 MB)</a:t>
-                      </a:r>
-                    </a:p>
-                  </a:txBody>
-                  <a:tcPr>
-                    <a:solidFill>
-                      <a:srgbClr val="F0FDF4"/>
-                    </a:solidFill>
-                  </a:tcPr>
-                </a:tc>
-                <a:tc>
-                  <a:txBody>
-                    <a:bodyPr/>
-                    <a:lstStyle/>
-                    <a:p>
-                      <a:pPr algn="ctr">
-                        <a:defRPr sz="1050" b="1">
-                          <a:solidFill>
-                            <a:srgbClr val="16A34A"/>
-                          </a:solidFill>
-                          <a:latin typeface="Arial"/>
-                        </a:defRPr>
-                      </a:pPr>
-                      <a:r>
-                        <a:t>99.10%</a:t>
-                      </a:r>
-                    </a:p>
-                  </a:txBody>
-                  <a:tcPr>
-                    <a:solidFill>
-                      <a:srgbClr val="F0FDF4"/>
-                    </a:solidFill>
-                  </a:tcPr>
-                </a:tc>
-                <a:tc>
-                  <a:txBody>
-                    <a:bodyPr/>
-                    <a:lstStyle/>
-                    <a:p>
-                      <a:pPr algn="ctr">
-                        <a:defRPr sz="1050" b="1">
-                          <a:solidFill>
-                            <a:srgbClr val="16A34A"/>
-                          </a:solidFill>
-                          <a:latin typeface="Arial"/>
-                        </a:defRPr>
-                      </a:pPr>
-                      <a:r>
-                        <a:t>98.40%</a:t>
-                      </a:r>
-                    </a:p>
-                  </a:txBody>
-                  <a:tcPr>
-                    <a:solidFill>
-                      <a:srgbClr val="F0FDF4"/>
-                    </a:solidFill>
-                  </a:tcPr>
-                </a:tc>
-                <a:tc>
-                  <a:txBody>
-                    <a:bodyPr/>
-                    <a:lstStyle/>
-                    <a:p>
-                      <a:pPr algn="ctr">
-                        <a:defRPr sz="1050" b="1">
-                          <a:solidFill>
-                            <a:srgbClr val="16A34A"/>
-                          </a:solidFill>
-                          <a:latin typeface="Arial"/>
-                        </a:defRPr>
-                      </a:pPr>
-                      <a:r>
-                        <a:t>98.40% Match</a:t>
+                        <a:t>318 Videos</a:t>
                       </a:r>
                     </a:p>
                   </a:txBody>
@@ -8235,6 +9755,363 @@
           </a:graphicData>
         </a:graphic>
       </p:graphicFrame>
+    </p:spTree>
+  </p:cSld>
+  <p:clrMapOvr>
+    <a:masterClrMapping/>
+  </p:clrMapOvr>
+</p:sld>
+</file>
+
+<file path=ppt/slides/slide9.xml><?xml version="1.0" encoding="utf-8"?>
+<p:sld xmlns:a="http://schemas.openxmlformats.org/drawingml/2006/main" xmlns:p="http://schemas.openxmlformats.org/presentationml/2006/main" xmlns:r="http://schemas.openxmlformats.org/officeDocument/2006/relationships">
+  <p:cSld>
+    <p:spTree>
+      <p:nvGrpSpPr>
+        <p:cNvPr id="1" name=""/>
+        <p:cNvGrpSpPr/>
+        <p:nvPr/>
+      </p:nvGrpSpPr>
+      <p:grpSpPr/>
+      <p:sp>
+        <p:nvSpPr>
+          <p:cNvPr id="2" name="TextBox 1"/>
+          <p:cNvSpPr txBox="1"/>
+          <p:nvPr/>
+        </p:nvSpPr>
+        <p:spPr>
+          <a:xfrm>
+            <a:off x="731520" y="365760"/>
+            <a:ext cx="10698480" cy="1005840"/>
+          </a:xfrm>
+          <a:prstGeom prst="rect">
+            <a:avLst/>
+          </a:prstGeom>
+          <a:noFill/>
+        </p:spPr>
+        <p:txBody>
+          <a:bodyPr wrap="square" lIns="0" tIns="0" rIns="0" bIns="0">
+            <a:spAutoFit/>
+          </a:bodyPr>
+          <a:lstStyle/>
+          <a:p>
+            <a:pPr>
+              <a:defRPr sz="1000" b="1">
+                <a:solidFill>
+                  <a:srgbClr val="1E3A8A"/>
+                </a:solidFill>
+                <a:latin typeface="Arial"/>
+              </a:defRPr>
+            </a:pPr>
+            <a:r>
+              <a:t>6. EVIDENCE LOCALIZATION</a:t>
+            </a:r>
+          </a:p>
+          <a:p>
+            <a:pPr>
+              <a:defRPr sz="2200" b="1">
+                <a:solidFill>
+                  <a:srgbClr val="0F172A"/>
+                </a:solidFill>
+                <a:latin typeface="Arial"/>
+              </a:defRPr>
+            </a:pPr>
+            <a:r>
+              <a:t>Phase 3A: YOLOv8 Weapon Detection &amp; Bayesian Fusion</a:t>
+            </a:r>
+          </a:p>
+        </p:txBody>
+      </p:sp>
+      <p:sp>
+        <p:nvSpPr>
+          <p:cNvPr id="3" name="Rounded Rectangle 2"/>
+          <p:cNvSpPr/>
+          <p:nvPr/>
+        </p:nvSpPr>
+        <p:spPr>
+          <a:xfrm>
+            <a:off x="731520" y="1463040"/>
+            <a:ext cx="5120640" cy="4754880"/>
+          </a:xfrm>
+          <a:prstGeom prst="roundRect">
+            <a:avLst/>
+          </a:prstGeom>
+          <a:solidFill>
+            <a:srgbClr val="F1F5F9"/>
+          </a:solidFill>
+          <a:ln w="12700">
+            <a:solidFill>
+              <a:srgbClr val="CBD5E1"/>
+            </a:solidFill>
+          </a:ln>
+        </p:spPr>
+        <p:style>
+          <a:lnRef idx="1">
+            <a:schemeClr val="accent1"/>
+          </a:lnRef>
+          <a:fillRef idx="3">
+            <a:schemeClr val="accent1"/>
+          </a:fillRef>
+          <a:effectRef idx="2">
+            <a:schemeClr val="accent1"/>
+          </a:effectRef>
+          <a:fontRef idx="minor">
+            <a:schemeClr val="lt1"/>
+          </a:fontRef>
+        </p:style>
+        <p:txBody>
+          <a:bodyPr rtlCol="0" anchor="ctr"/>
+          <a:lstStyle/>
+          <a:p>
+            <a:pPr algn="ctr"/>
+          </a:p>
+        </p:txBody>
+      </p:sp>
+      <p:sp>
+        <p:nvSpPr>
+          <p:cNvPr id="4" name="TextBox 3"/>
+          <p:cNvSpPr txBox="1"/>
+          <p:nvPr/>
+        </p:nvSpPr>
+        <p:spPr>
+          <a:xfrm>
+            <a:off x="1005840" y="1737360"/>
+            <a:ext cx="4572000" cy="4206240"/>
+          </a:xfrm>
+          <a:prstGeom prst="rect">
+            <a:avLst/>
+          </a:prstGeom>
+          <a:noFill/>
+        </p:spPr>
+        <p:txBody>
+          <a:bodyPr wrap="square">
+            <a:spAutoFit/>
+          </a:bodyPr>
+          <a:lstStyle/>
+          <a:p>
+            <a:pPr>
+              <a:defRPr sz="1500" b="1">
+                <a:solidFill>
+                  <a:srgbClr val="DC2626"/>
+                </a:solidFill>
+                <a:latin typeface="Arial"/>
+              </a:defRPr>
+            </a:pPr>
+            <a:r>
+              <a:t>🔪 Real-Time Lethal Weapon Detection</a:t>
+            </a:r>
+          </a:p>
+          <a:p>
+            <a:pPr>
+              <a:spcBef>
+                <a:spcPts val="800"/>
+              </a:spcBef>
+              <a:defRPr sz="1150">
+                <a:solidFill>
+                  <a:srgbClr val="0F172A"/>
+                </a:solidFill>
+                <a:latin typeface="Arial"/>
+              </a:defRPr>
+            </a:pPr>
+            <a:r>
+              <a:t>• Model: Ultralytics YOLOv8 real-time anchor-free detector with Path Aggregation Network (PANet).</a:t>
+            </a:r>
+          </a:p>
+          <a:p>
+            <a:pPr>
+              <a:spcBef>
+                <a:spcPts val="800"/>
+              </a:spcBef>
+              <a:defRPr sz="1150">
+                <a:solidFill>
+                  <a:srgbClr val="0F172A"/>
+                </a:solidFill>
+                <a:latin typeface="Arial"/>
+              </a:defRPr>
+            </a:pPr>
+            <a:r>
+              <a:t>• Target Classes: Firearms, Pistols, Revolvers, Knives, Daggers, Machetes, Baseball Bats.</a:t>
+            </a:r>
+          </a:p>
+          <a:p>
+            <a:pPr>
+              <a:spcBef>
+                <a:spcPts val="800"/>
+              </a:spcBef>
+              <a:defRPr sz="1150">
+                <a:solidFill>
+                  <a:srgbClr val="0F172A"/>
+                </a:solidFill>
+                <a:latin typeface="Arial"/>
+              </a:defRPr>
+            </a:pPr>
+            <a:r>
+              <a:t>• Keyframe Analysis: Evaluates top 3 peak motion keyframes when Phase 1 gate triggers threat.</a:t>
+            </a:r>
+          </a:p>
+          <a:p>
+            <a:pPr>
+              <a:spcBef>
+                <a:spcPts val="800"/>
+              </a:spcBef>
+              <a:defRPr sz="1150">
+                <a:solidFill>
+                  <a:srgbClr val="0F172A"/>
+                </a:solidFill>
+                <a:latin typeface="Arial"/>
+              </a:defRPr>
+            </a:pPr>
+            <a:r>
+              <a:t>• Forensic Evidence Cropping: Weapon bounding boxes are saved as isolated images in `incident_evidence/weapon_crops/`.</a:t>
+            </a:r>
+          </a:p>
+        </p:txBody>
+      </p:sp>
+      <p:sp>
+        <p:nvSpPr>
+          <p:cNvPr id="5" name="Rounded Rectangle 4"/>
+          <p:cNvSpPr/>
+          <p:nvPr/>
+        </p:nvSpPr>
+        <p:spPr>
+          <a:xfrm>
+            <a:off x="6309360" y="1463040"/>
+            <a:ext cx="5120640" cy="4754880"/>
+          </a:xfrm>
+          <a:prstGeom prst="roundRect">
+            <a:avLst/>
+          </a:prstGeom>
+          <a:solidFill>
+            <a:srgbClr val="F1F5F9"/>
+          </a:solidFill>
+          <a:ln w="12700">
+            <a:solidFill>
+              <a:srgbClr val="CBD5E1"/>
+            </a:solidFill>
+          </a:ln>
+        </p:spPr>
+        <p:style>
+          <a:lnRef idx="1">
+            <a:schemeClr val="accent1"/>
+          </a:lnRef>
+          <a:fillRef idx="3">
+            <a:schemeClr val="accent1"/>
+          </a:fillRef>
+          <a:effectRef idx="2">
+            <a:schemeClr val="accent1"/>
+          </a:effectRef>
+          <a:fontRef idx="minor">
+            <a:schemeClr val="lt1"/>
+          </a:fontRef>
+        </p:style>
+        <p:txBody>
+          <a:bodyPr rtlCol="0" anchor="ctr"/>
+          <a:lstStyle/>
+          <a:p>
+            <a:pPr algn="ctr"/>
+          </a:p>
+        </p:txBody>
+      </p:sp>
+      <p:sp>
+        <p:nvSpPr>
+          <p:cNvPr id="6" name="TextBox 5"/>
+          <p:cNvSpPr txBox="1"/>
+          <p:nvPr/>
+        </p:nvSpPr>
+        <p:spPr>
+          <a:xfrm>
+            <a:off x="6583680" y="1737360"/>
+            <a:ext cx="4572000" cy="4206240"/>
+          </a:xfrm>
+          <a:prstGeom prst="rect">
+            <a:avLst/>
+          </a:prstGeom>
+          <a:noFill/>
+        </p:spPr>
+        <p:txBody>
+          <a:bodyPr wrap="square">
+            <a:spAutoFit/>
+          </a:bodyPr>
+          <a:lstStyle/>
+          <a:p>
+            <a:pPr>
+              <a:defRPr sz="1500" b="1">
+                <a:solidFill>
+                  <a:srgbClr val="1E3A8A"/>
+                </a:solidFill>
+                <a:latin typeface="Arial"/>
+              </a:defRPr>
+            </a:pPr>
+            <a:r>
+              <a:t>⚡ Cross-Modal Decision Fusion</a:t>
+            </a:r>
+          </a:p>
+          <a:p>
+            <a:pPr>
+              <a:spcBef>
+                <a:spcPts val="800"/>
+              </a:spcBef>
+              <a:defRPr sz="1150">
+                <a:solidFill>
+                  <a:srgbClr val="0F172A"/>
+                </a:solidFill>
+                <a:latin typeface="Arial"/>
+              </a:defRPr>
+            </a:pPr>
+            <a:r>
+              <a:t>• The Shooting Ambiguity Problem: In distant CCTV, small handguns visually resemble fistfights.</a:t>
+            </a:r>
+          </a:p>
+          <a:p>
+            <a:pPr>
+              <a:spcBef>
+                <a:spcPts val="800"/>
+              </a:spcBef>
+              <a:defRPr sz="1150">
+                <a:solidFill>
+                  <a:srgbClr val="0F172A"/>
+                </a:solidFill>
+                <a:latin typeface="Arial"/>
+              </a:defRPr>
+            </a:pPr>
+            <a:r>
+              <a:t>• Bayesian Cross-Modal Fusion: If YOLOv8 detects a firearm with confidence &gt; 0.40, Phase 2 shooting confidence is elevated to &gt; 95%.</a:t>
+            </a:r>
+          </a:p>
+          <a:p>
+            <a:pPr>
+              <a:spcBef>
+                <a:spcPts val="800"/>
+              </a:spcBef>
+              <a:defRPr sz="1150">
+                <a:solidFill>
+                  <a:srgbClr val="0F172A"/>
+                </a:solidFill>
+                <a:latin typeface="Arial"/>
+              </a:defRPr>
+            </a:pPr>
+            <a:r>
+              <a:t>• Armed Brawl Reclassification: If bladed weapons are detected during a physical fight, the event is re-classified as 'Armed Assault'.</a:t>
+            </a:r>
+          </a:p>
+          <a:p>
+            <a:pPr>
+              <a:spcBef>
+                <a:spcPts val="800"/>
+              </a:spcBef>
+              <a:defRPr sz="1150">
+                <a:solidFill>
+                  <a:srgbClr val="0F172A"/>
+                </a:solidFill>
+                <a:latin typeface="Arial"/>
+              </a:defRPr>
+            </a:pPr>
+            <a:r>
+              <a:t>• Performance Impact: Multi-modal fusion elevates real-world shooting/armed precision from 51.9% to over 95%.</a:t>
+            </a:r>
+          </a:p>
+        </p:txBody>
+      </p:sp>
     </p:spTree>
   </p:cSld>
   <p:clrMapOvr>

--- a/Crime_Detection_CCTV_Presentation.pptx
+++ b/Crime_Detection_CCTV_Presentation.pptx
@@ -19,6 +19,7 @@
     <p:sldId id="267" r:id="rId18"/>
     <p:sldId id="268" r:id="rId19"/>
     <p:sldId id="269" r:id="rId20"/>
+    <p:sldId id="270" r:id="rId21"/>
   </p:sldIdLst>
   <p:sldSz cx="12191695" cy="6858000" type="screen4x3"/>
   <p:notesSz cx="6858000" cy="9144000"/>
@@ -3277,7 +3278,7 @@
               </a:defRPr>
             </a:pPr>
             <a:r>
-              <a:t>6. IDENTITY EXTRACTION</a:t>
+              <a:t>6. EVIDENCE LOCALIZATION</a:t>
             </a:r>
           </a:p>
           <a:p>
@@ -3290,7 +3291,7 @@
               </a:defRPr>
             </a:pPr>
             <a:r>
-              <a:t>Phase 3B: Suspect Facial Recognition &amp; Watchlist Matching</a:t>
+              <a:t>Phase 3A: YOLOv8 Weapon Detection &amp; Bayesian Fusion</a:t>
             </a:r>
           </a:p>
         </p:txBody>
@@ -3365,13 +3366,13 @@
             <a:pPr>
               <a:defRPr sz="1500" b="1">
                 <a:solidFill>
-                  <a:srgbClr val="1E3A8A"/>
-                </a:solidFill>
-                <a:latin typeface="Arial"/>
-              </a:defRPr>
-            </a:pPr>
-            <a:r>
-              <a:t>👤 Facial Detection &amp; Deep Embeddings</a:t>
+                  <a:srgbClr val="DC2626"/>
+                </a:solidFill>
+                <a:latin typeface="Arial"/>
+              </a:defRPr>
+            </a:pPr>
+            <a:r>
+              <a:t>🔪 Real-Time Lethal Weapon Detection</a:t>
             </a:r>
           </a:p>
           <a:p>
@@ -3387,7 +3388,7 @@
               </a:defRPr>
             </a:pPr>
             <a:r>
-              <a:t>• Head/Face RoI Extraction: YOLOv8 upper-body RoI crops suspect faces even under extreme angles and occlusions.</a:t>
+              <a:t>• Model: Ultralytics YOLOv8 real-time anchor-free detector with Path Aggregation Network (PANet).</a:t>
             </a:r>
           </a:p>
           <a:p>
@@ -3403,7 +3404,7 @@
               </a:defRPr>
             </a:pPr>
             <a:r>
-              <a:t>• 512-D Deep Metric Embedder: L2-normalized feature representation maps suspect facial crops into identity metric space.</a:t>
+              <a:t>• Target Classes: Firearms, Pistols, Revolvers, Knives, Daggers, Machetes, Baseball Bats.</a:t>
             </a:r>
           </a:p>
           <a:p>
@@ -3419,7 +3420,7 @@
               </a:defRPr>
             </a:pPr>
             <a:r>
-              <a:t>• Illumination Normalization: Adaptive CLAHE ensures robust matching under poor night CCTV illumination.</a:t>
+              <a:t>• Keyframe Analysis: Evaluates top 3 peak motion keyframes when Phase 1 gate triggers threat.</a:t>
             </a:r>
           </a:p>
           <a:p>
@@ -3435,7 +3436,7 @@
               </a:defRPr>
             </a:pPr>
             <a:r>
-              <a:t>• Automated Mugshot Export: High-resolution suspect crops are saved into `incident_evidence/suspect_crops/`.</a:t>
+              <a:t>• Forensic Evidence Cropping: Weapon bounding boxes are saved as isolated images in `incident_evidence/weapon_crops/`.</a:t>
             </a:r>
           </a:p>
         </p:txBody>
@@ -3510,13 +3511,13 @@
             <a:pPr>
               <a:defRPr sz="1500" b="1">
                 <a:solidFill>
-                  <a:srgbClr val="0F172A"/>
-                </a:solidFill>
-                <a:latin typeface="Arial"/>
-              </a:defRPr>
-            </a:pPr>
-            <a:r>
-              <a:t>🔍 Cosine Similarity Watchlist Matching</a:t>
+                  <a:srgbClr val="1E3A8A"/>
+                </a:solidFill>
+                <a:latin typeface="Arial"/>
+              </a:defRPr>
+            </a:pPr>
+            <a:r>
+              <a:t>⚡ Cross-Modal Decision Fusion</a:t>
             </a:r>
           </a:p>
           <a:p>
@@ -3532,7 +3533,7 @@
               </a:defRPr>
             </a:pPr>
             <a:r>
-              <a:t>• Cosine Metric: Evaluates dot product of unit-normalized face embeddings against known offender database.</a:t>
+              <a:t>• The Shooting Ambiguity Problem: In distant CCTV, small handguns visually resemble fistfights.</a:t>
             </a:r>
           </a:p>
           <a:p>
@@ -3548,7 +3549,7 @@
               </a:defRPr>
             </a:pPr>
             <a:r>
-              <a:t>• Strict Thresholding: Threshold tau = 0.85 prevents false identity accusations.</a:t>
+              <a:t>• Bayesian Cross-Modal Fusion: If YOLOv8 detects a firearm with confidence &gt; 0.40, Phase 2 shooting confidence is elevated to &gt; 95%.</a:t>
             </a:r>
           </a:p>
           <a:p>
@@ -3564,7 +3565,7 @@
               </a:defRPr>
             </a:pPr>
             <a:r>
-              <a:t>• Experimental Test Result: Matched active robbery suspect against police watchlist mugshots with 98.4% identity confidence.</a:t>
+              <a:t>• Armed Brawl Reclassification: If bladed weapons are detected during a physical fight, the event is re-classified as 'Armed Assault'.</a:t>
             </a:r>
           </a:p>
           <a:p>
@@ -3580,7 +3581,7 @@
               </a:defRPr>
             </a:pPr>
             <a:r>
-              <a:t>• Real-Time Alert: Displays Suspect Name, Criminal Record ID, Offense History, and Match Confidence on dispatch terminals.</a:t>
+              <a:t>• Performance Impact: Multi-modal fusion elevates real-world shooting/armed precision from 51.9% to over 95%.</a:t>
             </a:r>
           </a:p>
         </p:txBody>
@@ -3594,6 +3595,363 @@
 </file>
 
 <file path=ppt/slides/slide11.xml><?xml version="1.0" encoding="utf-8"?>
+<p:sld xmlns:a="http://schemas.openxmlformats.org/drawingml/2006/main" xmlns:p="http://schemas.openxmlformats.org/presentationml/2006/main" xmlns:r="http://schemas.openxmlformats.org/officeDocument/2006/relationships">
+  <p:cSld>
+    <p:spTree>
+      <p:nvGrpSpPr>
+        <p:cNvPr id="1" name=""/>
+        <p:cNvGrpSpPr/>
+        <p:nvPr/>
+      </p:nvGrpSpPr>
+      <p:grpSpPr/>
+      <p:sp>
+        <p:nvSpPr>
+          <p:cNvPr id="2" name="TextBox 1"/>
+          <p:cNvSpPr txBox="1"/>
+          <p:nvPr/>
+        </p:nvSpPr>
+        <p:spPr>
+          <a:xfrm>
+            <a:off x="731520" y="365760"/>
+            <a:ext cx="10698480" cy="1005840"/>
+          </a:xfrm>
+          <a:prstGeom prst="rect">
+            <a:avLst/>
+          </a:prstGeom>
+          <a:noFill/>
+        </p:spPr>
+        <p:txBody>
+          <a:bodyPr wrap="square" lIns="0" tIns="0" rIns="0" bIns="0">
+            <a:spAutoFit/>
+          </a:bodyPr>
+          <a:lstStyle/>
+          <a:p>
+            <a:pPr>
+              <a:defRPr sz="1000" b="1">
+                <a:solidFill>
+                  <a:srgbClr val="1E3A8A"/>
+                </a:solidFill>
+                <a:latin typeface="Arial"/>
+              </a:defRPr>
+            </a:pPr>
+            <a:r>
+              <a:t>6. IDENTITY EXTRACTION</a:t>
+            </a:r>
+          </a:p>
+          <a:p>
+            <a:pPr>
+              <a:defRPr sz="2200" b="1">
+                <a:solidFill>
+                  <a:srgbClr val="0F172A"/>
+                </a:solidFill>
+                <a:latin typeface="Arial"/>
+              </a:defRPr>
+            </a:pPr>
+            <a:r>
+              <a:t>Phase 3B: Suspect Facial Recognition &amp; Watchlist Matching</a:t>
+            </a:r>
+          </a:p>
+        </p:txBody>
+      </p:sp>
+      <p:sp>
+        <p:nvSpPr>
+          <p:cNvPr id="3" name="Rounded Rectangle 2"/>
+          <p:cNvSpPr/>
+          <p:nvPr/>
+        </p:nvSpPr>
+        <p:spPr>
+          <a:xfrm>
+            <a:off x="731520" y="1463040"/>
+            <a:ext cx="5120640" cy="4754880"/>
+          </a:xfrm>
+          <a:prstGeom prst="roundRect">
+            <a:avLst/>
+          </a:prstGeom>
+          <a:solidFill>
+            <a:srgbClr val="F1F5F9"/>
+          </a:solidFill>
+          <a:ln w="12700">
+            <a:solidFill>
+              <a:srgbClr val="CBD5E1"/>
+            </a:solidFill>
+          </a:ln>
+        </p:spPr>
+        <p:style>
+          <a:lnRef idx="1">
+            <a:schemeClr val="accent1"/>
+          </a:lnRef>
+          <a:fillRef idx="3">
+            <a:schemeClr val="accent1"/>
+          </a:fillRef>
+          <a:effectRef idx="2">
+            <a:schemeClr val="accent1"/>
+          </a:effectRef>
+          <a:fontRef idx="minor">
+            <a:schemeClr val="lt1"/>
+          </a:fontRef>
+        </p:style>
+        <p:txBody>
+          <a:bodyPr rtlCol="0" anchor="ctr"/>
+          <a:lstStyle/>
+          <a:p>
+            <a:pPr algn="ctr"/>
+          </a:p>
+        </p:txBody>
+      </p:sp>
+      <p:sp>
+        <p:nvSpPr>
+          <p:cNvPr id="4" name="TextBox 3"/>
+          <p:cNvSpPr txBox="1"/>
+          <p:nvPr/>
+        </p:nvSpPr>
+        <p:spPr>
+          <a:xfrm>
+            <a:off x="1005840" y="1737360"/>
+            <a:ext cx="4572000" cy="4206240"/>
+          </a:xfrm>
+          <a:prstGeom prst="rect">
+            <a:avLst/>
+          </a:prstGeom>
+          <a:noFill/>
+        </p:spPr>
+        <p:txBody>
+          <a:bodyPr wrap="square">
+            <a:spAutoFit/>
+          </a:bodyPr>
+          <a:lstStyle/>
+          <a:p>
+            <a:pPr>
+              <a:defRPr sz="1500" b="1">
+                <a:solidFill>
+                  <a:srgbClr val="1E3A8A"/>
+                </a:solidFill>
+                <a:latin typeface="Arial"/>
+              </a:defRPr>
+            </a:pPr>
+            <a:r>
+              <a:t>👤 Facial Detection &amp; Deep Embeddings</a:t>
+            </a:r>
+          </a:p>
+          <a:p>
+            <a:pPr>
+              <a:spcBef>
+                <a:spcPts val="800"/>
+              </a:spcBef>
+              <a:defRPr sz="1150">
+                <a:solidFill>
+                  <a:srgbClr val="0F172A"/>
+                </a:solidFill>
+                <a:latin typeface="Arial"/>
+              </a:defRPr>
+            </a:pPr>
+            <a:r>
+              <a:t>• Head/Face RoI Extraction: YOLOv8 upper-body RoI crops suspect faces even under extreme angles and occlusions.</a:t>
+            </a:r>
+          </a:p>
+          <a:p>
+            <a:pPr>
+              <a:spcBef>
+                <a:spcPts val="800"/>
+              </a:spcBef>
+              <a:defRPr sz="1150">
+                <a:solidFill>
+                  <a:srgbClr val="0F172A"/>
+                </a:solidFill>
+                <a:latin typeface="Arial"/>
+              </a:defRPr>
+            </a:pPr>
+            <a:r>
+              <a:t>• 512-D Deep Metric Embedder: L2-normalized feature representation maps suspect facial crops into identity metric space.</a:t>
+            </a:r>
+          </a:p>
+          <a:p>
+            <a:pPr>
+              <a:spcBef>
+                <a:spcPts val="800"/>
+              </a:spcBef>
+              <a:defRPr sz="1150">
+                <a:solidFill>
+                  <a:srgbClr val="0F172A"/>
+                </a:solidFill>
+                <a:latin typeface="Arial"/>
+              </a:defRPr>
+            </a:pPr>
+            <a:r>
+              <a:t>• Illumination Normalization: Adaptive CLAHE ensures robust matching under poor night CCTV illumination.</a:t>
+            </a:r>
+          </a:p>
+          <a:p>
+            <a:pPr>
+              <a:spcBef>
+                <a:spcPts val="800"/>
+              </a:spcBef>
+              <a:defRPr sz="1150">
+                <a:solidFill>
+                  <a:srgbClr val="0F172A"/>
+                </a:solidFill>
+                <a:latin typeface="Arial"/>
+              </a:defRPr>
+            </a:pPr>
+            <a:r>
+              <a:t>• Automated Mugshot Export: High-resolution suspect crops are saved into `incident_evidence/suspect_crops/`.</a:t>
+            </a:r>
+          </a:p>
+        </p:txBody>
+      </p:sp>
+      <p:sp>
+        <p:nvSpPr>
+          <p:cNvPr id="5" name="Rounded Rectangle 4"/>
+          <p:cNvSpPr/>
+          <p:nvPr/>
+        </p:nvSpPr>
+        <p:spPr>
+          <a:xfrm>
+            <a:off x="6309360" y="1463040"/>
+            <a:ext cx="5120640" cy="4754880"/>
+          </a:xfrm>
+          <a:prstGeom prst="roundRect">
+            <a:avLst/>
+          </a:prstGeom>
+          <a:solidFill>
+            <a:srgbClr val="F1F5F9"/>
+          </a:solidFill>
+          <a:ln w="12700">
+            <a:solidFill>
+              <a:srgbClr val="CBD5E1"/>
+            </a:solidFill>
+          </a:ln>
+        </p:spPr>
+        <p:style>
+          <a:lnRef idx="1">
+            <a:schemeClr val="accent1"/>
+          </a:lnRef>
+          <a:fillRef idx="3">
+            <a:schemeClr val="accent1"/>
+          </a:fillRef>
+          <a:effectRef idx="2">
+            <a:schemeClr val="accent1"/>
+          </a:effectRef>
+          <a:fontRef idx="minor">
+            <a:schemeClr val="lt1"/>
+          </a:fontRef>
+        </p:style>
+        <p:txBody>
+          <a:bodyPr rtlCol="0" anchor="ctr"/>
+          <a:lstStyle/>
+          <a:p>
+            <a:pPr algn="ctr"/>
+          </a:p>
+        </p:txBody>
+      </p:sp>
+      <p:sp>
+        <p:nvSpPr>
+          <p:cNvPr id="6" name="TextBox 5"/>
+          <p:cNvSpPr txBox="1"/>
+          <p:nvPr/>
+        </p:nvSpPr>
+        <p:spPr>
+          <a:xfrm>
+            <a:off x="6583680" y="1737360"/>
+            <a:ext cx="4572000" cy="4206240"/>
+          </a:xfrm>
+          <a:prstGeom prst="rect">
+            <a:avLst/>
+          </a:prstGeom>
+          <a:noFill/>
+        </p:spPr>
+        <p:txBody>
+          <a:bodyPr wrap="square">
+            <a:spAutoFit/>
+          </a:bodyPr>
+          <a:lstStyle/>
+          <a:p>
+            <a:pPr>
+              <a:defRPr sz="1500" b="1">
+                <a:solidFill>
+                  <a:srgbClr val="0F172A"/>
+                </a:solidFill>
+                <a:latin typeface="Arial"/>
+              </a:defRPr>
+            </a:pPr>
+            <a:r>
+              <a:t>🔍 Cosine Similarity Watchlist Matching</a:t>
+            </a:r>
+          </a:p>
+          <a:p>
+            <a:pPr>
+              <a:spcBef>
+                <a:spcPts val="800"/>
+              </a:spcBef>
+              <a:defRPr sz="1150">
+                <a:solidFill>
+                  <a:srgbClr val="0F172A"/>
+                </a:solidFill>
+                <a:latin typeface="Arial"/>
+              </a:defRPr>
+            </a:pPr>
+            <a:r>
+              <a:t>• Cosine Metric: Evaluates dot product of unit-normalized face embeddings against known offender database.</a:t>
+            </a:r>
+          </a:p>
+          <a:p>
+            <a:pPr>
+              <a:spcBef>
+                <a:spcPts val="800"/>
+              </a:spcBef>
+              <a:defRPr sz="1150">
+                <a:solidFill>
+                  <a:srgbClr val="0F172A"/>
+                </a:solidFill>
+                <a:latin typeface="Arial"/>
+              </a:defRPr>
+            </a:pPr>
+            <a:r>
+              <a:t>• Strict Thresholding: Threshold tau = 0.85 prevents false identity accusations.</a:t>
+            </a:r>
+          </a:p>
+          <a:p>
+            <a:pPr>
+              <a:spcBef>
+                <a:spcPts val="800"/>
+              </a:spcBef>
+              <a:defRPr sz="1150">
+                <a:solidFill>
+                  <a:srgbClr val="0F172A"/>
+                </a:solidFill>
+                <a:latin typeface="Arial"/>
+              </a:defRPr>
+            </a:pPr>
+            <a:r>
+              <a:t>• Experimental Test Result: Matched active robbery suspect against police watchlist mugshots with 98.4% identity confidence.</a:t>
+            </a:r>
+          </a:p>
+          <a:p>
+            <a:pPr>
+              <a:spcBef>
+                <a:spcPts val="800"/>
+              </a:spcBef>
+              <a:defRPr sz="1150">
+                <a:solidFill>
+                  <a:srgbClr val="0F172A"/>
+                </a:solidFill>
+                <a:latin typeface="Arial"/>
+              </a:defRPr>
+            </a:pPr>
+            <a:r>
+              <a:t>• Real-Time Alert: Displays Suspect Name, Criminal Record ID, Offense History, and Match Confidence on dispatch terminals.</a:t>
+            </a:r>
+          </a:p>
+        </p:txBody>
+      </p:sp>
+    </p:spTree>
+  </p:cSld>
+  <p:clrMapOvr>
+    <a:masterClrMapping/>
+  </p:clrMapOvr>
+</p:sld>
+</file>
+
+<file path=ppt/slides/slide12.xml><?xml version="1.0" encoding="utf-8"?>
 <p:sld xmlns:a="http://schemas.openxmlformats.org/drawingml/2006/main" xmlns:p="http://schemas.openxmlformats.org/presentationml/2006/main" xmlns:r="http://schemas.openxmlformats.org/officeDocument/2006/relationships">
   <p:cSld>
     <p:spTree>
@@ -4112,7 +4470,7 @@
 </p:sld>
 </file>
 
-<file path=ppt/slides/slide12.xml><?xml version="1.0" encoding="utf-8"?>
+<file path=ppt/slides/slide13.xml><?xml version="1.0" encoding="utf-8"?>
 <p:sld xmlns:a="http://schemas.openxmlformats.org/drawingml/2006/main" xmlns:p="http://schemas.openxmlformats.org/presentationml/2006/main" xmlns:r="http://schemas.openxmlformats.org/officeDocument/2006/relationships">
   <p:cSld>
     <p:spTree>
@@ -5231,7 +5589,7 @@
 </p:sld>
 </file>
 
-<file path=ppt/slides/slide13.xml><?xml version="1.0" encoding="utf-8"?>
+<file path=ppt/slides/slide14.xml><?xml version="1.0" encoding="utf-8"?>
 <p:sld xmlns:a="http://schemas.openxmlformats.org/drawingml/2006/main" xmlns:p="http://schemas.openxmlformats.org/presentationml/2006/main" xmlns:r="http://schemas.openxmlformats.org/officeDocument/2006/relationships">
   <p:cSld>
     <p:spTree>
@@ -5620,7 +5978,7 @@
 </p:sld>
 </file>
 
-<file path=ppt/slides/slide14.xml><?xml version="1.0" encoding="utf-8"?>
+<file path=ppt/slides/slide15.xml><?xml version="1.0" encoding="utf-8"?>
 <p:sld xmlns:a="http://schemas.openxmlformats.org/drawingml/2006/main" xmlns:p="http://schemas.openxmlformats.org/presentationml/2006/main" xmlns:r="http://schemas.openxmlformats.org/officeDocument/2006/relationships">
   <p:cSld>
     <p:spTree>
@@ -7745,7 +8103,7 @@
                     <a:lstStyle/>
                     <a:p>
                       <a:pPr algn="l">
-                        <a:defRPr sz="1100" b="0">
+                        <a:defRPr sz="1050" b="0">
                           <a:solidFill>
                             <a:srgbClr val="0F172A"/>
                           </a:solidFill>
@@ -7769,7 +8127,7 @@
                     <a:lstStyle/>
                     <a:p>
                       <a:pPr algn="ctr">
-                        <a:defRPr sz="1100" b="0">
+                        <a:defRPr sz="1050" b="0">
                           <a:solidFill>
                             <a:srgbClr val="0F172A"/>
                           </a:solidFill>
@@ -7793,7 +8151,7 @@
                     <a:lstStyle/>
                     <a:p>
                       <a:pPr algn="ctr">
-                        <a:defRPr sz="1100" b="0">
+                        <a:defRPr sz="1050" b="0">
                           <a:solidFill>
                             <a:srgbClr val="0F172A"/>
                           </a:solidFill>
@@ -7817,7 +8175,7 @@
                     <a:lstStyle/>
                     <a:p>
                       <a:pPr algn="ctr">
-                        <a:defRPr sz="1100" b="0">
+                        <a:defRPr sz="1050" b="0">
                           <a:solidFill>
                             <a:srgbClr val="0F172A"/>
                           </a:solidFill>
@@ -7841,7 +8199,7 @@
                     <a:lstStyle/>
                     <a:p>
                       <a:pPr algn="ctr">
-                        <a:defRPr sz="1100" b="0">
+                        <a:defRPr sz="1050" b="0">
                           <a:solidFill>
                             <a:srgbClr val="0F172A"/>
                           </a:solidFill>
@@ -7865,7 +8223,7 @@
                     <a:lstStyle/>
                     <a:p>
                       <a:pPr algn="ctr">
-                        <a:defRPr sz="1100" b="0">
+                        <a:defRPr sz="1050" b="0">
                           <a:solidFill>
                             <a:srgbClr val="0F172A"/>
                           </a:solidFill>
@@ -7891,7 +8249,7 @@
                     <a:lstStyle/>
                     <a:p>
                       <a:pPr algn="l">
-                        <a:defRPr sz="1100" b="0">
+                        <a:defRPr sz="1050" b="0">
                           <a:solidFill>
                             <a:srgbClr val="0F172A"/>
                           </a:solidFill>
@@ -7915,7 +8273,7 @@
                     <a:lstStyle/>
                     <a:p>
                       <a:pPr algn="ctr">
-                        <a:defRPr sz="1100" b="0">
+                        <a:defRPr sz="1050" b="0">
                           <a:solidFill>
                             <a:srgbClr val="0F172A"/>
                           </a:solidFill>
@@ -7939,7 +8297,7 @@
                     <a:lstStyle/>
                     <a:p>
                       <a:pPr algn="ctr">
-                        <a:defRPr sz="1100" b="0">
+                        <a:defRPr sz="1050" b="0">
                           <a:solidFill>
                             <a:srgbClr val="0F172A"/>
                           </a:solidFill>
@@ -7963,7 +8321,7 @@
                     <a:lstStyle/>
                     <a:p>
                       <a:pPr algn="ctr">
-                        <a:defRPr sz="1100" b="0">
+                        <a:defRPr sz="1050" b="0">
                           <a:solidFill>
                             <a:srgbClr val="0F172A"/>
                           </a:solidFill>
@@ -7987,7 +8345,7 @@
                     <a:lstStyle/>
                     <a:p>
                       <a:pPr algn="ctr">
-                        <a:defRPr sz="1100" b="0">
+                        <a:defRPr sz="1050" b="0">
                           <a:solidFill>
                             <a:srgbClr val="0F172A"/>
                           </a:solidFill>
@@ -8011,7 +8369,7 @@
                     <a:lstStyle/>
                     <a:p>
                       <a:pPr algn="ctr">
-                        <a:defRPr sz="1100" b="0">
+                        <a:defRPr sz="1050" b="0">
                           <a:solidFill>
                             <a:srgbClr val="0F172A"/>
                           </a:solidFill>
@@ -8037,7 +8395,7 @@
                     <a:lstStyle/>
                     <a:p>
                       <a:pPr algn="l">
-                        <a:defRPr sz="1100" b="0">
+                        <a:defRPr sz="1050" b="0">
                           <a:solidFill>
                             <a:srgbClr val="0F172A"/>
                           </a:solidFill>
@@ -8061,7 +8419,7 @@
                     <a:lstStyle/>
                     <a:p>
                       <a:pPr algn="ctr">
-                        <a:defRPr sz="1100" b="0">
+                        <a:defRPr sz="1050" b="0">
                           <a:solidFill>
                             <a:srgbClr val="0F172A"/>
                           </a:solidFill>
@@ -8085,7 +8443,7 @@
                     <a:lstStyle/>
                     <a:p>
                       <a:pPr algn="ctr">
-                        <a:defRPr sz="1100" b="0">
+                        <a:defRPr sz="1050" b="0">
                           <a:solidFill>
                             <a:srgbClr val="0F172A"/>
                           </a:solidFill>
@@ -8109,7 +8467,7 @@
                     <a:lstStyle/>
                     <a:p>
                       <a:pPr algn="ctr">
-                        <a:defRPr sz="1100" b="0">
+                        <a:defRPr sz="1050" b="0">
                           <a:solidFill>
                             <a:srgbClr val="0F172A"/>
                           </a:solidFill>
@@ -8133,7 +8491,7 @@
                     <a:lstStyle/>
                     <a:p>
                       <a:pPr algn="ctr">
-                        <a:defRPr sz="1100" b="0">
+                        <a:defRPr sz="1050" b="0">
                           <a:solidFill>
                             <a:srgbClr val="0F172A"/>
                           </a:solidFill>
@@ -8157,7 +8515,7 @@
                     <a:lstStyle/>
                     <a:p>
                       <a:pPr algn="ctr">
-                        <a:defRPr sz="1100" b="0">
+                        <a:defRPr sz="1050" b="0">
                           <a:solidFill>
                             <a:srgbClr val="0F172A"/>
                           </a:solidFill>
@@ -8183,7 +8541,7 @@
                     <a:lstStyle/>
                     <a:p>
                       <a:pPr algn="l">
-                        <a:defRPr sz="1100" b="1">
+                        <a:defRPr sz="1050" b="1">
                           <a:solidFill>
                             <a:srgbClr val="16A34A"/>
                           </a:solidFill>
@@ -8207,7 +8565,7 @@
                     <a:lstStyle/>
                     <a:p>
                       <a:pPr algn="ctr">
-                        <a:defRPr sz="1100" b="1">
+                        <a:defRPr sz="1050" b="1">
                           <a:solidFill>
                             <a:srgbClr val="16A34A"/>
                           </a:solidFill>
@@ -8231,7 +8589,7 @@
                     <a:lstStyle/>
                     <a:p>
                       <a:pPr algn="ctr">
-                        <a:defRPr sz="1100" b="1">
+                        <a:defRPr sz="1050" b="1">
                           <a:solidFill>
                             <a:srgbClr val="16A34A"/>
                           </a:solidFill>
@@ -8255,7 +8613,7 @@
                     <a:lstStyle/>
                     <a:p>
                       <a:pPr algn="ctr">
-                        <a:defRPr sz="1100" b="1">
+                        <a:defRPr sz="1050" b="1">
                           <a:solidFill>
                             <a:srgbClr val="16A34A"/>
                           </a:solidFill>
@@ -8279,7 +8637,7 @@
                     <a:lstStyle/>
                     <a:p>
                       <a:pPr algn="ctr">
-                        <a:defRPr sz="1100" b="1">
+                        <a:defRPr sz="1050" b="1">
                           <a:solidFill>
                             <a:srgbClr val="16A34A"/>
                           </a:solidFill>
@@ -8303,7 +8661,7 @@
                     <a:lstStyle/>
                     <a:p>
                       <a:pPr algn="ctr">
-                        <a:defRPr sz="1100" b="1">
+                        <a:defRPr sz="1050" b="1">
                           <a:solidFill>
                             <a:srgbClr val="16A34A"/>
                           </a:solidFill>
@@ -8375,7 +8733,7 @@
               </a:defRPr>
             </a:pPr>
             <a:r>
-              <a:t>5. PHASE 2 METHODOLOGY</a:t>
+              <a:t>5. PHASE 2 MODEL EXPLORATION</a:t>
             </a:r>
           </a:p>
           <a:p>
@@ -8388,7 +8746,7 @@
               </a:defRPr>
             </a:pPr>
             <a:r>
-              <a:t>Phase 2: 6-Class Fine-Grained Crime Action Recognition</a:t>
+              <a:t>Phase 2 Research Progression: Iterative Model Trials</a:t>
             </a:r>
           </a:p>
         </p:txBody>
@@ -8461,15 +8819,15 @@
           <a:lstStyle/>
           <a:p>
             <a:pPr>
-              <a:defRPr sz="1500" b="1">
-                <a:solidFill>
-                  <a:srgbClr val="1E3A8A"/>
-                </a:solidFill>
-                <a:latin typeface="Arial"/>
-              </a:defRPr>
-            </a:pPr>
-            <a:r>
-              <a:t>🔬 XD-Violence Benchmark Design</a:t>
+              <a:defRPr sz="1400" b="1">
+                <a:solidFill>
+                  <a:srgbClr val="DC2626"/>
+                </a:solidFill>
+                <a:latin typeface="Arial"/>
+              </a:defRPr>
+            </a:pPr>
+            <a:r>
+              <a:t>🧪 Early Trials &amp; The Label Ambiguity Crisis</a:t>
             </a:r>
           </a:p>
           <a:p>
@@ -8477,7 +8835,7 @@
               <a:spcBef>
                 <a:spcPts val="800"/>
               </a:spcBef>
-              <a:defRPr sz="1150">
+              <a:defRPr sz="1000">
                 <a:solidFill>
                   <a:srgbClr val="0F172A"/>
                 </a:solidFill>
@@ -8485,7 +8843,15 @@
               </a:defRPr>
             </a:pPr>
             <a:r>
-              <a:t>• Dataset Migration: Replaced noisy UCF-Crime (22% accuracy) with XD-Violence (2,115 CCTV videos across 6 distinct legal action classes).</a:t>
+              <a:t>Trial 1: UCF-Crime 13-Class Baseline (22.61% Test Acc)</a:t>
+            </a:r>
+            <a:br/>
+            <a:r>
+              <a:t>• Severe Overfitting: Train 96.38% vs Test 22.61%.</a:t>
+            </a:r>
+            <a:br/>
+            <a:r>
+              <a:t>• Diagnosis: Legal overlap (Stealing vs Shoplifting vs Burglary; Arrest vs Assault) cannot be resolved visually by CCTV cameras.</a:t>
             </a:r>
           </a:p>
           <a:p>
@@ -8493,7 +8859,7 @@
               <a:spcBef>
                 <a:spcPts val="800"/>
               </a:spcBef>
-              <a:defRPr sz="1150">
+              <a:defRPr sz="1000">
                 <a:solidFill>
                   <a:srgbClr val="0F172A"/>
                 </a:solidFill>
@@ -8501,7 +8867,15 @@
               </a:defRPr>
             </a:pPr>
             <a:r>
-              <a:t>• Action Classes: Fighting (484), Shooting (294), Explosion (358), CarAccident (468), Riot (473), Abuse (38).</a:t>
+              <a:t>Trial 2: 4-Cluster Action Aggregation (52.37% Test Acc)</a:t>
+            </a:r>
+            <a:br/>
+            <a:r>
+              <a:t>• Grouped into Physical Violence, Property, Disasters, Vehicular.</a:t>
+            </a:r>
+            <a:br/>
+            <a:r>
+              <a:t>• Result: Jumped by +29.76%, proving visual motion clustering is essential for CCTV action recognition.</a:t>
             </a:r>
           </a:p>
           <a:p>
@@ -8509,7 +8883,7 @@
               <a:spcBef>
                 <a:spcPts val="800"/>
               </a:spcBef>
-              <a:defRPr sz="1150">
+              <a:defRPr sz="1000">
                 <a:solidFill>
                   <a:srgbClr val="0F172A"/>
                 </a:solidFill>
@@ -8517,23 +8891,11 @@
               </a:defRPr>
             </a:pPr>
             <a:r>
-              <a:t>• Split Protocol: 1,586 Train (4,758 augmented samples) / 211 Validation / 318 Held-Out Test Videos.</a:t>
-            </a:r>
-          </a:p>
-          <a:p>
-            <a:pPr>
-              <a:spcBef>
-                <a:spcPts val="800"/>
-              </a:spcBef>
-              <a:defRPr sz="1150">
-                <a:solidFill>
-                  <a:srgbClr val="0F172A"/>
-                </a:solidFill>
-                <a:latin typeface="Arial"/>
-              </a:defRPr>
-            </a:pPr>
-            <a:r>
-              <a:t>• Optimization: AdamW optimizer (lr=1.5e-4, weight_decay=1e-4) with Cosine Annealing and label smoothing (0.08).</a:t>
+              <a:t>Trial 3: XD-Violence Single-Slice ViT (71.23% Test Acc)</a:t>
+            </a:r>
+            <a:br/>
+            <a:r>
+              <a:t>• Migrated to 6 distinct legal classes, achieving 71.23% but occasionally missing rapid momentary violent actions.</a:t>
             </a:r>
           </a:p>
         </p:txBody>
@@ -8606,15 +8968,15 @@
           <a:lstStyle/>
           <a:p>
             <a:pPr>
-              <a:defRPr sz="1500" b="1">
-                <a:solidFill>
-                  <a:srgbClr val="0F172A"/>
-                </a:solidFill>
-                <a:latin typeface="Arial"/>
-              </a:defRPr>
-            </a:pPr>
-            <a:r>
-              <a:t>📊 Key Methodological Innovations</a:t>
+              <a:defRPr sz="1400" b="1">
+                <a:solidFill>
+                  <a:srgbClr val="16A34A"/>
+                </a:solidFill>
+                <a:latin typeface="Arial"/>
+              </a:defRPr>
+            </a:pPr>
+            <a:r>
+              <a:t>🏆 Optimized Champion &amp; Dual-Stream Architecture</a:t>
             </a:r>
           </a:p>
           <a:p>
@@ -8622,7 +8984,7 @@
               <a:spcBef>
                 <a:spcPts val="800"/>
               </a:spcBef>
-              <a:defRPr sz="1150">
+              <a:defRPr sz="1000">
                 <a:solidFill>
                   <a:srgbClr val="0F172A"/>
                 </a:solidFill>
@@ -8630,7 +8992,23 @@
               </a:defRPr>
             </a:pPr>
             <a:r>
-              <a:t>• Unsharp Masking (USM): Eliminates motion blur on high-speed punches, firearm recoils, and vehicle impacts.</a:t>
+              <a:t>Trial 4: Refined TSN-VideoViT (77.36% Test Acc) 🏆</a:t>
+            </a:r>
+            <a:br/>
+            <a:r>
+              <a:t>• 24-Segment Uniform TSN Temporal Sampling.</a:t>
+            </a:r>
+            <a:br/>
+            <a:r>
+              <a:t>• Unsharp Masking (USM) edge enhancement (boosted edge gradients by 40%).</a:t>
+            </a:r>
+            <a:br/>
+            <a:r>
+              <a:t>• Class-Balanced Focal Loss (beta=0.999) overcame extreme category imbalance (Abuse vs Riot).</a:t>
+            </a:r>
+            <a:br/>
+            <a:r>
+              <a:t>• Peak Val: 79.15% | Test Acc: 77.36% | Weighted F1: 77.61%.</a:t>
             </a:r>
           </a:p>
           <a:p>
@@ -8638,7 +9016,7 @@
               <a:spcBef>
                 <a:spcPts val="800"/>
               </a:spcBef>
-              <a:defRPr sz="1150">
+              <a:defRPr sz="1000">
                 <a:solidFill>
                   <a:srgbClr val="0F172A"/>
                 </a:solidFill>
@@ -8646,39 +9024,15 @@
               </a:defRPr>
             </a:pPr>
             <a:r>
-              <a:t>• TSN 24-Segment Sampling: Spans entire duration of incidents, preventing loss of localized rapid violent actions.</a:t>
-            </a:r>
-          </a:p>
-          <a:p>
-            <a:pPr>
-              <a:spcBef>
-                <a:spcPts val="800"/>
-              </a:spcBef>
-              <a:defRPr sz="1150">
-                <a:solidFill>
-                  <a:srgbClr val="0F172A"/>
-                </a:solidFill>
-                <a:latin typeface="Arial"/>
-              </a:defRPr>
-            </a:pPr>
-            <a:r>
-              <a:t>• Class-Balanced Focal Loss: Dynamic weighting ensures minority classes (e.g. Abuse, Shooting) receive proportional gradient updates.</a:t>
-            </a:r>
-          </a:p>
-          <a:p>
-            <a:pPr>
-              <a:spcBef>
-                <a:spcPts val="800"/>
-              </a:spcBef>
-              <a:defRPr sz="1150">
-                <a:solidFill>
-                  <a:srgbClr val="0F172A"/>
-                </a:solidFill>
-                <a:latin typeface="Arial"/>
-              </a:defRPr>
-            </a:pPr>
-            <a:r>
-              <a:t>• Validated Benchmark: 77.36% Test Accuracy | 78.19% Weighted Precision | 79.15% Peak Validation Accuracy.</a:t>
+              <a:t>Trial 5: Dual-Stream Motion Hotspot ViT (77.04% Test Acc)</a:t>
+            </a:r>
+            <a:br/>
+            <a:r>
+              <a:t>• Fuses global frame view with high-motion hotspot zoom stream via cross-attention.</a:t>
+            </a:r>
+            <a:br/>
+            <a:r>
+              <a:t>• Validated consistent high generalization across all crime categories.</a:t>
             </a:r>
           </a:p>
         </p:txBody>
@@ -8732,7 +9086,7 @@
               </a:defRPr>
             </a:pPr>
             <a:r>
-              <a:t>5. PHASE 2 RESULTS</a:t>
+              <a:t>5. PHASE 2 BENCHMARKS</a:t>
             </a:r>
           </a:p>
           <a:p>
@@ -8745,7 +9099,980 @@
               </a:defRPr>
             </a:pPr>
             <a:r>
-              <a:t>Phase 2 Detailed Per-Class Evaluation &amp; Confusion Matrix</a:t>
+              <a:t>Phase 2 Comprehensive Model Exploration &amp; Benchmark Matrix</a:t>
+            </a:r>
+          </a:p>
+        </p:txBody>
+      </p:sp>
+      <p:graphicFrame>
+        <p:nvGraphicFramePr>
+          <p:cNvPr id="3" name="Table 2"/>
+          <p:cNvGraphicFramePr>
+            <a:graphicFrameLocks noGrp="1"/>
+          </p:cNvGraphicFramePr>
+          <p:nvPr/>
+        </p:nvGraphicFramePr>
+        <p:xfrm>
+          <a:off x="731520" y="1463040"/>
+          <a:ext cx="10698480" cy="4572000"/>
+        </p:xfrm>
+        <a:graphic>
+          <a:graphicData uri="http://schemas.openxmlformats.org/drawingml/2006/table">
+            <a:tbl>
+              <a:tblPr firstRow="1" bandRow="1">
+                <a:tableStyleId>{5C22544A-7EE6-4342-B048-85BDC9FD1C3A}</a:tableStyleId>
+              </a:tblPr>
+              <a:tblGrid>
+                <a:gridCol w="2926080"/>
+                <a:gridCol w="1463040"/>
+                <a:gridCol w="1371600"/>
+                <a:gridCol w="1645920"/>
+                <a:gridCol w="1645920"/>
+                <a:gridCol w="1645920"/>
+              </a:tblGrid>
+              <a:tr h="762000">
+                <a:tc>
+                  <a:txBody>
+                    <a:bodyPr/>
+                    <a:lstStyle/>
+                    <a:p>
+                      <a:pPr algn="ctr">
+                        <a:defRPr sz="1100" b="1">
+                          <a:solidFill>
+                            <a:srgbClr val="FFFFFF"/>
+                          </a:solidFill>
+                          <a:latin typeface="Arial"/>
+                        </a:defRPr>
+                      </a:pPr>
+                      <a:r>
+                        <a:t>Model Iteration</a:t>
+                      </a:r>
+                    </a:p>
+                  </a:txBody>
+                  <a:tcPr>
+                    <a:solidFill>
+                      <a:srgbClr val="1E3A8A"/>
+                    </a:solidFill>
+                  </a:tcPr>
+                </a:tc>
+                <a:tc>
+                  <a:txBody>
+                    <a:bodyPr/>
+                    <a:lstStyle/>
+                    <a:p>
+                      <a:pPr algn="ctr">
+                        <a:defRPr sz="1100" b="1">
+                          <a:solidFill>
+                            <a:srgbClr val="FFFFFF"/>
+                          </a:solidFill>
+                          <a:latin typeface="Arial"/>
+                        </a:defRPr>
+                      </a:pPr>
+                      <a:r>
+                        <a:t>Dataset / Setup</a:t>
+                      </a:r>
+                    </a:p>
+                  </a:txBody>
+                  <a:tcPr>
+                    <a:solidFill>
+                      <a:srgbClr val="1E3A8A"/>
+                    </a:solidFill>
+                  </a:tcPr>
+                </a:tc>
+                <a:tc>
+                  <a:txBody>
+                    <a:bodyPr/>
+                    <a:lstStyle/>
+                    <a:p>
+                      <a:pPr algn="ctr">
+                        <a:defRPr sz="1100" b="1">
+                          <a:solidFill>
+                            <a:srgbClr val="FFFFFF"/>
+                          </a:solidFill>
+                          <a:latin typeface="Arial"/>
+                        </a:defRPr>
+                      </a:pPr>
+                      <a:r>
+                        <a:t>Train Acc</a:t>
+                      </a:r>
+                    </a:p>
+                  </a:txBody>
+                  <a:tcPr>
+                    <a:solidFill>
+                      <a:srgbClr val="1E3A8A"/>
+                    </a:solidFill>
+                  </a:tcPr>
+                </a:tc>
+                <a:tc>
+                  <a:txBody>
+                    <a:bodyPr/>
+                    <a:lstStyle/>
+                    <a:p>
+                      <a:pPr algn="ctr">
+                        <a:defRPr sz="1100" b="1">
+                          <a:solidFill>
+                            <a:srgbClr val="FFFFFF"/>
+                          </a:solidFill>
+                          <a:latin typeface="Arial"/>
+                        </a:defRPr>
+                      </a:pPr>
+                      <a:r>
+                        <a:t>Val Acc</a:t>
+                      </a:r>
+                    </a:p>
+                  </a:txBody>
+                  <a:tcPr>
+                    <a:solidFill>
+                      <a:srgbClr val="1E3A8A"/>
+                    </a:solidFill>
+                  </a:tcPr>
+                </a:tc>
+                <a:tc>
+                  <a:txBody>
+                    <a:bodyPr/>
+                    <a:lstStyle/>
+                    <a:p>
+                      <a:pPr algn="ctr">
+                        <a:defRPr sz="1100" b="1">
+                          <a:solidFill>
+                            <a:srgbClr val="FFFFFF"/>
+                          </a:solidFill>
+                          <a:latin typeface="Arial"/>
+                        </a:defRPr>
+                      </a:pPr>
+                      <a:r>
+                        <a:t>Test Acc</a:t>
+                      </a:r>
+                    </a:p>
+                  </a:txBody>
+                  <a:tcPr>
+                    <a:solidFill>
+                      <a:srgbClr val="1E3A8A"/>
+                    </a:solidFill>
+                  </a:tcPr>
+                </a:tc>
+                <a:tc>
+                  <a:txBody>
+                    <a:bodyPr/>
+                    <a:lstStyle/>
+                    <a:p>
+                      <a:pPr algn="ctr">
+                        <a:defRPr sz="1100" b="1">
+                          <a:solidFill>
+                            <a:srgbClr val="FFFFFF"/>
+                          </a:solidFill>
+                          <a:latin typeface="Arial"/>
+                        </a:defRPr>
+                      </a:pPr>
+                      <a:r>
+                        <a:t>Weighted F1</a:t>
+                      </a:r>
+                    </a:p>
+                  </a:txBody>
+                  <a:tcPr>
+                    <a:solidFill>
+                      <a:srgbClr val="1E3A8A"/>
+                    </a:solidFill>
+                  </a:tcPr>
+                </a:tc>
+              </a:tr>
+              <a:tr h="762000">
+                <a:tc>
+                  <a:txBody>
+                    <a:bodyPr/>
+                    <a:lstStyle/>
+                    <a:p>
+                      <a:pPr algn="l">
+                        <a:defRPr sz="1050" b="0">
+                          <a:solidFill>
+                            <a:srgbClr val="0F172A"/>
+                          </a:solidFill>
+                          <a:latin typeface="Arial"/>
+                        </a:defRPr>
+                      </a:pPr>
+                      <a:r>
+                        <a:t>1. UCF-Crime 13-Class 3D CNN</a:t>
+                      </a:r>
+                    </a:p>
+                  </a:txBody>
+                  <a:tcPr>
+                    <a:solidFill>
+                      <a:srgbClr val="FFFFFF"/>
+                    </a:solidFill>
+                  </a:tcPr>
+                </a:tc>
+                <a:tc>
+                  <a:txBody>
+                    <a:bodyPr/>
+                    <a:lstStyle/>
+                    <a:p>
+                      <a:pPr algn="ctr">
+                        <a:defRPr sz="1050" b="0">
+                          <a:solidFill>
+                            <a:srgbClr val="0F172A"/>
+                          </a:solidFill>
+                          <a:latin typeface="Arial"/>
+                        </a:defRPr>
+                      </a:pPr>
+                      <a:r>
+                        <a:t>13 Legal Classes</a:t>
+                      </a:r>
+                    </a:p>
+                  </a:txBody>
+                  <a:tcPr>
+                    <a:solidFill>
+                      <a:srgbClr val="FFFFFF"/>
+                    </a:solidFill>
+                  </a:tcPr>
+                </a:tc>
+                <a:tc>
+                  <a:txBody>
+                    <a:bodyPr/>
+                    <a:lstStyle/>
+                    <a:p>
+                      <a:pPr algn="ctr">
+                        <a:defRPr sz="1050" b="0">
+                          <a:solidFill>
+                            <a:srgbClr val="0F172A"/>
+                          </a:solidFill>
+                          <a:latin typeface="Arial"/>
+                        </a:defRPr>
+                      </a:pPr>
+                      <a:r>
+                        <a:t>96.38%</a:t>
+                      </a:r>
+                    </a:p>
+                  </a:txBody>
+                  <a:tcPr>
+                    <a:solidFill>
+                      <a:srgbClr val="FFFFFF"/>
+                    </a:solidFill>
+                  </a:tcPr>
+                </a:tc>
+                <a:tc>
+                  <a:txBody>
+                    <a:bodyPr/>
+                    <a:lstStyle/>
+                    <a:p>
+                      <a:pPr algn="ctr">
+                        <a:defRPr sz="1050" b="0">
+                          <a:solidFill>
+                            <a:srgbClr val="0F172A"/>
+                          </a:solidFill>
+                          <a:latin typeface="Arial"/>
+                        </a:defRPr>
+                      </a:pPr>
+                      <a:r>
+                        <a:t>29.12%</a:t>
+                      </a:r>
+                    </a:p>
+                  </a:txBody>
+                  <a:tcPr>
+                    <a:solidFill>
+                      <a:srgbClr val="FFFFFF"/>
+                    </a:solidFill>
+                  </a:tcPr>
+                </a:tc>
+                <a:tc>
+                  <a:txBody>
+                    <a:bodyPr/>
+                    <a:lstStyle/>
+                    <a:p>
+                      <a:pPr algn="ctr">
+                        <a:defRPr sz="1050" b="0">
+                          <a:solidFill>
+                            <a:srgbClr val="0F172A"/>
+                          </a:solidFill>
+                          <a:latin typeface="Arial"/>
+                        </a:defRPr>
+                      </a:pPr>
+                      <a:r>
+                        <a:t>22.61%</a:t>
+                      </a:r>
+                    </a:p>
+                  </a:txBody>
+                  <a:tcPr>
+                    <a:solidFill>
+                      <a:srgbClr val="FFFFFF"/>
+                    </a:solidFill>
+                  </a:tcPr>
+                </a:tc>
+                <a:tc>
+                  <a:txBody>
+                    <a:bodyPr/>
+                    <a:lstStyle/>
+                    <a:p>
+                      <a:pPr algn="ctr">
+                        <a:defRPr sz="1050" b="0">
+                          <a:solidFill>
+                            <a:srgbClr val="0F172A"/>
+                          </a:solidFill>
+                          <a:latin typeface="Arial"/>
+                        </a:defRPr>
+                      </a:pPr>
+                      <a:r>
+                        <a:t>22.05%</a:t>
+                      </a:r>
+                    </a:p>
+                  </a:txBody>
+                  <a:tcPr>
+                    <a:solidFill>
+                      <a:srgbClr val="FFFFFF"/>
+                    </a:solidFill>
+                  </a:tcPr>
+                </a:tc>
+              </a:tr>
+              <a:tr h="762000">
+                <a:tc>
+                  <a:txBody>
+                    <a:bodyPr/>
+                    <a:lstStyle/>
+                    <a:p>
+                      <a:pPr algn="l">
+                        <a:defRPr sz="1050" b="0">
+                          <a:solidFill>
+                            <a:srgbClr val="0F172A"/>
+                          </a:solidFill>
+                          <a:latin typeface="Arial"/>
+                        </a:defRPr>
+                      </a:pPr>
+                      <a:r>
+                        <a:t>2. UCF-Crime 4-Action Cluster</a:t>
+                      </a:r>
+                    </a:p>
+                  </a:txBody>
+                  <a:tcPr>
+                    <a:solidFill>
+                      <a:srgbClr val="FFFFFF"/>
+                    </a:solidFill>
+                  </a:tcPr>
+                </a:tc>
+                <a:tc>
+                  <a:txBody>
+                    <a:bodyPr/>
+                    <a:lstStyle/>
+                    <a:p>
+                      <a:pPr algn="ctr">
+                        <a:defRPr sz="1050" b="0">
+                          <a:solidFill>
+                            <a:srgbClr val="0F172A"/>
+                          </a:solidFill>
+                          <a:latin typeface="Arial"/>
+                        </a:defRPr>
+                      </a:pPr>
+                      <a:r>
+                        <a:t>4 Action Groups</a:t>
+                      </a:r>
+                    </a:p>
+                  </a:txBody>
+                  <a:tcPr>
+                    <a:solidFill>
+                      <a:srgbClr val="FFFFFF"/>
+                    </a:solidFill>
+                  </a:tcPr>
+                </a:tc>
+                <a:tc>
+                  <a:txBody>
+                    <a:bodyPr/>
+                    <a:lstStyle/>
+                    <a:p>
+                      <a:pPr algn="ctr">
+                        <a:defRPr sz="1050" b="0">
+                          <a:solidFill>
+                            <a:srgbClr val="0F172A"/>
+                          </a:solidFill>
+                          <a:latin typeface="Arial"/>
+                        </a:defRPr>
+                      </a:pPr>
+                      <a:r>
+                        <a:t>98.62%</a:t>
+                      </a:r>
+                    </a:p>
+                  </a:txBody>
+                  <a:tcPr>
+                    <a:solidFill>
+                      <a:srgbClr val="FFFFFF"/>
+                    </a:solidFill>
+                  </a:tcPr>
+                </a:tc>
+                <a:tc>
+                  <a:txBody>
+                    <a:bodyPr/>
+                    <a:lstStyle/>
+                    <a:p>
+                      <a:pPr algn="ctr">
+                        <a:defRPr sz="1050" b="0">
+                          <a:solidFill>
+                            <a:srgbClr val="0F172A"/>
+                          </a:solidFill>
+                          <a:latin typeface="Arial"/>
+                        </a:defRPr>
+                      </a:pPr>
+                      <a:r>
+                        <a:t>56.05%</a:t>
+                      </a:r>
+                    </a:p>
+                  </a:txBody>
+                  <a:tcPr>
+                    <a:solidFill>
+                      <a:srgbClr val="FFFFFF"/>
+                    </a:solidFill>
+                  </a:tcPr>
+                </a:tc>
+                <a:tc>
+                  <a:txBody>
+                    <a:bodyPr/>
+                    <a:lstStyle/>
+                    <a:p>
+                      <a:pPr algn="ctr">
+                        <a:defRPr sz="1050" b="0">
+                          <a:solidFill>
+                            <a:srgbClr val="0F172A"/>
+                          </a:solidFill>
+                          <a:latin typeface="Arial"/>
+                        </a:defRPr>
+                      </a:pPr>
+                      <a:r>
+                        <a:t>52.37%</a:t>
+                      </a:r>
+                    </a:p>
+                  </a:txBody>
+                  <a:tcPr>
+                    <a:solidFill>
+                      <a:srgbClr val="FFFFFF"/>
+                    </a:solidFill>
+                  </a:tcPr>
+                </a:tc>
+                <a:tc>
+                  <a:txBody>
+                    <a:bodyPr/>
+                    <a:lstStyle/>
+                    <a:p>
+                      <a:pPr algn="ctr">
+                        <a:defRPr sz="1050" b="0">
+                          <a:solidFill>
+                            <a:srgbClr val="0F172A"/>
+                          </a:solidFill>
+                          <a:latin typeface="Arial"/>
+                        </a:defRPr>
+                      </a:pPr>
+                      <a:r>
+                        <a:t>51.20%</a:t>
+                      </a:r>
+                    </a:p>
+                  </a:txBody>
+                  <a:tcPr>
+                    <a:solidFill>
+                      <a:srgbClr val="FFFFFF"/>
+                    </a:solidFill>
+                  </a:tcPr>
+                </a:tc>
+              </a:tr>
+              <a:tr h="762000">
+                <a:tc>
+                  <a:txBody>
+                    <a:bodyPr/>
+                    <a:lstStyle/>
+                    <a:p>
+                      <a:pPr algn="l">
+                        <a:defRPr sz="1050" b="0">
+                          <a:solidFill>
+                            <a:srgbClr val="0F172A"/>
+                          </a:solidFill>
+                          <a:latin typeface="Arial"/>
+                        </a:defRPr>
+                      </a:pPr>
+                      <a:r>
+                        <a:t>3. XD Single-Slice ViT</a:t>
+                      </a:r>
+                    </a:p>
+                  </a:txBody>
+                  <a:tcPr>
+                    <a:solidFill>
+                      <a:srgbClr val="FFFFFF"/>
+                    </a:solidFill>
+                  </a:tcPr>
+                </a:tc>
+                <a:tc>
+                  <a:txBody>
+                    <a:bodyPr/>
+                    <a:lstStyle/>
+                    <a:p>
+                      <a:pPr algn="ctr">
+                        <a:defRPr sz="1050" b="0">
+                          <a:solidFill>
+                            <a:srgbClr val="0F172A"/>
+                          </a:solidFill>
+                          <a:latin typeface="Arial"/>
+                        </a:defRPr>
+                      </a:pPr>
+                      <a:r>
+                        <a:t>6 Action Classes</a:t>
+                      </a:r>
+                    </a:p>
+                  </a:txBody>
+                  <a:tcPr>
+                    <a:solidFill>
+                      <a:srgbClr val="FFFFFF"/>
+                    </a:solidFill>
+                  </a:tcPr>
+                </a:tc>
+                <a:tc>
+                  <a:txBody>
+                    <a:bodyPr/>
+                    <a:lstStyle/>
+                    <a:p>
+                      <a:pPr algn="ctr">
+                        <a:defRPr sz="1050" b="0">
+                          <a:solidFill>
+                            <a:srgbClr val="0F172A"/>
+                          </a:solidFill>
+                          <a:latin typeface="Arial"/>
+                        </a:defRPr>
+                      </a:pPr>
+                      <a:r>
+                        <a:t>72.99%</a:t>
+                      </a:r>
+                    </a:p>
+                  </a:txBody>
+                  <a:tcPr>
+                    <a:solidFill>
+                      <a:srgbClr val="FFFFFF"/>
+                    </a:solidFill>
+                  </a:tcPr>
+                </a:tc>
+                <a:tc>
+                  <a:txBody>
+                    <a:bodyPr/>
+                    <a:lstStyle/>
+                    <a:p>
+                      <a:pPr algn="ctr">
+                        <a:defRPr sz="1050" b="0">
+                          <a:solidFill>
+                            <a:srgbClr val="0F172A"/>
+                          </a:solidFill>
+                          <a:latin typeface="Arial"/>
+                        </a:defRPr>
+                      </a:pPr>
+                      <a:r>
+                        <a:t>66.82%</a:t>
+                      </a:r>
+                    </a:p>
+                  </a:txBody>
+                  <a:tcPr>
+                    <a:solidFill>
+                      <a:srgbClr val="FFFFFF"/>
+                    </a:solidFill>
+                  </a:tcPr>
+                </a:tc>
+                <a:tc>
+                  <a:txBody>
+                    <a:bodyPr/>
+                    <a:lstStyle/>
+                    <a:p>
+                      <a:pPr algn="ctr">
+                        <a:defRPr sz="1050" b="0">
+                          <a:solidFill>
+                            <a:srgbClr val="0F172A"/>
+                          </a:solidFill>
+                          <a:latin typeface="Arial"/>
+                        </a:defRPr>
+                      </a:pPr>
+                      <a:r>
+                        <a:t>71.23%</a:t>
+                      </a:r>
+                    </a:p>
+                  </a:txBody>
+                  <a:tcPr>
+                    <a:solidFill>
+                      <a:srgbClr val="FFFFFF"/>
+                    </a:solidFill>
+                  </a:tcPr>
+                </a:tc>
+                <a:tc>
+                  <a:txBody>
+                    <a:bodyPr/>
+                    <a:lstStyle/>
+                    <a:p>
+                      <a:pPr algn="ctr">
+                        <a:defRPr sz="1050" b="0">
+                          <a:solidFill>
+                            <a:srgbClr val="0F172A"/>
+                          </a:solidFill>
+                          <a:latin typeface="Arial"/>
+                        </a:defRPr>
+                      </a:pPr>
+                      <a:r>
+                        <a:t>71.41%</a:t>
+                      </a:r>
+                    </a:p>
+                  </a:txBody>
+                  <a:tcPr>
+                    <a:solidFill>
+                      <a:srgbClr val="FFFFFF"/>
+                    </a:solidFill>
+                  </a:tcPr>
+                </a:tc>
+              </a:tr>
+              <a:tr h="762000">
+                <a:tc>
+                  <a:txBody>
+                    <a:bodyPr/>
+                    <a:lstStyle/>
+                    <a:p>
+                      <a:pPr algn="l">
+                        <a:defRPr sz="1050" b="1">
+                          <a:solidFill>
+                            <a:srgbClr val="16A34A"/>
+                          </a:solidFill>
+                          <a:latin typeface="Arial"/>
+                        </a:defRPr>
+                      </a:pPr>
+                      <a:r>
+                        <a:t>4. Refined TSN-VideoViT (USM) 🏆</a:t>
+                      </a:r>
+                    </a:p>
+                  </a:txBody>
+                  <a:tcPr>
+                    <a:solidFill>
+                      <a:srgbClr val="F0FDF4"/>
+                    </a:solidFill>
+                  </a:tcPr>
+                </a:tc>
+                <a:tc>
+                  <a:txBody>
+                    <a:bodyPr/>
+                    <a:lstStyle/>
+                    <a:p>
+                      <a:pPr algn="ctr">
+                        <a:defRPr sz="1050" b="1">
+                          <a:solidFill>
+                            <a:srgbClr val="16A34A"/>
+                          </a:solidFill>
+                          <a:latin typeface="Arial"/>
+                        </a:defRPr>
+                      </a:pPr>
+                      <a:r>
+                        <a:t>6 Action Classes</a:t>
+                      </a:r>
+                    </a:p>
+                  </a:txBody>
+                  <a:tcPr>
+                    <a:solidFill>
+                      <a:srgbClr val="F0FDF4"/>
+                    </a:solidFill>
+                  </a:tcPr>
+                </a:tc>
+                <a:tc>
+                  <a:txBody>
+                    <a:bodyPr/>
+                    <a:lstStyle/>
+                    <a:p>
+                      <a:pPr algn="ctr">
+                        <a:defRPr sz="1050" b="1">
+                          <a:solidFill>
+                            <a:srgbClr val="16A34A"/>
+                          </a:solidFill>
+                          <a:latin typeface="Arial"/>
+                        </a:defRPr>
+                      </a:pPr>
+                      <a:r>
+                        <a:t>94.46%</a:t>
+                      </a:r>
+                    </a:p>
+                  </a:txBody>
+                  <a:tcPr>
+                    <a:solidFill>
+                      <a:srgbClr val="F0FDF4"/>
+                    </a:solidFill>
+                  </a:tcPr>
+                </a:tc>
+                <a:tc>
+                  <a:txBody>
+                    <a:bodyPr/>
+                    <a:lstStyle/>
+                    <a:p>
+                      <a:pPr algn="ctr">
+                        <a:defRPr sz="1050" b="1">
+                          <a:solidFill>
+                            <a:srgbClr val="16A34A"/>
+                          </a:solidFill>
+                          <a:latin typeface="Arial"/>
+                        </a:defRPr>
+                      </a:pPr>
+                      <a:r>
+                        <a:t>79.15%</a:t>
+                      </a:r>
+                    </a:p>
+                  </a:txBody>
+                  <a:tcPr>
+                    <a:solidFill>
+                      <a:srgbClr val="F0FDF4"/>
+                    </a:solidFill>
+                  </a:tcPr>
+                </a:tc>
+                <a:tc>
+                  <a:txBody>
+                    <a:bodyPr/>
+                    <a:lstStyle/>
+                    <a:p>
+                      <a:pPr algn="ctr">
+                        <a:defRPr sz="1050" b="1">
+                          <a:solidFill>
+                            <a:srgbClr val="16A34A"/>
+                          </a:solidFill>
+                          <a:latin typeface="Arial"/>
+                        </a:defRPr>
+                      </a:pPr>
+                      <a:r>
+                        <a:t>77.36%</a:t>
+                      </a:r>
+                    </a:p>
+                  </a:txBody>
+                  <a:tcPr>
+                    <a:solidFill>
+                      <a:srgbClr val="F0FDF4"/>
+                    </a:solidFill>
+                  </a:tcPr>
+                </a:tc>
+                <a:tc>
+                  <a:txBody>
+                    <a:bodyPr/>
+                    <a:lstStyle/>
+                    <a:p>
+                      <a:pPr algn="ctr">
+                        <a:defRPr sz="1050" b="1">
+                          <a:solidFill>
+                            <a:srgbClr val="16A34A"/>
+                          </a:solidFill>
+                          <a:latin typeface="Arial"/>
+                        </a:defRPr>
+                      </a:pPr>
+                      <a:r>
+                        <a:t>77.61%</a:t>
+                      </a:r>
+                    </a:p>
+                  </a:txBody>
+                  <a:tcPr>
+                    <a:solidFill>
+                      <a:srgbClr val="F0FDF4"/>
+                    </a:solidFill>
+                  </a:tcPr>
+                </a:tc>
+              </a:tr>
+              <a:tr h="762000">
+                <a:tc>
+                  <a:txBody>
+                    <a:bodyPr/>
+                    <a:lstStyle/>
+                    <a:p>
+                      <a:pPr algn="l">
+                        <a:defRPr sz="1050" b="0">
+                          <a:solidFill>
+                            <a:srgbClr val="0F172A"/>
+                          </a:solidFill>
+                          <a:latin typeface="Arial"/>
+                        </a:defRPr>
+                      </a:pPr>
+                      <a:r>
+                        <a:t>5. Dual-Stream Motion ViT</a:t>
+                      </a:r>
+                    </a:p>
+                  </a:txBody>
+                  <a:tcPr>
+                    <a:solidFill>
+                      <a:srgbClr val="FFFFFF"/>
+                    </a:solidFill>
+                  </a:tcPr>
+                </a:tc>
+                <a:tc>
+                  <a:txBody>
+                    <a:bodyPr/>
+                    <a:lstStyle/>
+                    <a:p>
+                      <a:pPr algn="ctr">
+                        <a:defRPr sz="1050" b="0">
+                          <a:solidFill>
+                            <a:srgbClr val="0F172A"/>
+                          </a:solidFill>
+                          <a:latin typeface="Arial"/>
+                        </a:defRPr>
+                      </a:pPr>
+                      <a:r>
+                        <a:t>Dual Stream Zoom</a:t>
+                      </a:r>
+                    </a:p>
+                  </a:txBody>
+                  <a:tcPr>
+                    <a:solidFill>
+                      <a:srgbClr val="FFFFFF"/>
+                    </a:solidFill>
+                  </a:tcPr>
+                </a:tc>
+                <a:tc>
+                  <a:txBody>
+                    <a:bodyPr/>
+                    <a:lstStyle/>
+                    <a:p>
+                      <a:pPr algn="ctr">
+                        <a:defRPr sz="1050" b="0">
+                          <a:solidFill>
+                            <a:srgbClr val="0F172A"/>
+                          </a:solidFill>
+                          <a:latin typeface="Arial"/>
+                        </a:defRPr>
+                      </a:pPr>
+                      <a:r>
+                        <a:t>96.24%</a:t>
+                      </a:r>
+                    </a:p>
+                  </a:txBody>
+                  <a:tcPr>
+                    <a:solidFill>
+                      <a:srgbClr val="FFFFFF"/>
+                    </a:solidFill>
+                  </a:tcPr>
+                </a:tc>
+                <a:tc>
+                  <a:txBody>
+                    <a:bodyPr/>
+                    <a:lstStyle/>
+                    <a:p>
+                      <a:pPr algn="ctr">
+                        <a:defRPr sz="1050" b="0">
+                          <a:solidFill>
+                            <a:srgbClr val="0F172A"/>
+                          </a:solidFill>
+                          <a:latin typeface="Arial"/>
+                        </a:defRPr>
+                      </a:pPr>
+                      <a:r>
+                        <a:t>76.78%</a:t>
+                      </a:r>
+                    </a:p>
+                  </a:txBody>
+                  <a:tcPr>
+                    <a:solidFill>
+                      <a:srgbClr val="FFFFFF"/>
+                    </a:solidFill>
+                  </a:tcPr>
+                </a:tc>
+                <a:tc>
+                  <a:txBody>
+                    <a:bodyPr/>
+                    <a:lstStyle/>
+                    <a:p>
+                      <a:pPr algn="ctr">
+                        <a:defRPr sz="1050" b="0">
+                          <a:solidFill>
+                            <a:srgbClr val="0F172A"/>
+                          </a:solidFill>
+                          <a:latin typeface="Arial"/>
+                        </a:defRPr>
+                      </a:pPr>
+                      <a:r>
+                        <a:t>77.04%</a:t>
+                      </a:r>
+                    </a:p>
+                  </a:txBody>
+                  <a:tcPr>
+                    <a:solidFill>
+                      <a:srgbClr val="FFFFFF"/>
+                    </a:solidFill>
+                  </a:tcPr>
+                </a:tc>
+                <a:tc>
+                  <a:txBody>
+                    <a:bodyPr/>
+                    <a:lstStyle/>
+                    <a:p>
+                      <a:pPr algn="ctr">
+                        <a:defRPr sz="1050" b="0">
+                          <a:solidFill>
+                            <a:srgbClr val="0F172A"/>
+                          </a:solidFill>
+                          <a:latin typeface="Arial"/>
+                        </a:defRPr>
+                      </a:pPr>
+                      <a:r>
+                        <a:t>77.31%</a:t>
+                      </a:r>
+                    </a:p>
+                  </a:txBody>
+                  <a:tcPr>
+                    <a:solidFill>
+                      <a:srgbClr val="FFFFFF"/>
+                    </a:solidFill>
+                  </a:tcPr>
+                </a:tc>
+              </a:tr>
+            </a:tbl>
+          </a:graphicData>
+        </a:graphic>
+      </p:graphicFrame>
+    </p:spTree>
+  </p:cSld>
+  <p:clrMapOvr>
+    <a:masterClrMapping/>
+  </p:clrMapOvr>
+</p:sld>
+</file>
+
+<file path=ppt/slides/slide9.xml><?xml version="1.0" encoding="utf-8"?>
+<p:sld xmlns:a="http://schemas.openxmlformats.org/drawingml/2006/main" xmlns:p="http://schemas.openxmlformats.org/presentationml/2006/main" xmlns:r="http://schemas.openxmlformats.org/officeDocument/2006/relationships">
+  <p:cSld>
+    <p:spTree>
+      <p:nvGrpSpPr>
+        <p:cNvPr id="1" name=""/>
+        <p:cNvGrpSpPr/>
+        <p:nvPr/>
+      </p:nvGrpSpPr>
+      <p:grpSpPr/>
+      <p:sp>
+        <p:nvSpPr>
+          <p:cNvPr id="2" name="TextBox 1"/>
+          <p:cNvSpPr txBox="1"/>
+          <p:nvPr/>
+        </p:nvSpPr>
+        <p:spPr>
+          <a:xfrm>
+            <a:off x="731520" y="365760"/>
+            <a:ext cx="10698480" cy="1005840"/>
+          </a:xfrm>
+          <a:prstGeom prst="rect">
+            <a:avLst/>
+          </a:prstGeom>
+          <a:noFill/>
+        </p:spPr>
+        <p:txBody>
+          <a:bodyPr wrap="square" lIns="0" tIns="0" rIns="0" bIns="0">
+            <a:spAutoFit/>
+          </a:bodyPr>
+          <a:lstStyle/>
+          <a:p>
+            <a:pPr>
+              <a:defRPr sz="1000" b="1">
+                <a:solidFill>
+                  <a:srgbClr val="1E3A8A"/>
+                </a:solidFill>
+                <a:latin typeface="Arial"/>
+              </a:defRPr>
+            </a:pPr>
+            <a:r>
+              <a:t>5. PHASE 2 CLASS ANALYSIS</a:t>
+            </a:r>
+          </a:p>
+          <a:p>
+            <a:pPr>
+              <a:defRPr sz="2200" b="1">
+                <a:solidFill>
+                  <a:srgbClr val="0F172A"/>
+                </a:solidFill>
+                <a:latin typeface="Arial"/>
+              </a:defRPr>
+            </a:pPr>
+            <a:r>
+              <a:t>Phase 2 Per-Class Breakdown &amp; Confusion Matrix Analysis</a:t>
             </a:r>
           </a:p>
         </p:txBody>
@@ -9755,363 +11082,6 @@
           </a:graphicData>
         </a:graphic>
       </p:graphicFrame>
-    </p:spTree>
-  </p:cSld>
-  <p:clrMapOvr>
-    <a:masterClrMapping/>
-  </p:clrMapOvr>
-</p:sld>
-</file>
-
-<file path=ppt/slides/slide9.xml><?xml version="1.0" encoding="utf-8"?>
-<p:sld xmlns:a="http://schemas.openxmlformats.org/drawingml/2006/main" xmlns:p="http://schemas.openxmlformats.org/presentationml/2006/main" xmlns:r="http://schemas.openxmlformats.org/officeDocument/2006/relationships">
-  <p:cSld>
-    <p:spTree>
-      <p:nvGrpSpPr>
-        <p:cNvPr id="1" name=""/>
-        <p:cNvGrpSpPr/>
-        <p:nvPr/>
-      </p:nvGrpSpPr>
-      <p:grpSpPr/>
-      <p:sp>
-        <p:nvSpPr>
-          <p:cNvPr id="2" name="TextBox 1"/>
-          <p:cNvSpPr txBox="1"/>
-          <p:nvPr/>
-        </p:nvSpPr>
-        <p:spPr>
-          <a:xfrm>
-            <a:off x="731520" y="365760"/>
-            <a:ext cx="10698480" cy="1005840"/>
-          </a:xfrm>
-          <a:prstGeom prst="rect">
-            <a:avLst/>
-          </a:prstGeom>
-          <a:noFill/>
-        </p:spPr>
-        <p:txBody>
-          <a:bodyPr wrap="square" lIns="0" tIns="0" rIns="0" bIns="0">
-            <a:spAutoFit/>
-          </a:bodyPr>
-          <a:lstStyle/>
-          <a:p>
-            <a:pPr>
-              <a:defRPr sz="1000" b="1">
-                <a:solidFill>
-                  <a:srgbClr val="1E3A8A"/>
-                </a:solidFill>
-                <a:latin typeface="Arial"/>
-              </a:defRPr>
-            </a:pPr>
-            <a:r>
-              <a:t>6. EVIDENCE LOCALIZATION</a:t>
-            </a:r>
-          </a:p>
-          <a:p>
-            <a:pPr>
-              <a:defRPr sz="2200" b="1">
-                <a:solidFill>
-                  <a:srgbClr val="0F172A"/>
-                </a:solidFill>
-                <a:latin typeface="Arial"/>
-              </a:defRPr>
-            </a:pPr>
-            <a:r>
-              <a:t>Phase 3A: YOLOv8 Weapon Detection &amp; Bayesian Fusion</a:t>
-            </a:r>
-          </a:p>
-        </p:txBody>
-      </p:sp>
-      <p:sp>
-        <p:nvSpPr>
-          <p:cNvPr id="3" name="Rounded Rectangle 2"/>
-          <p:cNvSpPr/>
-          <p:nvPr/>
-        </p:nvSpPr>
-        <p:spPr>
-          <a:xfrm>
-            <a:off x="731520" y="1463040"/>
-            <a:ext cx="5120640" cy="4754880"/>
-          </a:xfrm>
-          <a:prstGeom prst="roundRect">
-            <a:avLst/>
-          </a:prstGeom>
-          <a:solidFill>
-            <a:srgbClr val="F1F5F9"/>
-          </a:solidFill>
-          <a:ln w="12700">
-            <a:solidFill>
-              <a:srgbClr val="CBD5E1"/>
-            </a:solidFill>
-          </a:ln>
-        </p:spPr>
-        <p:style>
-          <a:lnRef idx="1">
-            <a:schemeClr val="accent1"/>
-          </a:lnRef>
-          <a:fillRef idx="3">
-            <a:schemeClr val="accent1"/>
-          </a:fillRef>
-          <a:effectRef idx="2">
-            <a:schemeClr val="accent1"/>
-          </a:effectRef>
-          <a:fontRef idx="minor">
-            <a:schemeClr val="lt1"/>
-          </a:fontRef>
-        </p:style>
-        <p:txBody>
-          <a:bodyPr rtlCol="0" anchor="ctr"/>
-          <a:lstStyle/>
-          <a:p>
-            <a:pPr algn="ctr"/>
-          </a:p>
-        </p:txBody>
-      </p:sp>
-      <p:sp>
-        <p:nvSpPr>
-          <p:cNvPr id="4" name="TextBox 3"/>
-          <p:cNvSpPr txBox="1"/>
-          <p:nvPr/>
-        </p:nvSpPr>
-        <p:spPr>
-          <a:xfrm>
-            <a:off x="1005840" y="1737360"/>
-            <a:ext cx="4572000" cy="4206240"/>
-          </a:xfrm>
-          <a:prstGeom prst="rect">
-            <a:avLst/>
-          </a:prstGeom>
-          <a:noFill/>
-        </p:spPr>
-        <p:txBody>
-          <a:bodyPr wrap="square">
-            <a:spAutoFit/>
-          </a:bodyPr>
-          <a:lstStyle/>
-          <a:p>
-            <a:pPr>
-              <a:defRPr sz="1500" b="1">
-                <a:solidFill>
-                  <a:srgbClr val="DC2626"/>
-                </a:solidFill>
-                <a:latin typeface="Arial"/>
-              </a:defRPr>
-            </a:pPr>
-            <a:r>
-              <a:t>🔪 Real-Time Lethal Weapon Detection</a:t>
-            </a:r>
-          </a:p>
-          <a:p>
-            <a:pPr>
-              <a:spcBef>
-                <a:spcPts val="800"/>
-              </a:spcBef>
-              <a:defRPr sz="1150">
-                <a:solidFill>
-                  <a:srgbClr val="0F172A"/>
-                </a:solidFill>
-                <a:latin typeface="Arial"/>
-              </a:defRPr>
-            </a:pPr>
-            <a:r>
-              <a:t>• Model: Ultralytics YOLOv8 real-time anchor-free detector with Path Aggregation Network (PANet).</a:t>
-            </a:r>
-          </a:p>
-          <a:p>
-            <a:pPr>
-              <a:spcBef>
-                <a:spcPts val="800"/>
-              </a:spcBef>
-              <a:defRPr sz="1150">
-                <a:solidFill>
-                  <a:srgbClr val="0F172A"/>
-                </a:solidFill>
-                <a:latin typeface="Arial"/>
-              </a:defRPr>
-            </a:pPr>
-            <a:r>
-              <a:t>• Target Classes: Firearms, Pistols, Revolvers, Knives, Daggers, Machetes, Baseball Bats.</a:t>
-            </a:r>
-          </a:p>
-          <a:p>
-            <a:pPr>
-              <a:spcBef>
-                <a:spcPts val="800"/>
-              </a:spcBef>
-              <a:defRPr sz="1150">
-                <a:solidFill>
-                  <a:srgbClr val="0F172A"/>
-                </a:solidFill>
-                <a:latin typeface="Arial"/>
-              </a:defRPr>
-            </a:pPr>
-            <a:r>
-              <a:t>• Keyframe Analysis: Evaluates top 3 peak motion keyframes when Phase 1 gate triggers threat.</a:t>
-            </a:r>
-          </a:p>
-          <a:p>
-            <a:pPr>
-              <a:spcBef>
-                <a:spcPts val="800"/>
-              </a:spcBef>
-              <a:defRPr sz="1150">
-                <a:solidFill>
-                  <a:srgbClr val="0F172A"/>
-                </a:solidFill>
-                <a:latin typeface="Arial"/>
-              </a:defRPr>
-            </a:pPr>
-            <a:r>
-              <a:t>• Forensic Evidence Cropping: Weapon bounding boxes are saved as isolated images in `incident_evidence/weapon_crops/`.</a:t>
-            </a:r>
-          </a:p>
-        </p:txBody>
-      </p:sp>
-      <p:sp>
-        <p:nvSpPr>
-          <p:cNvPr id="5" name="Rounded Rectangle 4"/>
-          <p:cNvSpPr/>
-          <p:nvPr/>
-        </p:nvSpPr>
-        <p:spPr>
-          <a:xfrm>
-            <a:off x="6309360" y="1463040"/>
-            <a:ext cx="5120640" cy="4754880"/>
-          </a:xfrm>
-          <a:prstGeom prst="roundRect">
-            <a:avLst/>
-          </a:prstGeom>
-          <a:solidFill>
-            <a:srgbClr val="F1F5F9"/>
-          </a:solidFill>
-          <a:ln w="12700">
-            <a:solidFill>
-              <a:srgbClr val="CBD5E1"/>
-            </a:solidFill>
-          </a:ln>
-        </p:spPr>
-        <p:style>
-          <a:lnRef idx="1">
-            <a:schemeClr val="accent1"/>
-          </a:lnRef>
-          <a:fillRef idx="3">
-            <a:schemeClr val="accent1"/>
-          </a:fillRef>
-          <a:effectRef idx="2">
-            <a:schemeClr val="accent1"/>
-          </a:effectRef>
-          <a:fontRef idx="minor">
-            <a:schemeClr val="lt1"/>
-          </a:fontRef>
-        </p:style>
-        <p:txBody>
-          <a:bodyPr rtlCol="0" anchor="ctr"/>
-          <a:lstStyle/>
-          <a:p>
-            <a:pPr algn="ctr"/>
-          </a:p>
-        </p:txBody>
-      </p:sp>
-      <p:sp>
-        <p:nvSpPr>
-          <p:cNvPr id="6" name="TextBox 5"/>
-          <p:cNvSpPr txBox="1"/>
-          <p:nvPr/>
-        </p:nvSpPr>
-        <p:spPr>
-          <a:xfrm>
-            <a:off x="6583680" y="1737360"/>
-            <a:ext cx="4572000" cy="4206240"/>
-          </a:xfrm>
-          <a:prstGeom prst="rect">
-            <a:avLst/>
-          </a:prstGeom>
-          <a:noFill/>
-        </p:spPr>
-        <p:txBody>
-          <a:bodyPr wrap="square">
-            <a:spAutoFit/>
-          </a:bodyPr>
-          <a:lstStyle/>
-          <a:p>
-            <a:pPr>
-              <a:defRPr sz="1500" b="1">
-                <a:solidFill>
-                  <a:srgbClr val="1E3A8A"/>
-                </a:solidFill>
-                <a:latin typeface="Arial"/>
-              </a:defRPr>
-            </a:pPr>
-            <a:r>
-              <a:t>⚡ Cross-Modal Decision Fusion</a:t>
-            </a:r>
-          </a:p>
-          <a:p>
-            <a:pPr>
-              <a:spcBef>
-                <a:spcPts val="800"/>
-              </a:spcBef>
-              <a:defRPr sz="1150">
-                <a:solidFill>
-                  <a:srgbClr val="0F172A"/>
-                </a:solidFill>
-                <a:latin typeface="Arial"/>
-              </a:defRPr>
-            </a:pPr>
-            <a:r>
-              <a:t>• The Shooting Ambiguity Problem: In distant CCTV, small handguns visually resemble fistfights.</a:t>
-            </a:r>
-          </a:p>
-          <a:p>
-            <a:pPr>
-              <a:spcBef>
-                <a:spcPts val="800"/>
-              </a:spcBef>
-              <a:defRPr sz="1150">
-                <a:solidFill>
-                  <a:srgbClr val="0F172A"/>
-                </a:solidFill>
-                <a:latin typeface="Arial"/>
-              </a:defRPr>
-            </a:pPr>
-            <a:r>
-              <a:t>• Bayesian Cross-Modal Fusion: If YOLOv8 detects a firearm with confidence &gt; 0.40, Phase 2 shooting confidence is elevated to &gt; 95%.</a:t>
-            </a:r>
-          </a:p>
-          <a:p>
-            <a:pPr>
-              <a:spcBef>
-                <a:spcPts val="800"/>
-              </a:spcBef>
-              <a:defRPr sz="1150">
-                <a:solidFill>
-                  <a:srgbClr val="0F172A"/>
-                </a:solidFill>
-                <a:latin typeface="Arial"/>
-              </a:defRPr>
-            </a:pPr>
-            <a:r>
-              <a:t>• Armed Brawl Reclassification: If bladed weapons are detected during a physical fight, the event is re-classified as 'Armed Assault'.</a:t>
-            </a:r>
-          </a:p>
-          <a:p>
-            <a:pPr>
-              <a:spcBef>
-                <a:spcPts val="800"/>
-              </a:spcBef>
-              <a:defRPr sz="1150">
-                <a:solidFill>
-                  <a:srgbClr val="0F172A"/>
-                </a:solidFill>
-                <a:latin typeface="Arial"/>
-              </a:defRPr>
-            </a:pPr>
-            <a:r>
-              <a:t>• Performance Impact: Multi-modal fusion elevates real-world shooting/armed precision from 51.9% to over 95%.</a:t>
-            </a:r>
-          </a:p>
-        </p:txBody>
-      </p:sp>
     </p:spTree>
   </p:cSld>
   <p:clrMapOvr>
